--- a/defence/vkr_defense.pptx
+++ b/defence/vkr_defense.pptx
@@ -5,7 +5,7 @@
     <p:sldMasterId id="2147483648" r:id="rId1"/>
   </p:sldMasterIdLst>
   <p:notesMasterIdLst>
-    <p:notesMasterId r:id="rId16"/>
+    <p:notesMasterId r:id="rId17"/>
   </p:notesMasterIdLst>
   <p:sldIdLst>
     <p:sldId id="256" r:id="rId2"/>
@@ -20,8 +20,9 @@
     <p:sldId id="268" r:id="rId11"/>
     <p:sldId id="264" r:id="rId12"/>
     <p:sldId id="265" r:id="rId13"/>
-    <p:sldId id="266" r:id="rId14"/>
-    <p:sldId id="267" r:id="rId15"/>
+    <p:sldId id="270" r:id="rId14"/>
+    <p:sldId id="266" r:id="rId15"/>
+    <p:sldId id="267" r:id="rId16"/>
   </p:sldIdLst>
   <p:sldSz cx="9144000" cy="5143500" type="screen16x9"/>
   <p:notesSz cx="5143500" cy="9144000"/>
@@ -615,7 +616,13 @@
   <p:cSld>
     <p:spTree>
       <p:nvGrpSpPr>
-        <p:cNvPr id="1" name=""/>
+        <p:cNvPr id="1" name="">
+          <a:extLst>
+            <a:ext uri="{FF2B5EF4-FFF2-40B4-BE49-F238E27FC236}">
+              <a16:creationId xmlns:a16="http://schemas.microsoft.com/office/drawing/2014/main" id="{0D4C86B6-285A-1971-FE6D-AD0AA0B17A01}"/>
+            </a:ext>
+          </a:extLst>
+        </p:cNvPr>
         <p:cNvGrpSpPr/>
         <p:nvPr/>
       </p:nvGrpSpPr>
@@ -629,7 +636,13 @@
       </p:grpSpPr>
       <p:sp>
         <p:nvSpPr>
-          <p:cNvPr id="2" name="Slide Image Placeholder 1"/>
+          <p:cNvPr id="2" name="Slide Image Placeholder 1">
+            <a:extLst>
+              <a:ext uri="{FF2B5EF4-FFF2-40B4-BE49-F238E27FC236}">
+                <a16:creationId xmlns:a16="http://schemas.microsoft.com/office/drawing/2014/main" id="{DA4433C2-64E5-411C-038D-40361C693E1A}"/>
+              </a:ext>
+            </a:extLst>
+          </p:cNvPr>
           <p:cNvSpPr>
             <a:spLocks noGrp="1" noRot="1" noChangeAspect="1"/>
           </p:cNvSpPr>
@@ -641,7 +654,13 @@
       </p:sp>
       <p:sp>
         <p:nvSpPr>
-          <p:cNvPr id="3" name="Notes Placeholder 2"/>
+          <p:cNvPr id="3" name="Notes Placeholder 2">
+            <a:extLst>
+              <a:ext uri="{FF2B5EF4-FFF2-40B4-BE49-F238E27FC236}">
+                <a16:creationId xmlns:a16="http://schemas.microsoft.com/office/drawing/2014/main" id="{77CF6150-D678-BC88-86CD-8C160A24B465}"/>
+              </a:ext>
+            </a:extLst>
+          </p:cNvPr>
           <p:cNvSpPr>
             <a:spLocks noGrp="1"/>
           </p:cNvSpPr>
@@ -660,7 +679,13 @@
       </p:sp>
       <p:sp>
         <p:nvSpPr>
-          <p:cNvPr id="4" name="Slide Number Placeholder 3"/>
+          <p:cNvPr id="4" name="Slide Number Placeholder 3">
+            <a:extLst>
+              <a:ext uri="{FF2B5EF4-FFF2-40B4-BE49-F238E27FC236}">
+                <a16:creationId xmlns:a16="http://schemas.microsoft.com/office/drawing/2014/main" id="{BFCF45BE-2625-641E-A540-B5FA2EE08027}"/>
+              </a:ext>
+            </a:extLst>
+          </p:cNvPr>
           <p:cNvSpPr>
             <a:spLocks noGrp="1"/>
           </p:cNvSpPr>
@@ -684,7 +709,7 @@
     </p:spTree>
     <p:extLst>
       <p:ext uri="{BB962C8B-B14F-4D97-AF65-F5344CB8AC3E}">
-        <p14:creationId xmlns:p14="http://schemas.microsoft.com/office/powerpoint/2010/main" val="1024086991"/>
+        <p14:creationId xmlns:p14="http://schemas.microsoft.com/office/powerpoint/2010/main" val="2104822352"/>
       </p:ext>
     </p:extLst>
   </p:cSld>
@@ -760,6 +785,90 @@
             <a:fld id="{F7021451-1387-4CA6-816F-3879F97B5CBC}" type="slidenum">
               <a:rPr lang="en-US"/>
               <a:t>14</a:t>
+            </a:fld>
+            <a:endParaRPr lang="en-US"/>
+          </a:p>
+        </p:txBody>
+      </p:sp>
+    </p:spTree>
+    <p:extLst>
+      <p:ext uri="{BB962C8B-B14F-4D97-AF65-F5344CB8AC3E}">
+        <p14:creationId xmlns:p14="http://schemas.microsoft.com/office/powerpoint/2010/main" val="1024086991"/>
+      </p:ext>
+    </p:extLst>
+  </p:cSld>
+  <p:clrMapOvr>
+    <a:masterClrMapping/>
+  </p:clrMapOvr>
+</p:notes>
+</file>
+
+<file path=ppt/notesSlides/notesSlide15.xml><?xml version="1.0" encoding="utf-8"?>
+<p:notes xmlns:a="http://schemas.openxmlformats.org/drawingml/2006/main" xmlns:r="http://schemas.openxmlformats.org/officeDocument/2006/relationships" xmlns:p="http://schemas.openxmlformats.org/presentationml/2006/main">
+  <p:cSld>
+    <p:spTree>
+      <p:nvGrpSpPr>
+        <p:cNvPr id="1" name=""/>
+        <p:cNvGrpSpPr/>
+        <p:nvPr/>
+      </p:nvGrpSpPr>
+      <p:grpSpPr>
+        <a:xfrm>
+          <a:off x="0" y="0"/>
+          <a:ext cx="0" cy="0"/>
+          <a:chOff x="0" y="0"/>
+          <a:chExt cx="0" cy="0"/>
+        </a:xfrm>
+      </p:grpSpPr>
+      <p:sp>
+        <p:nvSpPr>
+          <p:cNvPr id="2" name="Slide Image Placeholder 1"/>
+          <p:cNvSpPr>
+            <a:spLocks noGrp="1" noRot="1" noChangeAspect="1"/>
+          </p:cNvSpPr>
+          <p:nvPr>
+            <p:ph type="sldImg"/>
+          </p:nvPr>
+        </p:nvSpPr>
+        <p:spPr/>
+      </p:sp>
+      <p:sp>
+        <p:nvSpPr>
+          <p:cNvPr id="3" name="Notes Placeholder 2"/>
+          <p:cNvSpPr>
+            <a:spLocks noGrp="1"/>
+          </p:cNvSpPr>
+          <p:nvPr>
+            <p:ph type="body" idx="1"/>
+          </p:nvPr>
+        </p:nvSpPr>
+        <p:spPr/>
+        <p:txBody>
+          <a:bodyPr/>
+          <a:lstStyle/>
+          <a:p>
+            <a:endParaRPr lang="en-US" dirty="0"/>
+          </a:p>
+        </p:txBody>
+      </p:sp>
+      <p:sp>
+        <p:nvSpPr>
+          <p:cNvPr id="4" name="Slide Number Placeholder 3"/>
+          <p:cNvSpPr>
+            <a:spLocks noGrp="1"/>
+          </p:cNvSpPr>
+          <p:nvPr>
+            <p:ph type="sldNum" sz="quarter" idx="10"/>
+          </p:nvPr>
+        </p:nvSpPr>
+        <p:spPr/>
+        <p:txBody>
+          <a:bodyPr/>
+          <a:lstStyle/>
+          <a:p>
+            <a:fld id="{F7021451-1387-4CA6-816F-3879F97B5CBC}" type="slidenum">
+              <a:rPr lang="en-US"/>
+              <a:t>15</a:t>
             </a:fld>
             <a:endParaRPr lang="en-US"/>
           </a:p>
@@ -2449,7 +2558,7 @@
                 <a:ea typeface="Calibri" pitchFamily="34" charset="-122"/>
                 <a:cs typeface="Calibri" pitchFamily="34" charset="-120"/>
               </a:rPr>
-              <a:t>Sentence-BERT [16] для извлечения эмбеддингов</a:t>
+              <a:t>Sentence-BERT для извлечения эмбеддингов</a:t>
             </a:r>
             <a:endParaRPr lang="en-US" sz="1200" dirty="0"/>
           </a:p>
@@ -4152,7 +4261,51 @@
                 <a:ea typeface="Calibri" pitchFamily="34" charset="-122"/>
                 <a:cs typeface="Calibri" pitchFamily="34" charset="-120"/>
               </a:rPr>
-              <a:t> сравнение подходов</a:t>
+              <a:t> </a:t>
+            </a:r>
+            <a:r>
+              <a:rPr lang="en-US" sz="2400" b="1" dirty="0" err="1">
+                <a:solidFill>
+                  <a:srgbClr val="FFFFFF"/>
+                </a:solidFill>
+                <a:latin typeface="Calibri" pitchFamily="34" charset="0"/>
+                <a:ea typeface="Calibri" pitchFamily="34" charset="-122"/>
+                <a:cs typeface="Calibri" pitchFamily="34" charset="-120"/>
+              </a:rPr>
+              <a:t>сравнение</a:t>
+            </a:r>
+            <a:r>
+              <a:rPr lang="en-US" sz="2400" b="1" dirty="0">
+                <a:solidFill>
+                  <a:srgbClr val="FFFFFF"/>
+                </a:solidFill>
+                <a:latin typeface="Calibri" pitchFamily="34" charset="0"/>
+                <a:ea typeface="Calibri" pitchFamily="34" charset="-122"/>
+                <a:cs typeface="Calibri" pitchFamily="34" charset="-120"/>
+              </a:rPr>
+              <a:t> </a:t>
+            </a:r>
+            <a:r>
+              <a:rPr lang="en-US" sz="2400" b="1" dirty="0" err="1">
+                <a:solidFill>
+                  <a:srgbClr val="FFFFFF"/>
+                </a:solidFill>
+                <a:latin typeface="Calibri" pitchFamily="34" charset="0"/>
+                <a:ea typeface="Calibri" pitchFamily="34" charset="-122"/>
+                <a:cs typeface="Calibri" pitchFamily="34" charset="-120"/>
+              </a:rPr>
+              <a:t>подходов</a:t>
+            </a:r>
+            <a:r>
+              <a:rPr lang="ru-RU" sz="2400" b="1" dirty="0">
+                <a:solidFill>
+                  <a:srgbClr val="FFFFFF"/>
+                </a:solidFill>
+                <a:latin typeface="Calibri" pitchFamily="34" charset="0"/>
+                <a:ea typeface="Calibri" pitchFamily="34" charset="-122"/>
+                <a:cs typeface="Calibri" pitchFamily="34" charset="-120"/>
+              </a:rPr>
+              <a:t> на маскированных данных</a:t>
             </a:r>
             <a:endParaRPr lang="en-US" sz="2400" dirty="0"/>
           </a:p>
@@ -6508,6 +6661,2540 @@
 
 <file path=ppt/slides/slide13.xml><?xml version="1.0" encoding="utf-8"?>
 <p:sld xmlns:a="http://schemas.openxmlformats.org/drawingml/2006/main" xmlns:r="http://schemas.openxmlformats.org/officeDocument/2006/relationships" xmlns:p="http://schemas.openxmlformats.org/presentationml/2006/main">
+  <p:cSld>
+    <p:bg>
+      <p:bgPr>
+        <a:solidFill>
+          <a:srgbClr val="FFFFFF"/>
+        </a:solidFill>
+        <a:effectLst/>
+      </p:bgPr>
+    </p:bg>
+    <p:spTree>
+      <p:nvGrpSpPr>
+        <p:cNvPr id="1" name="">
+          <a:extLst>
+            <a:ext uri="{FF2B5EF4-FFF2-40B4-BE49-F238E27FC236}">
+              <a16:creationId xmlns:a16="http://schemas.microsoft.com/office/drawing/2014/main" id="{37EF4927-CCEE-82A9-82F3-D4F3A19C2E87}"/>
+            </a:ext>
+          </a:extLst>
+        </p:cNvPr>
+        <p:cNvGrpSpPr/>
+        <p:nvPr/>
+      </p:nvGrpSpPr>
+      <p:grpSpPr>
+        <a:xfrm>
+          <a:off x="0" y="0"/>
+          <a:ext cx="0" cy="0"/>
+          <a:chOff x="0" y="0"/>
+          <a:chExt cx="0" cy="0"/>
+        </a:xfrm>
+      </p:grpSpPr>
+      <p:sp>
+        <p:nvSpPr>
+          <p:cNvPr id="2" name="Shape 0">
+            <a:extLst>
+              <a:ext uri="{FF2B5EF4-FFF2-40B4-BE49-F238E27FC236}">
+                <a16:creationId xmlns:a16="http://schemas.microsoft.com/office/drawing/2014/main" id="{FE699AC0-2DB3-F429-6E92-A73BD8447EFD}"/>
+              </a:ext>
+            </a:extLst>
+          </p:cNvPr>
+          <p:cNvSpPr/>
+          <p:nvPr/>
+        </p:nvSpPr>
+        <p:spPr>
+          <a:xfrm>
+            <a:off x="0" y="0"/>
+            <a:ext cx="9144000" cy="777240"/>
+          </a:xfrm>
+          <a:prstGeom prst="rect">
+            <a:avLst/>
+          </a:prstGeom>
+          <a:solidFill>
+            <a:srgbClr val="0B5394"/>
+          </a:solidFill>
+          <a:ln/>
+        </p:spPr>
+      </p:sp>
+      <p:sp>
+        <p:nvSpPr>
+          <p:cNvPr id="3" name="Text 1">
+            <a:extLst>
+              <a:ext uri="{FF2B5EF4-FFF2-40B4-BE49-F238E27FC236}">
+                <a16:creationId xmlns:a16="http://schemas.microsoft.com/office/drawing/2014/main" id="{0A8F3F62-537E-00B2-8C06-7E5B3E138DD0}"/>
+              </a:ext>
+            </a:extLst>
+          </p:cNvPr>
+          <p:cNvSpPr/>
+          <p:nvPr/>
+        </p:nvSpPr>
+        <p:spPr>
+          <a:xfrm>
+            <a:off x="365760" y="0"/>
+            <a:ext cx="8412480" cy="777240"/>
+          </a:xfrm>
+          <a:prstGeom prst="rect">
+            <a:avLst/>
+          </a:prstGeom>
+          <a:noFill/>
+          <a:ln/>
+        </p:spPr>
+        <p:txBody>
+          <a:bodyPr wrap="square" lIns="0" tIns="0" rIns="0" bIns="0" rtlCol="0" anchor="ctr"/>
+          <a:lstStyle/>
+          <a:p>
+            <a:pPr marL="0" indent="0">
+              <a:buNone/>
+            </a:pPr>
+            <a:r>
+              <a:rPr lang="en-US" sz="2400" b="1" dirty="0" err="1">
+                <a:solidFill>
+                  <a:srgbClr val="FFFFFF"/>
+                </a:solidFill>
+                <a:latin typeface="Calibri" pitchFamily="34" charset="0"/>
+                <a:ea typeface="Calibri" pitchFamily="34" charset="-122"/>
+                <a:cs typeface="Calibri" pitchFamily="34" charset="-120"/>
+              </a:rPr>
+              <a:t>Сводное</a:t>
+            </a:r>
+            <a:r>
+              <a:rPr lang="en-US" sz="2400" b="1" dirty="0">
+                <a:solidFill>
+                  <a:srgbClr val="FFFFFF"/>
+                </a:solidFill>
+                <a:latin typeface="Calibri" pitchFamily="34" charset="0"/>
+                <a:ea typeface="Calibri" pitchFamily="34" charset="-122"/>
+                <a:cs typeface="Calibri" pitchFamily="34" charset="-120"/>
+              </a:rPr>
+              <a:t> </a:t>
+            </a:r>
+            <a:r>
+              <a:rPr lang="en-US" sz="2400" b="1" dirty="0" err="1">
+                <a:solidFill>
+                  <a:srgbClr val="FFFFFF"/>
+                </a:solidFill>
+                <a:latin typeface="Calibri" pitchFamily="34" charset="0"/>
+                <a:ea typeface="Calibri" pitchFamily="34" charset="-122"/>
+                <a:cs typeface="Calibri" pitchFamily="34" charset="-120"/>
+              </a:rPr>
+              <a:t>сравнение</a:t>
+            </a:r>
+            <a:r>
+              <a:rPr lang="en-US" sz="2400" b="1" dirty="0">
+                <a:solidFill>
+                  <a:srgbClr val="FFFFFF"/>
+                </a:solidFill>
+                <a:latin typeface="Calibri" pitchFamily="34" charset="0"/>
+                <a:ea typeface="Calibri" pitchFamily="34" charset="-122"/>
+                <a:cs typeface="Calibri" pitchFamily="34" charset="-120"/>
+              </a:rPr>
+              <a:t> </a:t>
+            </a:r>
+            <a:r>
+              <a:rPr lang="en-US" sz="2400" b="1" dirty="0" err="1">
+                <a:solidFill>
+                  <a:srgbClr val="FFFFFF"/>
+                </a:solidFill>
+                <a:latin typeface="Calibri" pitchFamily="34" charset="0"/>
+                <a:ea typeface="Calibri" pitchFamily="34" charset="-122"/>
+                <a:cs typeface="Calibri" pitchFamily="34" charset="-120"/>
+              </a:rPr>
+              <a:t>подходов</a:t>
+            </a:r>
+            <a:r>
+              <a:rPr lang="ru-RU" sz="2400" b="1" dirty="0">
+                <a:solidFill>
+                  <a:srgbClr val="FFFFFF"/>
+                </a:solidFill>
+                <a:latin typeface="Calibri" pitchFamily="34" charset="0"/>
+                <a:ea typeface="Calibri" pitchFamily="34" charset="-122"/>
+                <a:cs typeface="Calibri" pitchFamily="34" charset="-120"/>
+              </a:rPr>
+              <a:t> на закрытых данных</a:t>
+            </a:r>
+            <a:endParaRPr lang="en-US" sz="2400" dirty="0"/>
+          </a:p>
+        </p:txBody>
+      </p:sp>
+      <p:sp>
+        <p:nvSpPr>
+          <p:cNvPr id="4" name="Text 2">
+            <a:extLst>
+              <a:ext uri="{FF2B5EF4-FFF2-40B4-BE49-F238E27FC236}">
+                <a16:creationId xmlns:a16="http://schemas.microsoft.com/office/drawing/2014/main" id="{A896C408-59C1-9DBD-5192-B10731934532}"/>
+              </a:ext>
+            </a:extLst>
+          </p:cNvPr>
+          <p:cNvSpPr/>
+          <p:nvPr/>
+        </p:nvSpPr>
+        <p:spPr>
+          <a:xfrm>
+            <a:off x="365760" y="960120"/>
+            <a:ext cx="8412480" cy="274320"/>
+          </a:xfrm>
+          <a:prstGeom prst="rect">
+            <a:avLst/>
+          </a:prstGeom>
+          <a:noFill/>
+          <a:ln/>
+        </p:spPr>
+        <p:txBody>
+          <a:bodyPr wrap="square" lIns="0" tIns="0" rIns="0" bIns="0" rtlCol="0" anchor="ctr"/>
+          <a:lstStyle/>
+          <a:p>
+            <a:pPr marL="0" indent="0">
+              <a:buNone/>
+            </a:pPr>
+            <a:r>
+              <a:rPr lang="en-US" sz="1200" i="1" dirty="0">
+                <a:solidFill>
+                  <a:srgbClr val="5C5C5C"/>
+                </a:solidFill>
+                <a:latin typeface="Calibri" pitchFamily="34" charset="0"/>
+                <a:ea typeface="Calibri" pitchFamily="34" charset="-122"/>
+                <a:cs typeface="Calibri" pitchFamily="34" charset="-120"/>
+              </a:rPr>
+              <a:t>Лучшие конфигурации по каждой метрике, train/test без аугментации</a:t>
+            </a:r>
+            <a:endParaRPr lang="en-US" sz="1200" dirty="0"/>
+          </a:p>
+        </p:txBody>
+      </p:sp>
+      <p:graphicFrame>
+        <p:nvGraphicFramePr>
+          <p:cNvPr id="11" name="Table 0">
+            <a:extLst>
+              <a:ext uri="{FF2B5EF4-FFF2-40B4-BE49-F238E27FC236}">
+                <a16:creationId xmlns:a16="http://schemas.microsoft.com/office/drawing/2014/main" id="{15E484B0-EA91-33FA-9322-D110A4D5EC19}"/>
+              </a:ext>
+            </a:extLst>
+          </p:cNvPr>
+          <p:cNvGraphicFramePr>
+            <a:graphicFrameLocks noGrp="1"/>
+          </p:cNvGraphicFramePr>
+          <p:nvPr/>
+        </p:nvGraphicFramePr>
+        <p:xfrm>
+          <a:off x="365760" y="1371600"/>
+          <a:ext cx="8412480" cy="2304288"/>
+        </p:xfrm>
+        <a:graphic>
+          <a:graphicData uri="http://schemas.openxmlformats.org/drawingml/2006/table">
+            <a:tbl>
+              <a:tblPr/>
+              <a:tblGrid>
+                <a:gridCol w="1554480">
+                  <a:extLst>
+                    <a:ext uri="{9D8B030D-6E8A-4147-A177-3AD203B41FA5}">
+                      <a16:colId xmlns:a16="http://schemas.microsoft.com/office/drawing/2014/main" val="20000"/>
+                    </a:ext>
+                  </a:extLst>
+                </a:gridCol>
+                <a:gridCol w="2011680">
+                  <a:extLst>
+                    <a:ext uri="{9D8B030D-6E8A-4147-A177-3AD203B41FA5}">
+                      <a16:colId xmlns:a16="http://schemas.microsoft.com/office/drawing/2014/main" val="20001"/>
+                    </a:ext>
+                  </a:extLst>
+                </a:gridCol>
+                <a:gridCol w="2286000">
+                  <a:extLst>
+                    <a:ext uri="{9D8B030D-6E8A-4147-A177-3AD203B41FA5}">
+                      <a16:colId xmlns:a16="http://schemas.microsoft.com/office/drawing/2014/main" val="20002"/>
+                    </a:ext>
+                  </a:extLst>
+                </a:gridCol>
+                <a:gridCol w="1280160">
+                  <a:extLst>
+                    <a:ext uri="{9D8B030D-6E8A-4147-A177-3AD203B41FA5}">
+                      <a16:colId xmlns:a16="http://schemas.microsoft.com/office/drawing/2014/main" val="20003"/>
+                    </a:ext>
+                  </a:extLst>
+                </a:gridCol>
+                <a:gridCol w="1280160">
+                  <a:extLst>
+                    <a:ext uri="{9D8B030D-6E8A-4147-A177-3AD203B41FA5}">
+                      <a16:colId xmlns:a16="http://schemas.microsoft.com/office/drawing/2014/main" val="20004"/>
+                    </a:ext>
+                  </a:extLst>
+                </a:gridCol>
+              </a:tblGrid>
+              <a:tr h="384048">
+                <a:tc>
+                  <a:txBody>
+                    <a:bodyPr/>
+                    <a:lstStyle/>
+                    <a:p>
+                      <a:pPr marL="0" indent="0" algn="ctr">
+                        <a:buNone/>
+                      </a:pPr>
+                      <a:r>
+                        <a:rPr lang="en-US" sz="1100" b="1" dirty="0">
+                          <a:solidFill>
+                            <a:srgbClr val="FFFFFF"/>
+                          </a:solidFill>
+                          <a:latin typeface="Calibri" pitchFamily="34" charset="0"/>
+                          <a:ea typeface="Calibri" pitchFamily="34" charset="-122"/>
+                          <a:cs typeface="Calibri" pitchFamily="34" charset="-120"/>
+                        </a:rPr>
+                        <a:t>Подход</a:t>
+                      </a:r>
+                      <a:endParaRPr lang="en-US" sz="1100" dirty="0">
+                        <a:latin typeface="Calibri" charset="0"/>
+                        <a:ea typeface="Calibri" charset="0"/>
+                        <a:cs typeface="Calibri" charset="0"/>
+                      </a:endParaRPr>
+                    </a:p>
+                  </a:txBody>
+                  <a:tcPr anchor="ctr">
+                    <a:lnL w="6350" cap="flat" cmpd="sng" algn="ctr">
+                      <a:solidFill>
+                        <a:srgbClr val="D6DBE5"/>
+                      </a:solidFill>
+                      <a:prstDash val="solid"/>
+                      <a:round/>
+                      <a:headEnd type="none" w="med" len="med"/>
+                      <a:tailEnd type="none" w="med" len="med"/>
+                    </a:lnL>
+                    <a:lnR w="6350" cap="flat" cmpd="sng" algn="ctr">
+                      <a:solidFill>
+                        <a:srgbClr val="D6DBE5"/>
+                      </a:solidFill>
+                      <a:prstDash val="solid"/>
+                      <a:round/>
+                      <a:headEnd type="none" w="med" len="med"/>
+                      <a:tailEnd type="none" w="med" len="med"/>
+                    </a:lnR>
+                    <a:lnT w="6350" cap="flat" cmpd="sng" algn="ctr">
+                      <a:solidFill>
+                        <a:srgbClr val="D6DBE5"/>
+                      </a:solidFill>
+                      <a:prstDash val="solid"/>
+                      <a:round/>
+                      <a:headEnd type="none" w="med" len="med"/>
+                      <a:tailEnd type="none" w="med" len="med"/>
+                    </a:lnT>
+                    <a:lnB w="6350" cap="flat" cmpd="sng" algn="ctr">
+                      <a:solidFill>
+                        <a:srgbClr val="D6DBE5"/>
+                      </a:solidFill>
+                      <a:prstDash val="solid"/>
+                      <a:round/>
+                      <a:headEnd type="none" w="med" len="med"/>
+                      <a:tailEnd type="none" w="med" len="med"/>
+                    </a:lnB>
+                    <a:solidFill>
+                      <a:srgbClr val="0B5394"/>
+                    </a:solidFill>
+                  </a:tcPr>
+                </a:tc>
+                <a:tc>
+                  <a:txBody>
+                    <a:bodyPr/>
+                    <a:lstStyle/>
+                    <a:p>
+                      <a:pPr marL="0" indent="0" algn="ctr">
+                        <a:buNone/>
+                      </a:pPr>
+                      <a:r>
+                        <a:rPr lang="en-US" sz="1100" b="1" dirty="0">
+                          <a:solidFill>
+                            <a:srgbClr val="FFFFFF"/>
+                          </a:solidFill>
+                          <a:latin typeface="Calibri" pitchFamily="34" charset="0"/>
+                          <a:ea typeface="Calibri" pitchFamily="34" charset="-122"/>
+                          <a:cs typeface="Calibri" pitchFamily="34" charset="-120"/>
+                        </a:rPr>
+                        <a:t>Признаки</a:t>
+                      </a:r>
+                      <a:endParaRPr lang="en-US" sz="1100" dirty="0">
+                        <a:latin typeface="Calibri" charset="0"/>
+                        <a:ea typeface="Calibri" charset="0"/>
+                        <a:cs typeface="Calibri" charset="0"/>
+                      </a:endParaRPr>
+                    </a:p>
+                  </a:txBody>
+                  <a:tcPr anchor="ctr">
+                    <a:lnL w="6350" cap="flat" cmpd="sng" algn="ctr">
+                      <a:solidFill>
+                        <a:srgbClr val="D6DBE5"/>
+                      </a:solidFill>
+                      <a:prstDash val="solid"/>
+                      <a:round/>
+                      <a:headEnd type="none" w="med" len="med"/>
+                      <a:tailEnd type="none" w="med" len="med"/>
+                    </a:lnL>
+                    <a:lnR w="6350" cap="flat" cmpd="sng" algn="ctr">
+                      <a:solidFill>
+                        <a:srgbClr val="D6DBE5"/>
+                      </a:solidFill>
+                      <a:prstDash val="solid"/>
+                      <a:round/>
+                      <a:headEnd type="none" w="med" len="med"/>
+                      <a:tailEnd type="none" w="med" len="med"/>
+                    </a:lnR>
+                    <a:lnT w="6350" cap="flat" cmpd="sng" algn="ctr">
+                      <a:solidFill>
+                        <a:srgbClr val="D6DBE5"/>
+                      </a:solidFill>
+                      <a:prstDash val="solid"/>
+                      <a:round/>
+                      <a:headEnd type="none" w="med" len="med"/>
+                      <a:tailEnd type="none" w="med" len="med"/>
+                    </a:lnT>
+                    <a:lnB w="6350" cap="flat" cmpd="sng" algn="ctr">
+                      <a:solidFill>
+                        <a:srgbClr val="D6DBE5"/>
+                      </a:solidFill>
+                      <a:prstDash val="solid"/>
+                      <a:round/>
+                      <a:headEnd type="none" w="med" len="med"/>
+                      <a:tailEnd type="none" w="med" len="med"/>
+                    </a:lnB>
+                    <a:solidFill>
+                      <a:srgbClr val="0B5394"/>
+                    </a:solidFill>
+                  </a:tcPr>
+                </a:tc>
+                <a:tc>
+                  <a:txBody>
+                    <a:bodyPr/>
+                    <a:lstStyle/>
+                    <a:p>
+                      <a:pPr marL="0" indent="0" algn="ctr">
+                        <a:buNone/>
+                      </a:pPr>
+                      <a:r>
+                        <a:rPr lang="en-US" sz="1100" b="1" dirty="0">
+                          <a:solidFill>
+                            <a:srgbClr val="FFFFFF"/>
+                          </a:solidFill>
+                          <a:latin typeface="Calibri" pitchFamily="34" charset="0"/>
+                          <a:ea typeface="Calibri" pitchFamily="34" charset="-122"/>
+                          <a:cs typeface="Calibri" pitchFamily="34" charset="-120"/>
+                        </a:rPr>
+                        <a:t>Метод</a:t>
+                      </a:r>
+                      <a:endParaRPr lang="en-US" sz="1100" dirty="0">
+                        <a:latin typeface="Calibri" charset="0"/>
+                        <a:ea typeface="Calibri" charset="0"/>
+                        <a:cs typeface="Calibri" charset="0"/>
+                      </a:endParaRPr>
+                    </a:p>
+                  </a:txBody>
+                  <a:tcPr anchor="ctr">
+                    <a:lnL w="6350" cap="flat" cmpd="sng" algn="ctr">
+                      <a:solidFill>
+                        <a:srgbClr val="D6DBE5"/>
+                      </a:solidFill>
+                      <a:prstDash val="solid"/>
+                      <a:round/>
+                      <a:headEnd type="none" w="med" len="med"/>
+                      <a:tailEnd type="none" w="med" len="med"/>
+                    </a:lnL>
+                    <a:lnR w="6350" cap="flat" cmpd="sng" algn="ctr">
+                      <a:solidFill>
+                        <a:srgbClr val="D6DBE5"/>
+                      </a:solidFill>
+                      <a:prstDash val="solid"/>
+                      <a:round/>
+                      <a:headEnd type="none" w="med" len="med"/>
+                      <a:tailEnd type="none" w="med" len="med"/>
+                    </a:lnR>
+                    <a:lnT w="6350" cap="flat" cmpd="sng" algn="ctr">
+                      <a:solidFill>
+                        <a:srgbClr val="D6DBE5"/>
+                      </a:solidFill>
+                      <a:prstDash val="solid"/>
+                      <a:round/>
+                      <a:headEnd type="none" w="med" len="med"/>
+                      <a:tailEnd type="none" w="med" len="med"/>
+                    </a:lnT>
+                    <a:lnB w="6350" cap="flat" cmpd="sng" algn="ctr">
+                      <a:solidFill>
+                        <a:srgbClr val="D6DBE5"/>
+                      </a:solidFill>
+                      <a:prstDash val="solid"/>
+                      <a:round/>
+                      <a:headEnd type="none" w="med" len="med"/>
+                      <a:tailEnd type="none" w="med" len="med"/>
+                    </a:lnB>
+                    <a:solidFill>
+                      <a:srgbClr val="0B5394"/>
+                    </a:solidFill>
+                  </a:tcPr>
+                </a:tc>
+                <a:tc>
+                  <a:txBody>
+                    <a:bodyPr/>
+                    <a:lstStyle/>
+                    <a:p>
+                      <a:pPr marL="0" indent="0" algn="ctr">
+                        <a:buNone/>
+                      </a:pPr>
+                      <a:r>
+                        <a:rPr lang="en-US" sz="1100" b="1" dirty="0">
+                          <a:solidFill>
+                            <a:srgbClr val="FFFFFF"/>
+                          </a:solidFill>
+                          <a:latin typeface="Calibri" pitchFamily="34" charset="0"/>
+                          <a:ea typeface="Calibri" pitchFamily="34" charset="-122"/>
+                          <a:cs typeface="Calibri" pitchFamily="34" charset="-120"/>
+                        </a:rPr>
+                        <a:t>Bal. acc.</a:t>
+                      </a:r>
+                      <a:endParaRPr lang="en-US" sz="1100" dirty="0">
+                        <a:latin typeface="Calibri" charset="0"/>
+                        <a:ea typeface="Calibri" charset="0"/>
+                        <a:cs typeface="Calibri" charset="0"/>
+                      </a:endParaRPr>
+                    </a:p>
+                  </a:txBody>
+                  <a:tcPr anchor="ctr">
+                    <a:lnL w="6350" cap="flat" cmpd="sng" algn="ctr">
+                      <a:solidFill>
+                        <a:srgbClr val="D6DBE5"/>
+                      </a:solidFill>
+                      <a:prstDash val="solid"/>
+                      <a:round/>
+                      <a:headEnd type="none" w="med" len="med"/>
+                      <a:tailEnd type="none" w="med" len="med"/>
+                    </a:lnL>
+                    <a:lnR w="6350" cap="flat" cmpd="sng" algn="ctr">
+                      <a:solidFill>
+                        <a:srgbClr val="D6DBE5"/>
+                      </a:solidFill>
+                      <a:prstDash val="solid"/>
+                      <a:round/>
+                      <a:headEnd type="none" w="med" len="med"/>
+                      <a:tailEnd type="none" w="med" len="med"/>
+                    </a:lnR>
+                    <a:lnT w="6350" cap="flat" cmpd="sng" algn="ctr">
+                      <a:solidFill>
+                        <a:srgbClr val="D6DBE5"/>
+                      </a:solidFill>
+                      <a:prstDash val="solid"/>
+                      <a:round/>
+                      <a:headEnd type="none" w="med" len="med"/>
+                      <a:tailEnd type="none" w="med" len="med"/>
+                    </a:lnT>
+                    <a:lnB w="6350" cap="flat" cmpd="sng" algn="ctr">
+                      <a:solidFill>
+                        <a:srgbClr val="D6DBE5"/>
+                      </a:solidFill>
+                      <a:prstDash val="solid"/>
+                      <a:round/>
+                      <a:headEnd type="none" w="med" len="med"/>
+                      <a:tailEnd type="none" w="med" len="med"/>
+                    </a:lnB>
+                    <a:solidFill>
+                      <a:srgbClr val="0B5394"/>
+                    </a:solidFill>
+                  </a:tcPr>
+                </a:tc>
+                <a:tc>
+                  <a:txBody>
+                    <a:bodyPr/>
+                    <a:lstStyle/>
+                    <a:p>
+                      <a:pPr marL="0" indent="0" algn="ctr">
+                        <a:buNone/>
+                      </a:pPr>
+                      <a:r>
+                        <a:rPr lang="en-US" sz="1100" b="1" dirty="0">
+                          <a:solidFill>
+                            <a:srgbClr val="FFFFFF"/>
+                          </a:solidFill>
+                          <a:latin typeface="Calibri" pitchFamily="34" charset="0"/>
+                          <a:ea typeface="Calibri" pitchFamily="34" charset="-122"/>
+                          <a:cs typeface="Calibri" pitchFamily="34" charset="-120"/>
+                        </a:rPr>
+                        <a:t>Macro F1</a:t>
+                      </a:r>
+                      <a:endParaRPr lang="en-US" sz="1100" dirty="0">
+                        <a:latin typeface="Calibri" charset="0"/>
+                        <a:ea typeface="Calibri" charset="0"/>
+                        <a:cs typeface="Calibri" charset="0"/>
+                      </a:endParaRPr>
+                    </a:p>
+                  </a:txBody>
+                  <a:tcPr anchor="ctr">
+                    <a:lnL w="6350" cap="flat" cmpd="sng" algn="ctr">
+                      <a:solidFill>
+                        <a:srgbClr val="D6DBE5"/>
+                      </a:solidFill>
+                      <a:prstDash val="solid"/>
+                      <a:round/>
+                      <a:headEnd type="none" w="med" len="med"/>
+                      <a:tailEnd type="none" w="med" len="med"/>
+                    </a:lnL>
+                    <a:lnR w="6350" cap="flat" cmpd="sng" algn="ctr">
+                      <a:solidFill>
+                        <a:srgbClr val="D6DBE5"/>
+                      </a:solidFill>
+                      <a:prstDash val="solid"/>
+                      <a:round/>
+                      <a:headEnd type="none" w="med" len="med"/>
+                      <a:tailEnd type="none" w="med" len="med"/>
+                    </a:lnR>
+                    <a:lnT w="6350" cap="flat" cmpd="sng" algn="ctr">
+                      <a:solidFill>
+                        <a:srgbClr val="D6DBE5"/>
+                      </a:solidFill>
+                      <a:prstDash val="solid"/>
+                      <a:round/>
+                      <a:headEnd type="none" w="med" len="med"/>
+                      <a:tailEnd type="none" w="med" len="med"/>
+                    </a:lnT>
+                    <a:lnB w="6350" cap="flat" cmpd="sng" algn="ctr">
+                      <a:solidFill>
+                        <a:srgbClr val="D6DBE5"/>
+                      </a:solidFill>
+                      <a:prstDash val="solid"/>
+                      <a:round/>
+                      <a:headEnd type="none" w="med" len="med"/>
+                      <a:tailEnd type="none" w="med" len="med"/>
+                    </a:lnB>
+                    <a:solidFill>
+                      <a:srgbClr val="0B5394"/>
+                    </a:solidFill>
+                  </a:tcPr>
+                </a:tc>
+                <a:extLst>
+                  <a:ext uri="{0D108BD9-81ED-4DB2-BD59-A6C34878D82A}">
+                    <a16:rowId xmlns:a16="http://schemas.microsoft.com/office/drawing/2014/main" val="10000"/>
+                  </a:ext>
+                </a:extLst>
+              </a:tr>
+              <a:tr h="384048">
+                <a:tc>
+                  <a:txBody>
+                    <a:bodyPr/>
+                    <a:lstStyle/>
+                    <a:p>
+                      <a:pPr marL="0" indent="0" algn="l">
+                        <a:buNone/>
+                      </a:pPr>
+                      <a:r>
+                        <a:rPr lang="en-US" sz="1100" dirty="0">
+                          <a:solidFill>
+                            <a:srgbClr val="1A1A1A"/>
+                          </a:solidFill>
+                          <a:latin typeface="Calibri" pitchFamily="34" charset="0"/>
+                          <a:ea typeface="Calibri" pitchFamily="34" charset="-122"/>
+                          <a:cs typeface="Calibri" pitchFamily="34" charset="-120"/>
+                        </a:rPr>
+                        <a:t>Cosine-Centroid</a:t>
+                      </a:r>
+                      <a:endParaRPr lang="en-US" sz="1100" dirty="0">
+                        <a:latin typeface="Calibri" charset="0"/>
+                        <a:ea typeface="Calibri" charset="0"/>
+                        <a:cs typeface="Calibri" charset="0"/>
+                      </a:endParaRPr>
+                    </a:p>
+                  </a:txBody>
+                  <a:tcPr anchor="ctr">
+                    <a:lnL w="6350" cap="flat" cmpd="sng" algn="ctr">
+                      <a:solidFill>
+                        <a:srgbClr val="D6DBE5"/>
+                      </a:solidFill>
+                      <a:prstDash val="solid"/>
+                      <a:round/>
+                      <a:headEnd type="none" w="med" len="med"/>
+                      <a:tailEnd type="none" w="med" len="med"/>
+                    </a:lnL>
+                    <a:lnR w="6350" cap="flat" cmpd="sng" algn="ctr">
+                      <a:solidFill>
+                        <a:srgbClr val="D6DBE5"/>
+                      </a:solidFill>
+                      <a:prstDash val="solid"/>
+                      <a:round/>
+                      <a:headEnd type="none" w="med" len="med"/>
+                      <a:tailEnd type="none" w="med" len="med"/>
+                    </a:lnR>
+                    <a:lnT w="6350" cap="flat" cmpd="sng" algn="ctr">
+                      <a:solidFill>
+                        <a:srgbClr val="D6DBE5"/>
+                      </a:solidFill>
+                      <a:prstDash val="solid"/>
+                      <a:round/>
+                      <a:headEnd type="none" w="med" len="med"/>
+                      <a:tailEnd type="none" w="med" len="med"/>
+                    </a:lnT>
+                    <a:lnB w="6350" cap="flat" cmpd="sng" algn="ctr">
+                      <a:solidFill>
+                        <a:srgbClr val="D6DBE5"/>
+                      </a:solidFill>
+                      <a:prstDash val="solid"/>
+                      <a:round/>
+                      <a:headEnd type="none" w="med" len="med"/>
+                      <a:tailEnd type="none" w="med" len="med"/>
+                    </a:lnB>
+                    <a:solidFill>
+                      <a:srgbClr val="FFFFFF"/>
+                    </a:solidFill>
+                  </a:tcPr>
+                </a:tc>
+                <a:tc>
+                  <a:txBody>
+                    <a:bodyPr/>
+                    <a:lstStyle/>
+                    <a:p>
+                      <a:pPr marL="0" indent="0" algn="l">
+                        <a:buNone/>
+                      </a:pPr>
+                      <a:r>
+                        <a:rPr lang="en-US" sz="1100" dirty="0">
+                          <a:solidFill>
+                            <a:srgbClr val="1A1A1A"/>
+                          </a:solidFill>
+                          <a:latin typeface="Calibri" pitchFamily="34" charset="0"/>
+                          <a:ea typeface="Calibri" pitchFamily="34" charset="-122"/>
+                          <a:cs typeface="Calibri" pitchFamily="34" charset="-120"/>
+                        </a:rPr>
+                        <a:t>BERT (custom)</a:t>
+                      </a:r>
+                      <a:endParaRPr lang="en-US" sz="1100" dirty="0">
+                        <a:latin typeface="Calibri" charset="0"/>
+                        <a:ea typeface="Calibri" charset="0"/>
+                        <a:cs typeface="Calibri" charset="0"/>
+                      </a:endParaRPr>
+                    </a:p>
+                  </a:txBody>
+                  <a:tcPr anchor="ctr">
+                    <a:lnL w="6350" cap="flat" cmpd="sng" algn="ctr">
+                      <a:solidFill>
+                        <a:srgbClr val="D6DBE5"/>
+                      </a:solidFill>
+                      <a:prstDash val="solid"/>
+                      <a:round/>
+                      <a:headEnd type="none" w="med" len="med"/>
+                      <a:tailEnd type="none" w="med" len="med"/>
+                    </a:lnL>
+                    <a:lnR w="6350" cap="flat" cmpd="sng" algn="ctr">
+                      <a:solidFill>
+                        <a:srgbClr val="D6DBE5"/>
+                      </a:solidFill>
+                      <a:prstDash val="solid"/>
+                      <a:round/>
+                      <a:headEnd type="none" w="med" len="med"/>
+                      <a:tailEnd type="none" w="med" len="med"/>
+                    </a:lnR>
+                    <a:lnT w="6350" cap="flat" cmpd="sng" algn="ctr">
+                      <a:solidFill>
+                        <a:srgbClr val="D6DBE5"/>
+                      </a:solidFill>
+                      <a:prstDash val="solid"/>
+                      <a:round/>
+                      <a:headEnd type="none" w="med" len="med"/>
+                      <a:tailEnd type="none" w="med" len="med"/>
+                    </a:lnT>
+                    <a:lnB w="6350" cap="flat" cmpd="sng" algn="ctr">
+                      <a:solidFill>
+                        <a:srgbClr val="D6DBE5"/>
+                      </a:solidFill>
+                      <a:prstDash val="solid"/>
+                      <a:round/>
+                      <a:headEnd type="none" w="med" len="med"/>
+                      <a:tailEnd type="none" w="med" len="med"/>
+                    </a:lnB>
+                    <a:solidFill>
+                      <a:srgbClr val="FFFFFF"/>
+                    </a:solidFill>
+                  </a:tcPr>
+                </a:tc>
+                <a:tc>
+                  <a:txBody>
+                    <a:bodyPr/>
+                    <a:lstStyle/>
+                    <a:p>
+                      <a:pPr marL="0" indent="0" algn="l">
+                        <a:buNone/>
+                      </a:pPr>
+                      <a:r>
+                        <a:rPr lang="en-US" sz="1100" dirty="0">
+                          <a:solidFill>
+                            <a:srgbClr val="1A1A1A"/>
+                          </a:solidFill>
+                          <a:latin typeface="Calibri" pitchFamily="34" charset="0"/>
+                          <a:ea typeface="Calibri" pitchFamily="34" charset="-122"/>
+                          <a:cs typeface="Calibri" pitchFamily="34" charset="-120"/>
+                        </a:rPr>
+                        <a:t>центроид + cosine</a:t>
+                      </a:r>
+                      <a:endParaRPr lang="en-US" sz="1100" dirty="0">
+                        <a:latin typeface="Calibri" charset="0"/>
+                        <a:ea typeface="Calibri" charset="0"/>
+                        <a:cs typeface="Calibri" charset="0"/>
+                      </a:endParaRPr>
+                    </a:p>
+                  </a:txBody>
+                  <a:tcPr anchor="ctr">
+                    <a:lnL w="6350" cap="flat" cmpd="sng" algn="ctr">
+                      <a:solidFill>
+                        <a:srgbClr val="D6DBE5"/>
+                      </a:solidFill>
+                      <a:prstDash val="solid"/>
+                      <a:round/>
+                      <a:headEnd type="none" w="med" len="med"/>
+                      <a:tailEnd type="none" w="med" len="med"/>
+                    </a:lnL>
+                    <a:lnR w="6350" cap="flat" cmpd="sng" algn="ctr">
+                      <a:solidFill>
+                        <a:srgbClr val="D6DBE5"/>
+                      </a:solidFill>
+                      <a:prstDash val="solid"/>
+                      <a:round/>
+                      <a:headEnd type="none" w="med" len="med"/>
+                      <a:tailEnd type="none" w="med" len="med"/>
+                    </a:lnR>
+                    <a:lnT w="6350" cap="flat" cmpd="sng" algn="ctr">
+                      <a:solidFill>
+                        <a:srgbClr val="D6DBE5"/>
+                      </a:solidFill>
+                      <a:prstDash val="solid"/>
+                      <a:round/>
+                      <a:headEnd type="none" w="med" len="med"/>
+                      <a:tailEnd type="none" w="med" len="med"/>
+                    </a:lnT>
+                    <a:lnB w="6350" cap="flat" cmpd="sng" algn="ctr">
+                      <a:solidFill>
+                        <a:srgbClr val="D6DBE5"/>
+                      </a:solidFill>
+                      <a:prstDash val="solid"/>
+                      <a:round/>
+                      <a:headEnd type="none" w="med" len="med"/>
+                      <a:tailEnd type="none" w="med" len="med"/>
+                    </a:lnB>
+                    <a:solidFill>
+                      <a:srgbClr val="FFFFFF"/>
+                    </a:solidFill>
+                  </a:tcPr>
+                </a:tc>
+                <a:tc>
+                  <a:txBody>
+                    <a:bodyPr/>
+                    <a:lstStyle/>
+                    <a:p>
+                      <a:pPr marL="0" indent="0" algn="ctr">
+                        <a:buNone/>
+                      </a:pPr>
+                      <a:r>
+                        <a:rPr lang="en-US" sz="1200" b="1" dirty="0">
+                          <a:solidFill>
+                            <a:srgbClr val="0B5394"/>
+                          </a:solidFill>
+                          <a:latin typeface="Calibri" pitchFamily="34" charset="0"/>
+                          <a:ea typeface="Calibri" pitchFamily="34" charset="-122"/>
+                          <a:cs typeface="Calibri" pitchFamily="34" charset="-120"/>
+                        </a:rPr>
+                        <a:t>0.578</a:t>
+                      </a:r>
+                      <a:endParaRPr lang="en-US" sz="1200" dirty="0">
+                        <a:latin typeface="Calibri" charset="0"/>
+                        <a:ea typeface="Calibri" charset="0"/>
+                        <a:cs typeface="Calibri" charset="0"/>
+                      </a:endParaRPr>
+                    </a:p>
+                  </a:txBody>
+                  <a:tcPr anchor="ctr">
+                    <a:lnL w="6350" cap="flat" cmpd="sng" algn="ctr">
+                      <a:solidFill>
+                        <a:srgbClr val="D6DBE5"/>
+                      </a:solidFill>
+                      <a:prstDash val="solid"/>
+                      <a:round/>
+                      <a:headEnd type="none" w="med" len="med"/>
+                      <a:tailEnd type="none" w="med" len="med"/>
+                    </a:lnL>
+                    <a:lnR w="6350" cap="flat" cmpd="sng" algn="ctr">
+                      <a:solidFill>
+                        <a:srgbClr val="D6DBE5"/>
+                      </a:solidFill>
+                      <a:prstDash val="solid"/>
+                      <a:round/>
+                      <a:headEnd type="none" w="med" len="med"/>
+                      <a:tailEnd type="none" w="med" len="med"/>
+                    </a:lnR>
+                    <a:lnT w="6350" cap="flat" cmpd="sng" algn="ctr">
+                      <a:solidFill>
+                        <a:srgbClr val="D6DBE5"/>
+                      </a:solidFill>
+                      <a:prstDash val="solid"/>
+                      <a:round/>
+                      <a:headEnd type="none" w="med" len="med"/>
+                      <a:tailEnd type="none" w="med" len="med"/>
+                    </a:lnT>
+                    <a:lnB w="6350" cap="flat" cmpd="sng" algn="ctr">
+                      <a:solidFill>
+                        <a:srgbClr val="D6DBE5"/>
+                      </a:solidFill>
+                      <a:prstDash val="solid"/>
+                      <a:round/>
+                      <a:headEnd type="none" w="med" len="med"/>
+                      <a:tailEnd type="none" w="med" len="med"/>
+                    </a:lnB>
+                    <a:solidFill>
+                      <a:srgbClr val="D6E4F2"/>
+                    </a:solidFill>
+                  </a:tcPr>
+                </a:tc>
+                <a:tc>
+                  <a:txBody>
+                    <a:bodyPr/>
+                    <a:lstStyle/>
+                    <a:p>
+                      <a:pPr marL="0" indent="0" algn="ctr">
+                        <a:buNone/>
+                      </a:pPr>
+                      <a:r>
+                        <a:rPr lang="en-US" sz="1200" dirty="0">
+                          <a:solidFill>
+                            <a:srgbClr val="1A1A1A"/>
+                          </a:solidFill>
+                          <a:latin typeface="Calibri" pitchFamily="34" charset="0"/>
+                          <a:ea typeface="Calibri" pitchFamily="34" charset="-122"/>
+                          <a:cs typeface="Calibri" pitchFamily="34" charset="-120"/>
+                        </a:rPr>
+                        <a:t>0.508</a:t>
+                      </a:r>
+                      <a:endParaRPr lang="en-US" sz="1200" dirty="0">
+                        <a:latin typeface="Calibri" charset="0"/>
+                        <a:ea typeface="Calibri" charset="0"/>
+                        <a:cs typeface="Calibri" charset="0"/>
+                      </a:endParaRPr>
+                    </a:p>
+                  </a:txBody>
+                  <a:tcPr anchor="ctr">
+                    <a:lnL w="6350" cap="flat" cmpd="sng" algn="ctr">
+                      <a:solidFill>
+                        <a:srgbClr val="D6DBE5"/>
+                      </a:solidFill>
+                      <a:prstDash val="solid"/>
+                      <a:round/>
+                      <a:headEnd type="none" w="med" len="med"/>
+                      <a:tailEnd type="none" w="med" len="med"/>
+                    </a:lnL>
+                    <a:lnR w="6350" cap="flat" cmpd="sng" algn="ctr">
+                      <a:solidFill>
+                        <a:srgbClr val="D6DBE5"/>
+                      </a:solidFill>
+                      <a:prstDash val="solid"/>
+                      <a:round/>
+                      <a:headEnd type="none" w="med" len="med"/>
+                      <a:tailEnd type="none" w="med" len="med"/>
+                    </a:lnR>
+                    <a:lnT w="6350" cap="flat" cmpd="sng" algn="ctr">
+                      <a:solidFill>
+                        <a:srgbClr val="D6DBE5"/>
+                      </a:solidFill>
+                      <a:prstDash val="solid"/>
+                      <a:round/>
+                      <a:headEnd type="none" w="med" len="med"/>
+                      <a:tailEnd type="none" w="med" len="med"/>
+                    </a:lnT>
+                    <a:lnB w="6350" cap="flat" cmpd="sng" algn="ctr">
+                      <a:solidFill>
+                        <a:srgbClr val="D6DBE5"/>
+                      </a:solidFill>
+                      <a:prstDash val="solid"/>
+                      <a:round/>
+                      <a:headEnd type="none" w="med" len="med"/>
+                      <a:tailEnd type="none" w="med" len="med"/>
+                    </a:lnB>
+                    <a:solidFill>
+                      <a:srgbClr val="FFFFFF"/>
+                    </a:solidFill>
+                  </a:tcPr>
+                </a:tc>
+                <a:extLst>
+                  <a:ext uri="{0D108BD9-81ED-4DB2-BD59-A6C34878D82A}">
+                    <a16:rowId xmlns:a16="http://schemas.microsoft.com/office/drawing/2014/main" val="10001"/>
+                  </a:ext>
+                </a:extLst>
+              </a:tr>
+              <a:tr h="384048">
+                <a:tc>
+                  <a:txBody>
+                    <a:bodyPr/>
+                    <a:lstStyle/>
+                    <a:p>
+                      <a:pPr marL="0" indent="0" algn="l">
+                        <a:buNone/>
+                      </a:pPr>
+                      <a:r>
+                        <a:rPr lang="en-US" sz="1100" dirty="0">
+                          <a:solidFill>
+                            <a:srgbClr val="1A1A1A"/>
+                          </a:solidFill>
+                          <a:latin typeface="Calibri" pitchFamily="34" charset="0"/>
+                          <a:ea typeface="Calibri" pitchFamily="34" charset="-122"/>
+                          <a:cs typeface="Calibri" pitchFamily="34" charset="-120"/>
+                        </a:rPr>
+                        <a:t>Классические</a:t>
+                      </a:r>
+                      <a:endParaRPr lang="en-US" sz="1100" dirty="0">
+                        <a:latin typeface="Calibri" charset="0"/>
+                        <a:ea typeface="Calibri" charset="0"/>
+                        <a:cs typeface="Calibri" charset="0"/>
+                      </a:endParaRPr>
+                    </a:p>
+                  </a:txBody>
+                  <a:tcPr anchor="ctr">
+                    <a:lnL w="6350" cap="flat" cmpd="sng" algn="ctr">
+                      <a:solidFill>
+                        <a:srgbClr val="D6DBE5"/>
+                      </a:solidFill>
+                      <a:prstDash val="solid"/>
+                      <a:round/>
+                      <a:headEnd type="none" w="med" len="med"/>
+                      <a:tailEnd type="none" w="med" len="med"/>
+                    </a:lnL>
+                    <a:lnR w="6350" cap="flat" cmpd="sng" algn="ctr">
+                      <a:solidFill>
+                        <a:srgbClr val="D6DBE5"/>
+                      </a:solidFill>
+                      <a:prstDash val="solid"/>
+                      <a:round/>
+                      <a:headEnd type="none" w="med" len="med"/>
+                      <a:tailEnd type="none" w="med" len="med"/>
+                    </a:lnR>
+                    <a:lnT w="6350" cap="flat" cmpd="sng" algn="ctr">
+                      <a:solidFill>
+                        <a:srgbClr val="D6DBE5"/>
+                      </a:solidFill>
+                      <a:prstDash val="solid"/>
+                      <a:round/>
+                      <a:headEnd type="none" w="med" len="med"/>
+                      <a:tailEnd type="none" w="med" len="med"/>
+                    </a:lnT>
+                    <a:lnB w="6350" cap="flat" cmpd="sng" algn="ctr">
+                      <a:solidFill>
+                        <a:srgbClr val="D6DBE5"/>
+                      </a:solidFill>
+                      <a:prstDash val="solid"/>
+                      <a:round/>
+                      <a:headEnd type="none" w="med" len="med"/>
+                      <a:tailEnd type="none" w="med" len="med"/>
+                    </a:lnB>
+                    <a:solidFill>
+                      <a:srgbClr val="FFFFFF"/>
+                    </a:solidFill>
+                  </a:tcPr>
+                </a:tc>
+                <a:tc>
+                  <a:txBody>
+                    <a:bodyPr/>
+                    <a:lstStyle/>
+                    <a:p>
+                      <a:pPr marL="0" indent="0" algn="l">
+                        <a:buNone/>
+                      </a:pPr>
+                      <a:r>
+                        <a:rPr lang="en-US" sz="1100" dirty="0">
+                          <a:solidFill>
+                            <a:srgbClr val="1A1A1A"/>
+                          </a:solidFill>
+                          <a:latin typeface="Calibri" pitchFamily="34" charset="0"/>
+                          <a:ea typeface="Calibri" pitchFamily="34" charset="-122"/>
+                          <a:cs typeface="Calibri" pitchFamily="34" charset="-120"/>
+                        </a:rPr>
+                        <a:t>BERT (custom)</a:t>
+                      </a:r>
+                      <a:endParaRPr lang="en-US" sz="1100" dirty="0">
+                        <a:latin typeface="Calibri" charset="0"/>
+                        <a:ea typeface="Calibri" charset="0"/>
+                        <a:cs typeface="Calibri" charset="0"/>
+                      </a:endParaRPr>
+                    </a:p>
+                  </a:txBody>
+                  <a:tcPr anchor="ctr">
+                    <a:lnL w="6350" cap="flat" cmpd="sng" algn="ctr">
+                      <a:solidFill>
+                        <a:srgbClr val="D6DBE5"/>
+                      </a:solidFill>
+                      <a:prstDash val="solid"/>
+                      <a:round/>
+                      <a:headEnd type="none" w="med" len="med"/>
+                      <a:tailEnd type="none" w="med" len="med"/>
+                    </a:lnL>
+                    <a:lnR w="6350" cap="flat" cmpd="sng" algn="ctr">
+                      <a:solidFill>
+                        <a:srgbClr val="D6DBE5"/>
+                      </a:solidFill>
+                      <a:prstDash val="solid"/>
+                      <a:round/>
+                      <a:headEnd type="none" w="med" len="med"/>
+                      <a:tailEnd type="none" w="med" len="med"/>
+                    </a:lnR>
+                    <a:lnT w="6350" cap="flat" cmpd="sng" algn="ctr">
+                      <a:solidFill>
+                        <a:srgbClr val="D6DBE5"/>
+                      </a:solidFill>
+                      <a:prstDash val="solid"/>
+                      <a:round/>
+                      <a:headEnd type="none" w="med" len="med"/>
+                      <a:tailEnd type="none" w="med" len="med"/>
+                    </a:lnT>
+                    <a:lnB w="6350" cap="flat" cmpd="sng" algn="ctr">
+                      <a:solidFill>
+                        <a:srgbClr val="D6DBE5"/>
+                      </a:solidFill>
+                      <a:prstDash val="solid"/>
+                      <a:round/>
+                      <a:headEnd type="none" w="med" len="med"/>
+                      <a:tailEnd type="none" w="med" len="med"/>
+                    </a:lnB>
+                    <a:solidFill>
+                      <a:srgbClr val="FFFFFF"/>
+                    </a:solidFill>
+                  </a:tcPr>
+                </a:tc>
+                <a:tc>
+                  <a:txBody>
+                    <a:bodyPr/>
+                    <a:lstStyle/>
+                    <a:p>
+                      <a:pPr marL="0" indent="0" algn="l">
+                        <a:buNone/>
+                      </a:pPr>
+                      <a:r>
+                        <a:rPr lang="en-US" sz="1100" dirty="0">
+                          <a:solidFill>
+                            <a:srgbClr val="1A1A1A"/>
+                          </a:solidFill>
+                          <a:latin typeface="Calibri" pitchFamily="34" charset="0"/>
+                          <a:ea typeface="Calibri" pitchFamily="34" charset="-122"/>
+                          <a:cs typeface="Calibri" pitchFamily="34" charset="-120"/>
+                        </a:rPr>
+                        <a:t>LogisticRegression</a:t>
+                      </a:r>
+                      <a:endParaRPr lang="en-US" sz="1100" dirty="0">
+                        <a:latin typeface="Calibri" charset="0"/>
+                        <a:ea typeface="Calibri" charset="0"/>
+                        <a:cs typeface="Calibri" charset="0"/>
+                      </a:endParaRPr>
+                    </a:p>
+                  </a:txBody>
+                  <a:tcPr anchor="ctr">
+                    <a:lnL w="6350" cap="flat" cmpd="sng" algn="ctr">
+                      <a:solidFill>
+                        <a:srgbClr val="D6DBE5"/>
+                      </a:solidFill>
+                      <a:prstDash val="solid"/>
+                      <a:round/>
+                      <a:headEnd type="none" w="med" len="med"/>
+                      <a:tailEnd type="none" w="med" len="med"/>
+                    </a:lnL>
+                    <a:lnR w="6350" cap="flat" cmpd="sng" algn="ctr">
+                      <a:solidFill>
+                        <a:srgbClr val="D6DBE5"/>
+                      </a:solidFill>
+                      <a:prstDash val="solid"/>
+                      <a:round/>
+                      <a:headEnd type="none" w="med" len="med"/>
+                      <a:tailEnd type="none" w="med" len="med"/>
+                    </a:lnR>
+                    <a:lnT w="6350" cap="flat" cmpd="sng" algn="ctr">
+                      <a:solidFill>
+                        <a:srgbClr val="D6DBE5"/>
+                      </a:solidFill>
+                      <a:prstDash val="solid"/>
+                      <a:round/>
+                      <a:headEnd type="none" w="med" len="med"/>
+                      <a:tailEnd type="none" w="med" len="med"/>
+                    </a:lnT>
+                    <a:lnB w="6350" cap="flat" cmpd="sng" algn="ctr">
+                      <a:solidFill>
+                        <a:srgbClr val="D6DBE5"/>
+                      </a:solidFill>
+                      <a:prstDash val="solid"/>
+                      <a:round/>
+                      <a:headEnd type="none" w="med" len="med"/>
+                      <a:tailEnd type="none" w="med" len="med"/>
+                    </a:lnB>
+                    <a:solidFill>
+                      <a:srgbClr val="FFFFFF"/>
+                    </a:solidFill>
+                  </a:tcPr>
+                </a:tc>
+                <a:tc>
+                  <a:txBody>
+                    <a:bodyPr/>
+                    <a:lstStyle/>
+                    <a:p>
+                      <a:pPr marL="0" indent="0" algn="ctr">
+                        <a:buNone/>
+                      </a:pPr>
+                      <a:r>
+                        <a:rPr lang="en-US" sz="1200" dirty="0">
+                          <a:solidFill>
+                            <a:srgbClr val="1A1A1A"/>
+                          </a:solidFill>
+                          <a:latin typeface="Calibri" pitchFamily="34" charset="0"/>
+                          <a:ea typeface="Calibri" pitchFamily="34" charset="-122"/>
+                          <a:cs typeface="Calibri" pitchFamily="34" charset="-120"/>
+                        </a:rPr>
+                        <a:t>0.573</a:t>
+                      </a:r>
+                      <a:endParaRPr lang="en-US" sz="1200" dirty="0">
+                        <a:latin typeface="Calibri" charset="0"/>
+                        <a:ea typeface="Calibri" charset="0"/>
+                        <a:cs typeface="Calibri" charset="0"/>
+                      </a:endParaRPr>
+                    </a:p>
+                  </a:txBody>
+                  <a:tcPr anchor="ctr">
+                    <a:lnL w="6350" cap="flat" cmpd="sng" algn="ctr">
+                      <a:solidFill>
+                        <a:srgbClr val="D6DBE5"/>
+                      </a:solidFill>
+                      <a:prstDash val="solid"/>
+                      <a:round/>
+                      <a:headEnd type="none" w="med" len="med"/>
+                      <a:tailEnd type="none" w="med" len="med"/>
+                    </a:lnL>
+                    <a:lnR w="6350" cap="flat" cmpd="sng" algn="ctr">
+                      <a:solidFill>
+                        <a:srgbClr val="D6DBE5"/>
+                      </a:solidFill>
+                      <a:prstDash val="solid"/>
+                      <a:round/>
+                      <a:headEnd type="none" w="med" len="med"/>
+                      <a:tailEnd type="none" w="med" len="med"/>
+                    </a:lnR>
+                    <a:lnT w="6350" cap="flat" cmpd="sng" algn="ctr">
+                      <a:solidFill>
+                        <a:srgbClr val="D6DBE5"/>
+                      </a:solidFill>
+                      <a:prstDash val="solid"/>
+                      <a:round/>
+                      <a:headEnd type="none" w="med" len="med"/>
+                      <a:tailEnd type="none" w="med" len="med"/>
+                    </a:lnT>
+                    <a:lnB w="6350" cap="flat" cmpd="sng" algn="ctr">
+                      <a:solidFill>
+                        <a:srgbClr val="D6DBE5"/>
+                      </a:solidFill>
+                      <a:prstDash val="solid"/>
+                      <a:round/>
+                      <a:headEnd type="none" w="med" len="med"/>
+                      <a:tailEnd type="none" w="med" len="med"/>
+                    </a:lnB>
+                    <a:solidFill>
+                      <a:srgbClr val="FFFFFF"/>
+                    </a:solidFill>
+                  </a:tcPr>
+                </a:tc>
+                <a:tc>
+                  <a:txBody>
+                    <a:bodyPr/>
+                    <a:lstStyle/>
+                    <a:p>
+                      <a:pPr marL="0" indent="0" algn="ctr">
+                        <a:buNone/>
+                      </a:pPr>
+                      <a:r>
+                        <a:rPr lang="en-US" sz="1200" dirty="0">
+                          <a:solidFill>
+                            <a:srgbClr val="1A1A1A"/>
+                          </a:solidFill>
+                          <a:latin typeface="Calibri" pitchFamily="34" charset="0"/>
+                          <a:ea typeface="Calibri" pitchFamily="34" charset="-122"/>
+                          <a:cs typeface="Calibri" pitchFamily="34" charset="-120"/>
+                        </a:rPr>
+                        <a:t>0.490</a:t>
+                      </a:r>
+                      <a:endParaRPr lang="en-US" sz="1200" dirty="0">
+                        <a:latin typeface="Calibri" charset="0"/>
+                        <a:ea typeface="Calibri" charset="0"/>
+                        <a:cs typeface="Calibri" charset="0"/>
+                      </a:endParaRPr>
+                    </a:p>
+                  </a:txBody>
+                  <a:tcPr anchor="ctr">
+                    <a:lnL w="6350" cap="flat" cmpd="sng" algn="ctr">
+                      <a:solidFill>
+                        <a:srgbClr val="D6DBE5"/>
+                      </a:solidFill>
+                      <a:prstDash val="solid"/>
+                      <a:round/>
+                      <a:headEnd type="none" w="med" len="med"/>
+                      <a:tailEnd type="none" w="med" len="med"/>
+                    </a:lnL>
+                    <a:lnR w="6350" cap="flat" cmpd="sng" algn="ctr">
+                      <a:solidFill>
+                        <a:srgbClr val="D6DBE5"/>
+                      </a:solidFill>
+                      <a:prstDash val="solid"/>
+                      <a:round/>
+                      <a:headEnd type="none" w="med" len="med"/>
+                      <a:tailEnd type="none" w="med" len="med"/>
+                    </a:lnR>
+                    <a:lnT w="6350" cap="flat" cmpd="sng" algn="ctr">
+                      <a:solidFill>
+                        <a:srgbClr val="D6DBE5"/>
+                      </a:solidFill>
+                      <a:prstDash val="solid"/>
+                      <a:round/>
+                      <a:headEnd type="none" w="med" len="med"/>
+                      <a:tailEnd type="none" w="med" len="med"/>
+                    </a:lnT>
+                    <a:lnB w="6350" cap="flat" cmpd="sng" algn="ctr">
+                      <a:solidFill>
+                        <a:srgbClr val="D6DBE5"/>
+                      </a:solidFill>
+                      <a:prstDash val="solid"/>
+                      <a:round/>
+                      <a:headEnd type="none" w="med" len="med"/>
+                      <a:tailEnd type="none" w="med" len="med"/>
+                    </a:lnB>
+                    <a:solidFill>
+                      <a:srgbClr val="FFFFFF"/>
+                    </a:solidFill>
+                  </a:tcPr>
+                </a:tc>
+                <a:extLst>
+                  <a:ext uri="{0D108BD9-81ED-4DB2-BD59-A6C34878D82A}">
+                    <a16:rowId xmlns:a16="http://schemas.microsoft.com/office/drawing/2014/main" val="10002"/>
+                  </a:ext>
+                </a:extLst>
+              </a:tr>
+              <a:tr h="384048">
+                <a:tc>
+                  <a:txBody>
+                    <a:bodyPr/>
+                    <a:lstStyle/>
+                    <a:p>
+                      <a:pPr marL="0" indent="0" algn="l">
+                        <a:buNone/>
+                      </a:pPr>
+                      <a:r>
+                        <a:rPr lang="en-US" sz="1100" dirty="0">
+                          <a:solidFill>
+                            <a:srgbClr val="1A1A1A"/>
+                          </a:solidFill>
+                          <a:latin typeface="Calibri" pitchFamily="34" charset="0"/>
+                          <a:ea typeface="Calibri" pitchFamily="34" charset="-122"/>
+                          <a:cs typeface="Calibri" pitchFamily="34" charset="-120"/>
+                        </a:rPr>
+                        <a:t>Классические</a:t>
+                      </a:r>
+                      <a:endParaRPr lang="en-US" sz="1100" dirty="0">
+                        <a:latin typeface="Calibri" charset="0"/>
+                        <a:ea typeface="Calibri" charset="0"/>
+                        <a:cs typeface="Calibri" charset="0"/>
+                      </a:endParaRPr>
+                    </a:p>
+                  </a:txBody>
+                  <a:tcPr anchor="ctr">
+                    <a:lnL w="6350" cap="flat" cmpd="sng" algn="ctr">
+                      <a:solidFill>
+                        <a:srgbClr val="D6DBE5"/>
+                      </a:solidFill>
+                      <a:prstDash val="solid"/>
+                      <a:round/>
+                      <a:headEnd type="none" w="med" len="med"/>
+                      <a:tailEnd type="none" w="med" len="med"/>
+                    </a:lnL>
+                    <a:lnR w="6350" cap="flat" cmpd="sng" algn="ctr">
+                      <a:solidFill>
+                        <a:srgbClr val="D6DBE5"/>
+                      </a:solidFill>
+                      <a:prstDash val="solid"/>
+                      <a:round/>
+                      <a:headEnd type="none" w="med" len="med"/>
+                      <a:tailEnd type="none" w="med" len="med"/>
+                    </a:lnR>
+                    <a:lnT w="6350" cap="flat" cmpd="sng" algn="ctr">
+                      <a:solidFill>
+                        <a:srgbClr val="D6DBE5"/>
+                      </a:solidFill>
+                      <a:prstDash val="solid"/>
+                      <a:round/>
+                      <a:headEnd type="none" w="med" len="med"/>
+                      <a:tailEnd type="none" w="med" len="med"/>
+                    </a:lnT>
+                    <a:lnB w="6350" cap="flat" cmpd="sng" algn="ctr">
+                      <a:solidFill>
+                        <a:srgbClr val="D6DBE5"/>
+                      </a:solidFill>
+                      <a:prstDash val="solid"/>
+                      <a:round/>
+                      <a:headEnd type="none" w="med" len="med"/>
+                      <a:tailEnd type="none" w="med" len="med"/>
+                    </a:lnB>
+                    <a:solidFill>
+                      <a:srgbClr val="FFFFFF"/>
+                    </a:solidFill>
+                  </a:tcPr>
+                </a:tc>
+                <a:tc>
+                  <a:txBody>
+                    <a:bodyPr/>
+                    <a:lstStyle/>
+                    <a:p>
+                      <a:pPr marL="0" indent="0" algn="l">
+                        <a:buNone/>
+                      </a:pPr>
+                      <a:r>
+                        <a:rPr lang="en-US" sz="1100" dirty="0">
+                          <a:solidFill>
+                            <a:srgbClr val="1A1A1A"/>
+                          </a:solidFill>
+                          <a:latin typeface="Calibri" pitchFamily="34" charset="0"/>
+                          <a:ea typeface="Calibri" pitchFamily="34" charset="-122"/>
+                          <a:cs typeface="Calibri" pitchFamily="34" charset="-120"/>
+                        </a:rPr>
+                        <a:t>TF-IDF (n-граммы)</a:t>
+                      </a:r>
+                      <a:endParaRPr lang="en-US" sz="1100" dirty="0">
+                        <a:latin typeface="Calibri" charset="0"/>
+                        <a:ea typeface="Calibri" charset="0"/>
+                        <a:cs typeface="Calibri" charset="0"/>
+                      </a:endParaRPr>
+                    </a:p>
+                  </a:txBody>
+                  <a:tcPr anchor="ctr">
+                    <a:lnL w="6350" cap="flat" cmpd="sng" algn="ctr">
+                      <a:solidFill>
+                        <a:srgbClr val="D6DBE5"/>
+                      </a:solidFill>
+                      <a:prstDash val="solid"/>
+                      <a:round/>
+                      <a:headEnd type="none" w="med" len="med"/>
+                      <a:tailEnd type="none" w="med" len="med"/>
+                    </a:lnL>
+                    <a:lnR w="6350" cap="flat" cmpd="sng" algn="ctr">
+                      <a:solidFill>
+                        <a:srgbClr val="D6DBE5"/>
+                      </a:solidFill>
+                      <a:prstDash val="solid"/>
+                      <a:round/>
+                      <a:headEnd type="none" w="med" len="med"/>
+                      <a:tailEnd type="none" w="med" len="med"/>
+                    </a:lnR>
+                    <a:lnT w="6350" cap="flat" cmpd="sng" algn="ctr">
+                      <a:solidFill>
+                        <a:srgbClr val="D6DBE5"/>
+                      </a:solidFill>
+                      <a:prstDash val="solid"/>
+                      <a:round/>
+                      <a:headEnd type="none" w="med" len="med"/>
+                      <a:tailEnd type="none" w="med" len="med"/>
+                    </a:lnT>
+                    <a:lnB w="6350" cap="flat" cmpd="sng" algn="ctr">
+                      <a:solidFill>
+                        <a:srgbClr val="D6DBE5"/>
+                      </a:solidFill>
+                      <a:prstDash val="solid"/>
+                      <a:round/>
+                      <a:headEnd type="none" w="med" len="med"/>
+                      <a:tailEnd type="none" w="med" len="med"/>
+                    </a:lnB>
+                    <a:solidFill>
+                      <a:srgbClr val="FFFFFF"/>
+                    </a:solidFill>
+                  </a:tcPr>
+                </a:tc>
+                <a:tc>
+                  <a:txBody>
+                    <a:bodyPr/>
+                    <a:lstStyle/>
+                    <a:p>
+                      <a:pPr marL="0" indent="0" algn="l">
+                        <a:buNone/>
+                      </a:pPr>
+                      <a:r>
+                        <a:rPr lang="en-US" sz="1100" dirty="0">
+                          <a:solidFill>
+                            <a:srgbClr val="1A1A1A"/>
+                          </a:solidFill>
+                          <a:latin typeface="Calibri" pitchFamily="34" charset="0"/>
+                          <a:ea typeface="Calibri" pitchFamily="34" charset="-122"/>
+                          <a:cs typeface="Calibri" pitchFamily="34" charset="-120"/>
+                        </a:rPr>
+                        <a:t>LinearSVC</a:t>
+                      </a:r>
+                      <a:endParaRPr lang="en-US" sz="1100" dirty="0">
+                        <a:latin typeface="Calibri" charset="0"/>
+                        <a:ea typeface="Calibri" charset="0"/>
+                        <a:cs typeface="Calibri" charset="0"/>
+                      </a:endParaRPr>
+                    </a:p>
+                  </a:txBody>
+                  <a:tcPr anchor="ctr">
+                    <a:lnL w="6350" cap="flat" cmpd="sng" algn="ctr">
+                      <a:solidFill>
+                        <a:srgbClr val="D6DBE5"/>
+                      </a:solidFill>
+                      <a:prstDash val="solid"/>
+                      <a:round/>
+                      <a:headEnd type="none" w="med" len="med"/>
+                      <a:tailEnd type="none" w="med" len="med"/>
+                    </a:lnL>
+                    <a:lnR w="6350" cap="flat" cmpd="sng" algn="ctr">
+                      <a:solidFill>
+                        <a:srgbClr val="D6DBE5"/>
+                      </a:solidFill>
+                      <a:prstDash val="solid"/>
+                      <a:round/>
+                      <a:headEnd type="none" w="med" len="med"/>
+                      <a:tailEnd type="none" w="med" len="med"/>
+                    </a:lnR>
+                    <a:lnT w="6350" cap="flat" cmpd="sng" algn="ctr">
+                      <a:solidFill>
+                        <a:srgbClr val="D6DBE5"/>
+                      </a:solidFill>
+                      <a:prstDash val="solid"/>
+                      <a:round/>
+                      <a:headEnd type="none" w="med" len="med"/>
+                      <a:tailEnd type="none" w="med" len="med"/>
+                    </a:lnT>
+                    <a:lnB w="6350" cap="flat" cmpd="sng" algn="ctr">
+                      <a:solidFill>
+                        <a:srgbClr val="D6DBE5"/>
+                      </a:solidFill>
+                      <a:prstDash val="solid"/>
+                      <a:round/>
+                      <a:headEnd type="none" w="med" len="med"/>
+                      <a:tailEnd type="none" w="med" len="med"/>
+                    </a:lnB>
+                    <a:solidFill>
+                      <a:srgbClr val="FFFFFF"/>
+                    </a:solidFill>
+                  </a:tcPr>
+                </a:tc>
+                <a:tc>
+                  <a:txBody>
+                    <a:bodyPr/>
+                    <a:lstStyle/>
+                    <a:p>
+                      <a:pPr marL="0" indent="0" algn="ctr">
+                        <a:buNone/>
+                      </a:pPr>
+                      <a:r>
+                        <a:rPr lang="en-US" sz="1200" dirty="0">
+                          <a:solidFill>
+                            <a:srgbClr val="1A1A1A"/>
+                          </a:solidFill>
+                          <a:latin typeface="Calibri" pitchFamily="34" charset="0"/>
+                          <a:ea typeface="Calibri" pitchFamily="34" charset="-122"/>
+                          <a:cs typeface="Calibri" pitchFamily="34" charset="-120"/>
+                        </a:rPr>
+                        <a:t>0.561</a:t>
+                      </a:r>
+                      <a:endParaRPr lang="en-US" sz="1200" dirty="0">
+                        <a:latin typeface="Calibri" charset="0"/>
+                        <a:ea typeface="Calibri" charset="0"/>
+                        <a:cs typeface="Calibri" charset="0"/>
+                      </a:endParaRPr>
+                    </a:p>
+                  </a:txBody>
+                  <a:tcPr anchor="ctr">
+                    <a:lnL w="6350" cap="flat" cmpd="sng" algn="ctr">
+                      <a:solidFill>
+                        <a:srgbClr val="D6DBE5"/>
+                      </a:solidFill>
+                      <a:prstDash val="solid"/>
+                      <a:round/>
+                      <a:headEnd type="none" w="med" len="med"/>
+                      <a:tailEnd type="none" w="med" len="med"/>
+                    </a:lnL>
+                    <a:lnR w="6350" cap="flat" cmpd="sng" algn="ctr">
+                      <a:solidFill>
+                        <a:srgbClr val="D6DBE5"/>
+                      </a:solidFill>
+                      <a:prstDash val="solid"/>
+                      <a:round/>
+                      <a:headEnd type="none" w="med" len="med"/>
+                      <a:tailEnd type="none" w="med" len="med"/>
+                    </a:lnR>
+                    <a:lnT w="6350" cap="flat" cmpd="sng" algn="ctr">
+                      <a:solidFill>
+                        <a:srgbClr val="D6DBE5"/>
+                      </a:solidFill>
+                      <a:prstDash val="solid"/>
+                      <a:round/>
+                      <a:headEnd type="none" w="med" len="med"/>
+                      <a:tailEnd type="none" w="med" len="med"/>
+                    </a:lnT>
+                    <a:lnB w="6350" cap="flat" cmpd="sng" algn="ctr">
+                      <a:solidFill>
+                        <a:srgbClr val="D6DBE5"/>
+                      </a:solidFill>
+                      <a:prstDash val="solid"/>
+                      <a:round/>
+                      <a:headEnd type="none" w="med" len="med"/>
+                      <a:tailEnd type="none" w="med" len="med"/>
+                    </a:lnB>
+                    <a:solidFill>
+                      <a:srgbClr val="FFFFFF"/>
+                    </a:solidFill>
+                  </a:tcPr>
+                </a:tc>
+                <a:tc>
+                  <a:txBody>
+                    <a:bodyPr/>
+                    <a:lstStyle/>
+                    <a:p>
+                      <a:pPr marL="0" indent="0" algn="ctr">
+                        <a:buNone/>
+                      </a:pPr>
+                      <a:r>
+                        <a:rPr lang="en-US" sz="1200" dirty="0">
+                          <a:solidFill>
+                            <a:srgbClr val="1A1A1A"/>
+                          </a:solidFill>
+                          <a:latin typeface="Calibri" pitchFamily="34" charset="0"/>
+                          <a:ea typeface="Calibri" pitchFamily="34" charset="-122"/>
+                          <a:cs typeface="Calibri" pitchFamily="34" charset="-120"/>
+                        </a:rPr>
+                        <a:t>0.497</a:t>
+                      </a:r>
+                      <a:endParaRPr lang="en-US" sz="1200" dirty="0">
+                        <a:latin typeface="Calibri" charset="0"/>
+                        <a:ea typeface="Calibri" charset="0"/>
+                        <a:cs typeface="Calibri" charset="0"/>
+                      </a:endParaRPr>
+                    </a:p>
+                  </a:txBody>
+                  <a:tcPr anchor="ctr">
+                    <a:lnL w="6350" cap="flat" cmpd="sng" algn="ctr">
+                      <a:solidFill>
+                        <a:srgbClr val="D6DBE5"/>
+                      </a:solidFill>
+                      <a:prstDash val="solid"/>
+                      <a:round/>
+                      <a:headEnd type="none" w="med" len="med"/>
+                      <a:tailEnd type="none" w="med" len="med"/>
+                    </a:lnL>
+                    <a:lnR w="6350" cap="flat" cmpd="sng" algn="ctr">
+                      <a:solidFill>
+                        <a:srgbClr val="D6DBE5"/>
+                      </a:solidFill>
+                      <a:prstDash val="solid"/>
+                      <a:round/>
+                      <a:headEnd type="none" w="med" len="med"/>
+                      <a:tailEnd type="none" w="med" len="med"/>
+                    </a:lnR>
+                    <a:lnT w="6350" cap="flat" cmpd="sng" algn="ctr">
+                      <a:solidFill>
+                        <a:srgbClr val="D6DBE5"/>
+                      </a:solidFill>
+                      <a:prstDash val="solid"/>
+                      <a:round/>
+                      <a:headEnd type="none" w="med" len="med"/>
+                      <a:tailEnd type="none" w="med" len="med"/>
+                    </a:lnT>
+                    <a:lnB w="6350" cap="flat" cmpd="sng" algn="ctr">
+                      <a:solidFill>
+                        <a:srgbClr val="D6DBE5"/>
+                      </a:solidFill>
+                      <a:prstDash val="solid"/>
+                      <a:round/>
+                      <a:headEnd type="none" w="med" len="med"/>
+                      <a:tailEnd type="none" w="med" len="med"/>
+                    </a:lnB>
+                    <a:solidFill>
+                      <a:srgbClr val="FFFFFF"/>
+                    </a:solidFill>
+                  </a:tcPr>
+                </a:tc>
+                <a:extLst>
+                  <a:ext uri="{0D108BD9-81ED-4DB2-BD59-A6C34878D82A}">
+                    <a16:rowId xmlns:a16="http://schemas.microsoft.com/office/drawing/2014/main" val="10003"/>
+                  </a:ext>
+                </a:extLst>
+              </a:tr>
+              <a:tr h="384048">
+                <a:tc>
+                  <a:txBody>
+                    <a:bodyPr/>
+                    <a:lstStyle/>
+                    <a:p>
+                      <a:pPr marL="0" indent="0" algn="l">
+                        <a:buNone/>
+                      </a:pPr>
+                      <a:r>
+                        <a:rPr lang="en-US" sz="1100" dirty="0">
+                          <a:solidFill>
+                            <a:srgbClr val="1A1A1A"/>
+                          </a:solidFill>
+                          <a:latin typeface="Calibri" pitchFamily="34" charset="0"/>
+                          <a:ea typeface="Calibri" pitchFamily="34" charset="-122"/>
+                          <a:cs typeface="Calibri" pitchFamily="34" charset="-120"/>
+                        </a:rPr>
+                        <a:t>MLP</a:t>
+                      </a:r>
+                      <a:endParaRPr lang="en-US" sz="1100" dirty="0">
+                        <a:latin typeface="Calibri" charset="0"/>
+                        <a:ea typeface="Calibri" charset="0"/>
+                        <a:cs typeface="Calibri" charset="0"/>
+                      </a:endParaRPr>
+                    </a:p>
+                  </a:txBody>
+                  <a:tcPr anchor="ctr">
+                    <a:lnL w="6350" cap="flat" cmpd="sng" algn="ctr">
+                      <a:solidFill>
+                        <a:srgbClr val="D6DBE5"/>
+                      </a:solidFill>
+                      <a:prstDash val="solid"/>
+                      <a:round/>
+                      <a:headEnd type="none" w="med" len="med"/>
+                      <a:tailEnd type="none" w="med" len="med"/>
+                    </a:lnL>
+                    <a:lnR w="6350" cap="flat" cmpd="sng" algn="ctr">
+                      <a:solidFill>
+                        <a:srgbClr val="D6DBE5"/>
+                      </a:solidFill>
+                      <a:prstDash val="solid"/>
+                      <a:round/>
+                      <a:headEnd type="none" w="med" len="med"/>
+                      <a:tailEnd type="none" w="med" len="med"/>
+                    </a:lnR>
+                    <a:lnT w="6350" cap="flat" cmpd="sng" algn="ctr">
+                      <a:solidFill>
+                        <a:srgbClr val="D6DBE5"/>
+                      </a:solidFill>
+                      <a:prstDash val="solid"/>
+                      <a:round/>
+                      <a:headEnd type="none" w="med" len="med"/>
+                      <a:tailEnd type="none" w="med" len="med"/>
+                    </a:lnT>
+                    <a:lnB w="6350" cap="flat" cmpd="sng" algn="ctr">
+                      <a:solidFill>
+                        <a:srgbClr val="D6DBE5"/>
+                      </a:solidFill>
+                      <a:prstDash val="solid"/>
+                      <a:round/>
+                      <a:headEnd type="none" w="med" len="med"/>
+                      <a:tailEnd type="none" w="med" len="med"/>
+                    </a:lnB>
+                    <a:solidFill>
+                      <a:srgbClr val="FFFFFF"/>
+                    </a:solidFill>
+                  </a:tcPr>
+                </a:tc>
+                <a:tc>
+                  <a:txBody>
+                    <a:bodyPr/>
+                    <a:lstStyle/>
+                    <a:p>
+                      <a:pPr marL="0" indent="0" algn="l">
+                        <a:buNone/>
+                      </a:pPr>
+                      <a:r>
+                        <a:rPr lang="en-US" sz="1100" dirty="0">
+                          <a:solidFill>
+                            <a:srgbClr val="1A1A1A"/>
+                          </a:solidFill>
+                          <a:latin typeface="Calibri" pitchFamily="34" charset="0"/>
+                          <a:ea typeface="Calibri" pitchFamily="34" charset="-122"/>
+                          <a:cs typeface="Calibri" pitchFamily="34" charset="-120"/>
+                        </a:rPr>
+                        <a:t>Hybrid (custom)</a:t>
+                      </a:r>
+                      <a:endParaRPr lang="en-US" sz="1100" dirty="0">
+                        <a:latin typeface="Calibri" charset="0"/>
+                        <a:ea typeface="Calibri" charset="0"/>
+                        <a:cs typeface="Calibri" charset="0"/>
+                      </a:endParaRPr>
+                    </a:p>
+                  </a:txBody>
+                  <a:tcPr anchor="ctr">
+                    <a:lnL w="6350" cap="flat" cmpd="sng" algn="ctr">
+                      <a:solidFill>
+                        <a:srgbClr val="D6DBE5"/>
+                      </a:solidFill>
+                      <a:prstDash val="solid"/>
+                      <a:round/>
+                      <a:headEnd type="none" w="med" len="med"/>
+                      <a:tailEnd type="none" w="med" len="med"/>
+                    </a:lnL>
+                    <a:lnR w="6350" cap="flat" cmpd="sng" algn="ctr">
+                      <a:solidFill>
+                        <a:srgbClr val="D6DBE5"/>
+                      </a:solidFill>
+                      <a:prstDash val="solid"/>
+                      <a:round/>
+                      <a:headEnd type="none" w="med" len="med"/>
+                      <a:tailEnd type="none" w="med" len="med"/>
+                    </a:lnR>
+                    <a:lnT w="6350" cap="flat" cmpd="sng" algn="ctr">
+                      <a:solidFill>
+                        <a:srgbClr val="D6DBE5"/>
+                      </a:solidFill>
+                      <a:prstDash val="solid"/>
+                      <a:round/>
+                      <a:headEnd type="none" w="med" len="med"/>
+                      <a:tailEnd type="none" w="med" len="med"/>
+                    </a:lnT>
+                    <a:lnB w="6350" cap="flat" cmpd="sng" algn="ctr">
+                      <a:solidFill>
+                        <a:srgbClr val="D6DBE5"/>
+                      </a:solidFill>
+                      <a:prstDash val="solid"/>
+                      <a:round/>
+                      <a:headEnd type="none" w="med" len="med"/>
+                      <a:tailEnd type="none" w="med" len="med"/>
+                    </a:lnB>
+                    <a:solidFill>
+                      <a:srgbClr val="FFFFFF"/>
+                    </a:solidFill>
+                  </a:tcPr>
+                </a:tc>
+                <a:tc>
+                  <a:txBody>
+                    <a:bodyPr/>
+                    <a:lstStyle/>
+                    <a:p>
+                      <a:pPr marL="0" indent="0" algn="l">
+                        <a:buNone/>
+                      </a:pPr>
+                      <a:r>
+                        <a:rPr lang="en-US" sz="1100" dirty="0">
+                          <a:solidFill>
+                            <a:srgbClr val="1A1A1A"/>
+                          </a:solidFill>
+                          <a:latin typeface="Calibri" pitchFamily="34" charset="0"/>
+                          <a:ea typeface="Calibri" pitchFamily="34" charset="-122"/>
+                          <a:cs typeface="Calibri" pitchFamily="34" charset="-120"/>
+                        </a:rPr>
+                        <a:t>StrongMLP</a:t>
+                      </a:r>
+                      <a:endParaRPr lang="en-US" sz="1100" dirty="0">
+                        <a:latin typeface="Calibri" charset="0"/>
+                        <a:ea typeface="Calibri" charset="0"/>
+                        <a:cs typeface="Calibri" charset="0"/>
+                      </a:endParaRPr>
+                    </a:p>
+                  </a:txBody>
+                  <a:tcPr anchor="ctr">
+                    <a:lnL w="6350" cap="flat" cmpd="sng" algn="ctr">
+                      <a:solidFill>
+                        <a:srgbClr val="D6DBE5"/>
+                      </a:solidFill>
+                      <a:prstDash val="solid"/>
+                      <a:round/>
+                      <a:headEnd type="none" w="med" len="med"/>
+                      <a:tailEnd type="none" w="med" len="med"/>
+                    </a:lnL>
+                    <a:lnR w="6350" cap="flat" cmpd="sng" algn="ctr">
+                      <a:solidFill>
+                        <a:srgbClr val="D6DBE5"/>
+                      </a:solidFill>
+                      <a:prstDash val="solid"/>
+                      <a:round/>
+                      <a:headEnd type="none" w="med" len="med"/>
+                      <a:tailEnd type="none" w="med" len="med"/>
+                    </a:lnR>
+                    <a:lnT w="6350" cap="flat" cmpd="sng" algn="ctr">
+                      <a:solidFill>
+                        <a:srgbClr val="D6DBE5"/>
+                      </a:solidFill>
+                      <a:prstDash val="solid"/>
+                      <a:round/>
+                      <a:headEnd type="none" w="med" len="med"/>
+                      <a:tailEnd type="none" w="med" len="med"/>
+                    </a:lnT>
+                    <a:lnB w="6350" cap="flat" cmpd="sng" algn="ctr">
+                      <a:solidFill>
+                        <a:srgbClr val="D6DBE5"/>
+                      </a:solidFill>
+                      <a:prstDash val="solid"/>
+                      <a:round/>
+                      <a:headEnd type="none" w="med" len="med"/>
+                      <a:tailEnd type="none" w="med" len="med"/>
+                    </a:lnB>
+                    <a:solidFill>
+                      <a:srgbClr val="FFFFFF"/>
+                    </a:solidFill>
+                  </a:tcPr>
+                </a:tc>
+                <a:tc>
+                  <a:txBody>
+                    <a:bodyPr/>
+                    <a:lstStyle/>
+                    <a:p>
+                      <a:pPr marL="0" indent="0" algn="ctr">
+                        <a:buNone/>
+                      </a:pPr>
+                      <a:r>
+                        <a:rPr lang="en-US" sz="1200" dirty="0">
+                          <a:solidFill>
+                            <a:srgbClr val="1A1A1A"/>
+                          </a:solidFill>
+                          <a:latin typeface="Calibri" pitchFamily="34" charset="0"/>
+                          <a:ea typeface="Calibri" pitchFamily="34" charset="-122"/>
+                          <a:cs typeface="Calibri" pitchFamily="34" charset="-120"/>
+                        </a:rPr>
+                        <a:t>0.498</a:t>
+                      </a:r>
+                      <a:endParaRPr lang="en-US" sz="1200" dirty="0">
+                        <a:latin typeface="Calibri" charset="0"/>
+                        <a:ea typeface="Calibri" charset="0"/>
+                        <a:cs typeface="Calibri" charset="0"/>
+                      </a:endParaRPr>
+                    </a:p>
+                  </a:txBody>
+                  <a:tcPr anchor="ctr">
+                    <a:lnL w="6350" cap="flat" cmpd="sng" algn="ctr">
+                      <a:solidFill>
+                        <a:srgbClr val="D6DBE5"/>
+                      </a:solidFill>
+                      <a:prstDash val="solid"/>
+                      <a:round/>
+                      <a:headEnd type="none" w="med" len="med"/>
+                      <a:tailEnd type="none" w="med" len="med"/>
+                    </a:lnL>
+                    <a:lnR w="6350" cap="flat" cmpd="sng" algn="ctr">
+                      <a:solidFill>
+                        <a:srgbClr val="D6DBE5"/>
+                      </a:solidFill>
+                      <a:prstDash val="solid"/>
+                      <a:round/>
+                      <a:headEnd type="none" w="med" len="med"/>
+                      <a:tailEnd type="none" w="med" len="med"/>
+                    </a:lnR>
+                    <a:lnT w="6350" cap="flat" cmpd="sng" algn="ctr">
+                      <a:solidFill>
+                        <a:srgbClr val="D6DBE5"/>
+                      </a:solidFill>
+                      <a:prstDash val="solid"/>
+                      <a:round/>
+                      <a:headEnd type="none" w="med" len="med"/>
+                      <a:tailEnd type="none" w="med" len="med"/>
+                    </a:lnT>
+                    <a:lnB w="6350" cap="flat" cmpd="sng" algn="ctr">
+                      <a:solidFill>
+                        <a:srgbClr val="D6DBE5"/>
+                      </a:solidFill>
+                      <a:prstDash val="solid"/>
+                      <a:round/>
+                      <a:headEnd type="none" w="med" len="med"/>
+                      <a:tailEnd type="none" w="med" len="med"/>
+                    </a:lnB>
+                    <a:solidFill>
+                      <a:srgbClr val="FFFFFF"/>
+                    </a:solidFill>
+                  </a:tcPr>
+                </a:tc>
+                <a:tc>
+                  <a:txBody>
+                    <a:bodyPr/>
+                    <a:lstStyle/>
+                    <a:p>
+                      <a:pPr marL="0" indent="0" algn="ctr">
+                        <a:buNone/>
+                      </a:pPr>
+                      <a:r>
+                        <a:rPr lang="en-US" sz="1200" b="1" dirty="0">
+                          <a:solidFill>
+                            <a:srgbClr val="0B5394"/>
+                          </a:solidFill>
+                          <a:latin typeface="Calibri" pitchFamily="34" charset="0"/>
+                          <a:ea typeface="Calibri" pitchFamily="34" charset="-122"/>
+                          <a:cs typeface="Calibri" pitchFamily="34" charset="-120"/>
+                        </a:rPr>
+                        <a:t>0.543</a:t>
+                      </a:r>
+                      <a:endParaRPr lang="en-US" sz="1200" dirty="0">
+                        <a:latin typeface="Calibri" charset="0"/>
+                        <a:ea typeface="Calibri" charset="0"/>
+                        <a:cs typeface="Calibri" charset="0"/>
+                      </a:endParaRPr>
+                    </a:p>
+                  </a:txBody>
+                  <a:tcPr anchor="ctr">
+                    <a:lnL w="6350" cap="flat" cmpd="sng" algn="ctr">
+                      <a:solidFill>
+                        <a:srgbClr val="D6DBE5"/>
+                      </a:solidFill>
+                      <a:prstDash val="solid"/>
+                      <a:round/>
+                      <a:headEnd type="none" w="med" len="med"/>
+                      <a:tailEnd type="none" w="med" len="med"/>
+                    </a:lnL>
+                    <a:lnR w="6350" cap="flat" cmpd="sng" algn="ctr">
+                      <a:solidFill>
+                        <a:srgbClr val="D6DBE5"/>
+                      </a:solidFill>
+                      <a:prstDash val="solid"/>
+                      <a:round/>
+                      <a:headEnd type="none" w="med" len="med"/>
+                      <a:tailEnd type="none" w="med" len="med"/>
+                    </a:lnR>
+                    <a:lnT w="6350" cap="flat" cmpd="sng" algn="ctr">
+                      <a:solidFill>
+                        <a:srgbClr val="D6DBE5"/>
+                      </a:solidFill>
+                      <a:prstDash val="solid"/>
+                      <a:round/>
+                      <a:headEnd type="none" w="med" len="med"/>
+                      <a:tailEnd type="none" w="med" len="med"/>
+                    </a:lnT>
+                    <a:lnB w="6350" cap="flat" cmpd="sng" algn="ctr">
+                      <a:solidFill>
+                        <a:srgbClr val="D6DBE5"/>
+                      </a:solidFill>
+                      <a:prstDash val="solid"/>
+                      <a:round/>
+                      <a:headEnd type="none" w="med" len="med"/>
+                      <a:tailEnd type="none" w="med" len="med"/>
+                    </a:lnB>
+                    <a:solidFill>
+                      <a:srgbClr val="D6E4F2"/>
+                    </a:solidFill>
+                  </a:tcPr>
+                </a:tc>
+                <a:extLst>
+                  <a:ext uri="{0D108BD9-81ED-4DB2-BD59-A6C34878D82A}">
+                    <a16:rowId xmlns:a16="http://schemas.microsoft.com/office/drawing/2014/main" val="10004"/>
+                  </a:ext>
+                </a:extLst>
+              </a:tr>
+              <a:tr h="384048">
+                <a:tc>
+                  <a:txBody>
+                    <a:bodyPr/>
+                    <a:lstStyle/>
+                    <a:p>
+                      <a:pPr marL="0" indent="0" algn="l">
+                        <a:buNone/>
+                      </a:pPr>
+                      <a:r>
+                        <a:rPr lang="en-US" sz="1100" dirty="0">
+                          <a:solidFill>
+                            <a:srgbClr val="1A1A1A"/>
+                          </a:solidFill>
+                          <a:latin typeface="Calibri" pitchFamily="34" charset="0"/>
+                          <a:ea typeface="Calibri" pitchFamily="34" charset="-122"/>
+                          <a:cs typeface="Calibri" pitchFamily="34" charset="-120"/>
+                        </a:rPr>
+                        <a:t>Классические</a:t>
+                      </a:r>
+                      <a:endParaRPr lang="en-US" sz="1100" dirty="0">
+                        <a:latin typeface="Calibri" charset="0"/>
+                        <a:ea typeface="Calibri" charset="0"/>
+                        <a:cs typeface="Calibri" charset="0"/>
+                      </a:endParaRPr>
+                    </a:p>
+                  </a:txBody>
+                  <a:tcPr anchor="ctr">
+                    <a:lnL w="6350" cap="flat" cmpd="sng" algn="ctr">
+                      <a:solidFill>
+                        <a:srgbClr val="D6DBE5"/>
+                      </a:solidFill>
+                      <a:prstDash val="solid"/>
+                      <a:round/>
+                      <a:headEnd type="none" w="med" len="med"/>
+                      <a:tailEnd type="none" w="med" len="med"/>
+                    </a:lnL>
+                    <a:lnR w="6350" cap="flat" cmpd="sng" algn="ctr">
+                      <a:solidFill>
+                        <a:srgbClr val="D6DBE5"/>
+                      </a:solidFill>
+                      <a:prstDash val="solid"/>
+                      <a:round/>
+                      <a:headEnd type="none" w="med" len="med"/>
+                      <a:tailEnd type="none" w="med" len="med"/>
+                    </a:lnR>
+                    <a:lnT w="6350" cap="flat" cmpd="sng" algn="ctr">
+                      <a:solidFill>
+                        <a:srgbClr val="D6DBE5"/>
+                      </a:solidFill>
+                      <a:prstDash val="solid"/>
+                      <a:round/>
+                      <a:headEnd type="none" w="med" len="med"/>
+                      <a:tailEnd type="none" w="med" len="med"/>
+                    </a:lnT>
+                    <a:lnB w="6350" cap="flat" cmpd="sng" algn="ctr">
+                      <a:solidFill>
+                        <a:srgbClr val="D6DBE5"/>
+                      </a:solidFill>
+                      <a:prstDash val="solid"/>
+                      <a:round/>
+                      <a:headEnd type="none" w="med" len="med"/>
+                      <a:tailEnd type="none" w="med" len="med"/>
+                    </a:lnB>
+                    <a:solidFill>
+                      <a:srgbClr val="FFFFFF"/>
+                    </a:solidFill>
+                  </a:tcPr>
+                </a:tc>
+                <a:tc>
+                  <a:txBody>
+                    <a:bodyPr/>
+                    <a:lstStyle/>
+                    <a:p>
+                      <a:pPr marL="0" indent="0" algn="l">
+                        <a:buNone/>
+                      </a:pPr>
+                      <a:r>
+                        <a:rPr lang="en-US" sz="1100" dirty="0">
+                          <a:solidFill>
+                            <a:srgbClr val="1A1A1A"/>
+                          </a:solidFill>
+                          <a:latin typeface="Calibri" pitchFamily="34" charset="0"/>
+                          <a:ea typeface="Calibri" pitchFamily="34" charset="-122"/>
+                          <a:cs typeface="Calibri" pitchFamily="34" charset="-120"/>
+                        </a:rPr>
+                        <a:t>Hybrid (custom)</a:t>
+                      </a:r>
+                      <a:endParaRPr lang="en-US" sz="1100" dirty="0">
+                        <a:latin typeface="Calibri" charset="0"/>
+                        <a:ea typeface="Calibri" charset="0"/>
+                        <a:cs typeface="Calibri" charset="0"/>
+                      </a:endParaRPr>
+                    </a:p>
+                  </a:txBody>
+                  <a:tcPr anchor="ctr">
+                    <a:lnL w="6350" cap="flat" cmpd="sng" algn="ctr">
+                      <a:solidFill>
+                        <a:srgbClr val="D6DBE5"/>
+                      </a:solidFill>
+                      <a:prstDash val="solid"/>
+                      <a:round/>
+                      <a:headEnd type="none" w="med" len="med"/>
+                      <a:tailEnd type="none" w="med" len="med"/>
+                    </a:lnL>
+                    <a:lnR w="6350" cap="flat" cmpd="sng" algn="ctr">
+                      <a:solidFill>
+                        <a:srgbClr val="D6DBE5"/>
+                      </a:solidFill>
+                      <a:prstDash val="solid"/>
+                      <a:round/>
+                      <a:headEnd type="none" w="med" len="med"/>
+                      <a:tailEnd type="none" w="med" len="med"/>
+                    </a:lnR>
+                    <a:lnT w="6350" cap="flat" cmpd="sng" algn="ctr">
+                      <a:solidFill>
+                        <a:srgbClr val="D6DBE5"/>
+                      </a:solidFill>
+                      <a:prstDash val="solid"/>
+                      <a:round/>
+                      <a:headEnd type="none" w="med" len="med"/>
+                      <a:tailEnd type="none" w="med" len="med"/>
+                    </a:lnT>
+                    <a:lnB w="6350" cap="flat" cmpd="sng" algn="ctr">
+                      <a:solidFill>
+                        <a:srgbClr val="D6DBE5"/>
+                      </a:solidFill>
+                      <a:prstDash val="solid"/>
+                      <a:round/>
+                      <a:headEnd type="none" w="med" len="med"/>
+                      <a:tailEnd type="none" w="med" len="med"/>
+                    </a:lnB>
+                    <a:solidFill>
+                      <a:srgbClr val="FFFFFF"/>
+                    </a:solidFill>
+                  </a:tcPr>
+                </a:tc>
+                <a:tc>
+                  <a:txBody>
+                    <a:bodyPr/>
+                    <a:lstStyle/>
+                    <a:p>
+                      <a:pPr marL="0" indent="0" algn="l">
+                        <a:buNone/>
+                      </a:pPr>
+                      <a:r>
+                        <a:rPr lang="en-US" sz="1100" dirty="0">
+                          <a:solidFill>
+                            <a:srgbClr val="1A1A1A"/>
+                          </a:solidFill>
+                          <a:latin typeface="Calibri" pitchFamily="34" charset="0"/>
+                          <a:ea typeface="Calibri" pitchFamily="34" charset="-122"/>
+                          <a:cs typeface="Calibri" pitchFamily="34" charset="-120"/>
+                        </a:rPr>
+                        <a:t>LinearSVC</a:t>
+                      </a:r>
+                      <a:endParaRPr lang="en-US" sz="1100" dirty="0">
+                        <a:latin typeface="Calibri" charset="0"/>
+                        <a:ea typeface="Calibri" charset="0"/>
+                        <a:cs typeface="Calibri" charset="0"/>
+                      </a:endParaRPr>
+                    </a:p>
+                  </a:txBody>
+                  <a:tcPr anchor="ctr">
+                    <a:lnL w="6350" cap="flat" cmpd="sng" algn="ctr">
+                      <a:solidFill>
+                        <a:srgbClr val="D6DBE5"/>
+                      </a:solidFill>
+                      <a:prstDash val="solid"/>
+                      <a:round/>
+                      <a:headEnd type="none" w="med" len="med"/>
+                      <a:tailEnd type="none" w="med" len="med"/>
+                    </a:lnL>
+                    <a:lnR w="6350" cap="flat" cmpd="sng" algn="ctr">
+                      <a:solidFill>
+                        <a:srgbClr val="D6DBE5"/>
+                      </a:solidFill>
+                      <a:prstDash val="solid"/>
+                      <a:round/>
+                      <a:headEnd type="none" w="med" len="med"/>
+                      <a:tailEnd type="none" w="med" len="med"/>
+                    </a:lnR>
+                    <a:lnT w="6350" cap="flat" cmpd="sng" algn="ctr">
+                      <a:solidFill>
+                        <a:srgbClr val="D6DBE5"/>
+                      </a:solidFill>
+                      <a:prstDash val="solid"/>
+                      <a:round/>
+                      <a:headEnd type="none" w="med" len="med"/>
+                      <a:tailEnd type="none" w="med" len="med"/>
+                    </a:lnT>
+                    <a:lnB w="6350" cap="flat" cmpd="sng" algn="ctr">
+                      <a:solidFill>
+                        <a:srgbClr val="D6DBE5"/>
+                      </a:solidFill>
+                      <a:prstDash val="solid"/>
+                      <a:round/>
+                      <a:headEnd type="none" w="med" len="med"/>
+                      <a:tailEnd type="none" w="med" len="med"/>
+                    </a:lnB>
+                    <a:solidFill>
+                      <a:srgbClr val="FFFFFF"/>
+                    </a:solidFill>
+                  </a:tcPr>
+                </a:tc>
+                <a:tc>
+                  <a:txBody>
+                    <a:bodyPr/>
+                    <a:lstStyle/>
+                    <a:p>
+                      <a:pPr marL="0" indent="0" algn="ctr">
+                        <a:buNone/>
+                      </a:pPr>
+                      <a:r>
+                        <a:rPr lang="en-US" sz="1200" dirty="0">
+                          <a:solidFill>
+                            <a:srgbClr val="1A1A1A"/>
+                          </a:solidFill>
+                          <a:latin typeface="Calibri" pitchFamily="34" charset="0"/>
+                          <a:ea typeface="Calibri" pitchFamily="34" charset="-122"/>
+                          <a:cs typeface="Calibri" pitchFamily="34" charset="-120"/>
+                        </a:rPr>
+                        <a:t>0.526</a:t>
+                      </a:r>
+                      <a:endParaRPr lang="en-US" sz="1200" dirty="0">
+                        <a:latin typeface="Calibri" charset="0"/>
+                        <a:ea typeface="Calibri" charset="0"/>
+                        <a:cs typeface="Calibri" charset="0"/>
+                      </a:endParaRPr>
+                    </a:p>
+                  </a:txBody>
+                  <a:tcPr anchor="ctr">
+                    <a:lnL w="6350" cap="flat" cmpd="sng" algn="ctr">
+                      <a:solidFill>
+                        <a:srgbClr val="D6DBE5"/>
+                      </a:solidFill>
+                      <a:prstDash val="solid"/>
+                      <a:round/>
+                      <a:headEnd type="none" w="med" len="med"/>
+                      <a:tailEnd type="none" w="med" len="med"/>
+                    </a:lnL>
+                    <a:lnR w="6350" cap="flat" cmpd="sng" algn="ctr">
+                      <a:solidFill>
+                        <a:srgbClr val="D6DBE5"/>
+                      </a:solidFill>
+                      <a:prstDash val="solid"/>
+                      <a:round/>
+                      <a:headEnd type="none" w="med" len="med"/>
+                      <a:tailEnd type="none" w="med" len="med"/>
+                    </a:lnR>
+                    <a:lnT w="6350" cap="flat" cmpd="sng" algn="ctr">
+                      <a:solidFill>
+                        <a:srgbClr val="D6DBE5"/>
+                      </a:solidFill>
+                      <a:prstDash val="solid"/>
+                      <a:round/>
+                      <a:headEnd type="none" w="med" len="med"/>
+                      <a:tailEnd type="none" w="med" len="med"/>
+                    </a:lnT>
+                    <a:lnB w="6350" cap="flat" cmpd="sng" algn="ctr">
+                      <a:solidFill>
+                        <a:srgbClr val="D6DBE5"/>
+                      </a:solidFill>
+                      <a:prstDash val="solid"/>
+                      <a:round/>
+                      <a:headEnd type="none" w="med" len="med"/>
+                      <a:tailEnd type="none" w="med" len="med"/>
+                    </a:lnB>
+                    <a:solidFill>
+                      <a:srgbClr val="FFFFFF"/>
+                    </a:solidFill>
+                  </a:tcPr>
+                </a:tc>
+                <a:tc>
+                  <a:txBody>
+                    <a:bodyPr/>
+                    <a:lstStyle/>
+                    <a:p>
+                      <a:pPr marL="0" indent="0" algn="ctr">
+                        <a:buNone/>
+                      </a:pPr>
+                      <a:r>
+                        <a:rPr lang="en-US" sz="1200" b="1" dirty="0">
+                          <a:solidFill>
+                            <a:srgbClr val="0B5394"/>
+                          </a:solidFill>
+                          <a:latin typeface="Calibri" pitchFamily="34" charset="0"/>
+                          <a:ea typeface="Calibri" pitchFamily="34" charset="-122"/>
+                          <a:cs typeface="Calibri" pitchFamily="34" charset="-120"/>
+                        </a:rPr>
+                        <a:t>0.541</a:t>
+                      </a:r>
+                      <a:endParaRPr lang="en-US" sz="1200" dirty="0">
+                        <a:latin typeface="Calibri" charset="0"/>
+                        <a:ea typeface="Calibri" charset="0"/>
+                        <a:cs typeface="Calibri" charset="0"/>
+                      </a:endParaRPr>
+                    </a:p>
+                  </a:txBody>
+                  <a:tcPr anchor="ctr">
+                    <a:lnL w="6350" cap="flat" cmpd="sng" algn="ctr">
+                      <a:solidFill>
+                        <a:srgbClr val="D6DBE5"/>
+                      </a:solidFill>
+                      <a:prstDash val="solid"/>
+                      <a:round/>
+                      <a:headEnd type="none" w="med" len="med"/>
+                      <a:tailEnd type="none" w="med" len="med"/>
+                    </a:lnL>
+                    <a:lnR w="6350" cap="flat" cmpd="sng" algn="ctr">
+                      <a:solidFill>
+                        <a:srgbClr val="D6DBE5"/>
+                      </a:solidFill>
+                      <a:prstDash val="solid"/>
+                      <a:round/>
+                      <a:headEnd type="none" w="med" len="med"/>
+                      <a:tailEnd type="none" w="med" len="med"/>
+                    </a:lnR>
+                    <a:lnT w="6350" cap="flat" cmpd="sng" algn="ctr">
+                      <a:solidFill>
+                        <a:srgbClr val="D6DBE5"/>
+                      </a:solidFill>
+                      <a:prstDash val="solid"/>
+                      <a:round/>
+                      <a:headEnd type="none" w="med" len="med"/>
+                      <a:tailEnd type="none" w="med" len="med"/>
+                    </a:lnT>
+                    <a:lnB w="6350" cap="flat" cmpd="sng" algn="ctr">
+                      <a:solidFill>
+                        <a:srgbClr val="D6DBE5"/>
+                      </a:solidFill>
+                      <a:prstDash val="solid"/>
+                      <a:round/>
+                      <a:headEnd type="none" w="med" len="med"/>
+                      <a:tailEnd type="none" w="med" len="med"/>
+                    </a:lnB>
+                    <a:solidFill>
+                      <a:srgbClr val="D6E4F2"/>
+                    </a:solidFill>
+                  </a:tcPr>
+                </a:tc>
+                <a:extLst>
+                  <a:ext uri="{0D108BD9-81ED-4DB2-BD59-A6C34878D82A}">
+                    <a16:rowId xmlns:a16="http://schemas.microsoft.com/office/drawing/2014/main" val="10005"/>
+                  </a:ext>
+                </a:extLst>
+              </a:tr>
+            </a:tbl>
+          </a:graphicData>
+        </a:graphic>
+      </p:graphicFrame>
+      <p:sp>
+        <p:nvSpPr>
+          <p:cNvPr id="6" name="Shape 3">
+            <a:extLst>
+              <a:ext uri="{FF2B5EF4-FFF2-40B4-BE49-F238E27FC236}">
+                <a16:creationId xmlns:a16="http://schemas.microsoft.com/office/drawing/2014/main" id="{246732AC-3FD1-0349-DB2F-996DA1E5D52F}"/>
+              </a:ext>
+            </a:extLst>
+          </p:cNvPr>
+          <p:cNvSpPr/>
+          <p:nvPr/>
+        </p:nvSpPr>
+        <p:spPr>
+          <a:xfrm>
+            <a:off x="365760" y="3931920"/>
+            <a:ext cx="8412480" cy="777240"/>
+          </a:xfrm>
+          <a:prstGeom prst="rect">
+            <a:avLst/>
+          </a:prstGeom>
+          <a:solidFill>
+            <a:srgbClr val="F4F6FA"/>
+          </a:solidFill>
+          <a:ln/>
+        </p:spPr>
+      </p:sp>
+      <p:sp>
+        <p:nvSpPr>
+          <p:cNvPr id="7" name="Text 4">
+            <a:extLst>
+              <a:ext uri="{FF2B5EF4-FFF2-40B4-BE49-F238E27FC236}">
+                <a16:creationId xmlns:a16="http://schemas.microsoft.com/office/drawing/2014/main" id="{DBDDA90F-03D4-4EFE-CF99-F64BA7D12F53}"/>
+              </a:ext>
+            </a:extLst>
+          </p:cNvPr>
+          <p:cNvSpPr/>
+          <p:nvPr/>
+        </p:nvSpPr>
+        <p:spPr>
+          <a:xfrm>
+            <a:off x="548640" y="4023360"/>
+            <a:ext cx="8229600" cy="594360"/>
+          </a:xfrm>
+          <a:prstGeom prst="rect">
+            <a:avLst/>
+          </a:prstGeom>
+          <a:noFill/>
+          <a:ln/>
+        </p:spPr>
+        <p:txBody>
+          <a:bodyPr wrap="square" lIns="0" tIns="0" rIns="0" bIns="0" rtlCol="0" anchor="ctr"/>
+          <a:lstStyle/>
+          <a:p>
+            <a:pPr marL="0" indent="0">
+              <a:lnSpc>
+                <a:spcPts val="1800"/>
+              </a:lnSpc>
+              <a:buNone/>
+            </a:pPr>
+            <a:r>
+              <a:rPr lang="en-US" sz="1200" b="1" dirty="0">
+                <a:solidFill>
+                  <a:srgbClr val="0B5394"/>
+                </a:solidFill>
+                <a:latin typeface="Calibri" pitchFamily="34" charset="0"/>
+                <a:ea typeface="Calibri" pitchFamily="34" charset="-122"/>
+                <a:cs typeface="Calibri" pitchFamily="34" charset="-120"/>
+              </a:rPr>
+              <a:t>Вывод: </a:t>
+            </a:r>
+            <a:r>
+              <a:rPr lang="en-US" sz="1200" dirty="0">
+                <a:solidFill>
+                  <a:srgbClr val="1A1A1A"/>
+                </a:solidFill>
+                <a:latin typeface="Calibri" pitchFamily="34" charset="0"/>
+                <a:ea typeface="Calibri" pitchFamily="34" charset="-122"/>
+                <a:cs typeface="Calibri" pitchFamily="34" charset="-120"/>
+              </a:rPr>
+              <a:t>выбор лидера зависит от метрики. </a:t>
+            </a:r>
+            <a:r>
+              <a:rPr lang="en-US" sz="1200" b="1" dirty="0">
+                <a:solidFill>
+                  <a:srgbClr val="1A1A1A"/>
+                </a:solidFill>
+                <a:latin typeface="Calibri" pitchFamily="34" charset="0"/>
+                <a:ea typeface="Calibri" pitchFamily="34" charset="-122"/>
+                <a:cs typeface="Calibri" pitchFamily="34" charset="-120"/>
+              </a:rPr>
+              <a:t>Bal. accuracy — </a:t>
+            </a:r>
+            <a:r>
+              <a:rPr lang="en-US" sz="1200" dirty="0">
+                <a:solidFill>
+                  <a:srgbClr val="1A1A1A"/>
+                </a:solidFill>
+                <a:latin typeface="Calibri" pitchFamily="34" charset="0"/>
+                <a:ea typeface="Calibri" pitchFamily="34" charset="-122"/>
+                <a:cs typeface="Calibri" pitchFamily="34" charset="-120"/>
+              </a:rPr>
+              <a:t>Cosine-Centroid (0.578). </a:t>
+            </a:r>
+            <a:r>
+              <a:rPr lang="en-US" sz="1200" b="1" dirty="0">
+                <a:solidFill>
+                  <a:srgbClr val="1A1A1A"/>
+                </a:solidFill>
+                <a:latin typeface="Calibri" pitchFamily="34" charset="0"/>
+                <a:ea typeface="Calibri" pitchFamily="34" charset="-122"/>
+                <a:cs typeface="Calibri" pitchFamily="34" charset="-120"/>
+              </a:rPr>
+              <a:t>Macro F1 — </a:t>
+            </a:r>
+            <a:r>
+              <a:rPr lang="en-US" sz="1200" dirty="0">
+                <a:solidFill>
+                  <a:srgbClr val="1A1A1A"/>
+                </a:solidFill>
+                <a:latin typeface="Calibri" pitchFamily="34" charset="0"/>
+                <a:ea typeface="Calibri" pitchFamily="34" charset="-122"/>
+                <a:cs typeface="Calibri" pitchFamily="34" charset="-120"/>
+              </a:rPr>
+              <a:t>композитное пространство Hybrid + дообученный эмбеддер (0.543).</a:t>
+            </a:r>
+            <a:endParaRPr lang="en-US" sz="1200" dirty="0"/>
+          </a:p>
+        </p:txBody>
+      </p:sp>
+      <p:sp>
+        <p:nvSpPr>
+          <p:cNvPr id="8" name="Text 5">
+            <a:extLst>
+              <a:ext uri="{FF2B5EF4-FFF2-40B4-BE49-F238E27FC236}">
+                <a16:creationId xmlns:a16="http://schemas.microsoft.com/office/drawing/2014/main" id="{D9699D28-D014-A260-2A8E-1F269EF4145C}"/>
+              </a:ext>
+            </a:extLst>
+          </p:cNvPr>
+          <p:cNvSpPr/>
+          <p:nvPr/>
+        </p:nvSpPr>
+        <p:spPr>
+          <a:xfrm>
+            <a:off x="8595360" y="4846320"/>
+            <a:ext cx="457200" cy="274320"/>
+          </a:xfrm>
+          <a:prstGeom prst="rect">
+            <a:avLst/>
+          </a:prstGeom>
+          <a:noFill/>
+          <a:ln/>
+        </p:spPr>
+        <p:txBody>
+          <a:bodyPr wrap="square" lIns="0" tIns="0" rIns="0" bIns="0" rtlCol="0" anchor="ctr"/>
+          <a:lstStyle/>
+          <a:p>
+            <a:pPr marL="0" indent="0" algn="r">
+              <a:buNone/>
+            </a:pPr>
+            <a:r>
+              <a:rPr lang="en-US" sz="1000" dirty="0">
+                <a:solidFill>
+                  <a:srgbClr val="5C5C5C"/>
+                </a:solidFill>
+                <a:latin typeface="Calibri" pitchFamily="34" charset="0"/>
+                <a:ea typeface="Calibri" pitchFamily="34" charset="-122"/>
+                <a:cs typeface="Calibri" pitchFamily="34" charset="-120"/>
+              </a:rPr>
+              <a:t>12</a:t>
+            </a:r>
+            <a:endParaRPr lang="en-US" sz="1000" dirty="0"/>
+          </a:p>
+        </p:txBody>
+      </p:sp>
+    </p:spTree>
+    <p:extLst>
+      <p:ext uri="{BB962C8B-B14F-4D97-AF65-F5344CB8AC3E}">
+        <p14:creationId xmlns:p14="http://schemas.microsoft.com/office/powerpoint/2010/main" val="2407438831"/>
+      </p:ext>
+    </p:extLst>
+  </p:cSld>
+  <p:clrMapOvr>
+    <a:masterClrMapping/>
+  </p:clrMapOvr>
+</p:sld>
+</file>
+
+<file path=ppt/slides/slide14.xml><?xml version="1.0" encoding="utf-8"?>
+<p:sld xmlns:a="http://schemas.openxmlformats.org/drawingml/2006/main" xmlns:r="http://schemas.openxmlformats.org/officeDocument/2006/relationships" xmlns:p="http://schemas.openxmlformats.org/presentationml/2006/main">
   <p:cSld name="Slide 11">
     <p:bg>
       <p:bgPr>
@@ -7370,7 +10057,7 @@
 </p:sld>
 </file>
 
-<file path=ppt/slides/slide14.xml><?xml version="1.0" encoding="utf-8"?>
+<file path=ppt/slides/slide15.xml><?xml version="1.0" encoding="utf-8"?>
 <p:sld xmlns:a="http://schemas.openxmlformats.org/drawingml/2006/main" xmlns:r="http://schemas.openxmlformats.org/officeDocument/2006/relationships" xmlns:p="http://schemas.openxmlformats.org/presentationml/2006/main">
   <p:cSld name="Slide 12">
     <p:bg>
@@ -7667,6 +10354,17 @@
               <a:buChar char="•"/>
             </a:pPr>
             <a:r>
+              <a:rPr lang="en-US" sz="1200" dirty="0" err="1">
+                <a:solidFill>
+                  <a:srgbClr val="1A1A1A"/>
+                </a:solidFill>
+                <a:latin typeface="Calibri" pitchFamily="34" charset="0"/>
+                <a:ea typeface="Calibri" pitchFamily="34" charset="-122"/>
+                <a:cs typeface="Calibri" pitchFamily="34" charset="-120"/>
+              </a:rPr>
+              <a:t>более</a:t>
+            </a:r>
+            <a:r>
               <a:rPr lang="en-US" sz="1200" dirty="0">
                 <a:solidFill>
                   <a:srgbClr val="1A1A1A"/>
@@ -7675,7 +10373,7 @@
                 <a:ea typeface="Calibri" pitchFamily="34" charset="-122"/>
                 <a:cs typeface="Calibri" pitchFamily="34" charset="-120"/>
               </a:rPr>
-              <a:t>расширение редких классов и таргетированная аугментация</a:t>
+              <a:t> мощные модели для длинных документов (Longformer)</a:t>
             </a:r>
             <a:endParaRPr lang="en-US" sz="1200" dirty="0"/>
           </a:p>
@@ -7696,18 +10394,19 @@
                 <a:ea typeface="Calibri" pitchFamily="34" charset="-122"/>
                 <a:cs typeface="Calibri" pitchFamily="34" charset="-120"/>
               </a:rPr>
-              <a:t>более мощные модели для длинных документов (Longformer)</a:t>
-            </a:r>
-            <a:endParaRPr lang="en-US" sz="1200" dirty="0"/>
-          </a:p>
-          <a:p>
-            <a:pPr marL="342900" indent="-342900">
-              <a:spcAft>
-                <a:spcPts val="500"/>
-              </a:spcAft>
-              <a:buSzPct val="100000"/>
-              <a:buChar char="•"/>
-            </a:pPr>
+              <a:t>обучаемые механизмы объединения TF-IDF </a:t>
+            </a:r>
+            <a:r>
+              <a:rPr lang="en-US" sz="1200" dirty="0" err="1">
+                <a:solidFill>
+                  <a:srgbClr val="1A1A1A"/>
+                </a:solidFill>
+                <a:latin typeface="Calibri" pitchFamily="34" charset="0"/>
+                <a:ea typeface="Calibri" pitchFamily="34" charset="-122"/>
+                <a:cs typeface="Calibri" pitchFamily="34" charset="-120"/>
+              </a:rPr>
+              <a:t>и</a:t>
+            </a:r>
             <a:r>
               <a:rPr lang="en-US" sz="1200" dirty="0">
                 <a:solidFill>
@@ -7717,28 +10416,7 @@
                 <a:ea typeface="Calibri" pitchFamily="34" charset="-122"/>
                 <a:cs typeface="Calibri" pitchFamily="34" charset="-120"/>
               </a:rPr>
-              <a:t>обучаемые механизмы объединения TF-IDF и BERT</a:t>
-            </a:r>
-            <a:endParaRPr lang="en-US" sz="1200" dirty="0"/>
-          </a:p>
-          <a:p>
-            <a:pPr marL="342900" indent="-342900">
-              <a:spcAft>
-                <a:spcPts val="500"/>
-              </a:spcAft>
-              <a:buSzPct val="100000"/>
-              <a:buChar char="•"/>
-            </a:pPr>
-            <a:r>
-              <a:rPr lang="en-US" sz="1200" dirty="0">
-                <a:solidFill>
-                  <a:srgbClr val="1A1A1A"/>
-                </a:solidFill>
-                <a:latin typeface="Calibri" pitchFamily="34" charset="0"/>
-                <a:ea typeface="Calibri" pitchFamily="34" charset="-122"/>
-                <a:cs typeface="Calibri" pitchFamily="34" charset="-120"/>
-              </a:rPr>
-              <a:t>покластерный анализ ошибок по 36 классам</a:t>
+              <a:t> BERT</a:t>
             </a:r>
             <a:endParaRPr lang="en-US" sz="1200" dirty="0"/>
           </a:p>
@@ -8149,78 +10827,107 @@
           <a:bodyPr wrap="square" lIns="0" tIns="0" rIns="0" bIns="0" rtlCol="0" anchor="ctr"/>
           <a:lstStyle/>
           <a:p>
+            <a:pPr>
+              <a:lnSpc>
+                <a:spcPts val="2000"/>
+              </a:lnSpc>
+            </a:pPr>
+            <a:r>
+              <a:rPr lang="ru-RU" sz="1300" dirty="0">
+                <a:solidFill>
+                  <a:srgbClr val="1A1A1A"/>
+                </a:solidFill>
+                <a:latin typeface="Calibri" pitchFamily="34" charset="0"/>
+                <a:ea typeface="Calibri" pitchFamily="34" charset="-122"/>
+                <a:cs typeface="Calibri" pitchFamily="34" charset="-120"/>
+              </a:rPr>
+              <a:t>Общая электронная почта, но разные ответственные за письма. М</a:t>
+            </a:r>
+            <a:r>
+              <a:rPr lang="en-US" sz="1300" dirty="0" err="1">
+                <a:solidFill>
+                  <a:srgbClr val="1A1A1A"/>
+                </a:solidFill>
+                <a:latin typeface="Calibri" pitchFamily="34" charset="0"/>
+                <a:ea typeface="Calibri" pitchFamily="34" charset="-122"/>
+                <a:cs typeface="Calibri" pitchFamily="34" charset="-120"/>
+              </a:rPr>
+              <a:t>аршрутизация</a:t>
+            </a:r>
+            <a:r>
+              <a:rPr lang="ru-RU" sz="1300" dirty="0">
+                <a:solidFill>
+                  <a:srgbClr val="1A1A1A"/>
+                </a:solidFill>
+                <a:latin typeface="Calibri" pitchFamily="34" charset="0"/>
+                <a:ea typeface="Calibri" pitchFamily="34" charset="-122"/>
+                <a:cs typeface="Calibri" pitchFamily="34" charset="-120"/>
+              </a:rPr>
+              <a:t> писем</a:t>
+            </a:r>
+            <a:r>
+              <a:rPr lang="en-US" sz="1300" dirty="0">
+                <a:solidFill>
+                  <a:srgbClr val="1A1A1A"/>
+                </a:solidFill>
+                <a:latin typeface="Calibri" pitchFamily="34" charset="0"/>
+                <a:ea typeface="Calibri" pitchFamily="34" charset="-122"/>
+                <a:cs typeface="Calibri" pitchFamily="34" charset="-120"/>
+              </a:rPr>
+              <a:t> </a:t>
+            </a:r>
+            <a:r>
+              <a:rPr lang="en-US" sz="1300" dirty="0" err="1">
+                <a:solidFill>
+                  <a:srgbClr val="1A1A1A"/>
+                </a:solidFill>
+                <a:latin typeface="Calibri" pitchFamily="34" charset="0"/>
+                <a:ea typeface="Calibri" pitchFamily="34" charset="-122"/>
+                <a:cs typeface="Calibri" pitchFamily="34" charset="-120"/>
+              </a:rPr>
+              <a:t>по</a:t>
+            </a:r>
+            <a:r>
+              <a:rPr lang="en-US" sz="1300" dirty="0">
+                <a:solidFill>
+                  <a:srgbClr val="1A1A1A"/>
+                </a:solidFill>
+                <a:latin typeface="Calibri" pitchFamily="34" charset="0"/>
+                <a:ea typeface="Calibri" pitchFamily="34" charset="-122"/>
+                <a:cs typeface="Calibri" pitchFamily="34" charset="-120"/>
+              </a:rPr>
+              <a:t> </a:t>
+            </a:r>
+            <a:r>
+              <a:rPr lang="en-US" sz="1300" dirty="0" err="1">
+                <a:solidFill>
+                  <a:srgbClr val="1A1A1A"/>
+                </a:solidFill>
+                <a:latin typeface="Calibri" pitchFamily="34" charset="0"/>
+                <a:ea typeface="Calibri" pitchFamily="34" charset="-122"/>
+                <a:cs typeface="Calibri" pitchFamily="34" charset="-120"/>
+              </a:rPr>
+              <a:t>подразделениям</a:t>
+            </a:r>
+            <a:r>
+              <a:rPr lang="ru-RU" sz="1300" dirty="0">
+                <a:solidFill>
+                  <a:srgbClr val="1A1A1A"/>
+                </a:solidFill>
+                <a:latin typeface="Calibri" pitchFamily="34" charset="0"/>
+                <a:ea typeface="Calibri" pitchFamily="34" charset="-122"/>
+                <a:cs typeface="Calibri" pitchFamily="34" charset="-120"/>
+              </a:rPr>
+              <a:t> рутинная задача, которая становится узким местом и блокирует работу. </a:t>
+            </a:r>
+          </a:p>
+          <a:p>
             <a:pPr marL="0" indent="0">
               <a:lnSpc>
                 <a:spcPts val="2000"/>
               </a:lnSpc>
               <a:buNone/>
             </a:pPr>
-            <a:r>
-              <a:rPr lang="en-US" sz="1300" dirty="0" err="1">
-                <a:solidFill>
-                  <a:srgbClr val="1A1A1A"/>
-                </a:solidFill>
-                <a:latin typeface="Calibri" pitchFamily="34" charset="0"/>
-                <a:ea typeface="Calibri" pitchFamily="34" charset="-122"/>
-                <a:cs typeface="Calibri" pitchFamily="34" charset="-120"/>
-              </a:rPr>
-              <a:t>Реальная</a:t>
-            </a:r>
-            <a:r>
-              <a:rPr lang="en-US" sz="1300" dirty="0">
-                <a:solidFill>
-                  <a:srgbClr val="1A1A1A"/>
-                </a:solidFill>
-                <a:latin typeface="Calibri" pitchFamily="34" charset="0"/>
-                <a:ea typeface="Calibri" pitchFamily="34" charset="-122"/>
-                <a:cs typeface="Calibri" pitchFamily="34" charset="-120"/>
-              </a:rPr>
-              <a:t> переписка — это длинные тексты на русском, с типовыми деловыми оборотами, аббревиатурами и сильным </a:t>
-            </a:r>
-            <a:r>
-              <a:rPr lang="en-US" sz="1300" dirty="0" err="1">
-                <a:solidFill>
-                  <a:srgbClr val="1A1A1A"/>
-                </a:solidFill>
-                <a:latin typeface="Calibri" pitchFamily="34" charset="0"/>
-                <a:ea typeface="Calibri" pitchFamily="34" charset="-122"/>
-                <a:cs typeface="Calibri" pitchFamily="34" charset="-120"/>
-              </a:rPr>
-              <a:t>дисбалансом</a:t>
-            </a:r>
-            <a:r>
-              <a:rPr lang="en-US" sz="1300" dirty="0">
-                <a:solidFill>
-                  <a:srgbClr val="1A1A1A"/>
-                </a:solidFill>
-                <a:latin typeface="Calibri" pitchFamily="34" charset="0"/>
-                <a:ea typeface="Calibri" pitchFamily="34" charset="-122"/>
-                <a:cs typeface="Calibri" pitchFamily="34" charset="-120"/>
-              </a:rPr>
-              <a:t> </a:t>
-            </a:r>
-            <a:r>
-              <a:rPr lang="ru-RU" sz="1300" dirty="0">
-                <a:solidFill>
-                  <a:srgbClr val="1A1A1A"/>
-                </a:solidFill>
-                <a:latin typeface="Calibri" pitchFamily="34" charset="0"/>
-                <a:ea typeface="Calibri" pitchFamily="34" charset="-122"/>
-                <a:cs typeface="Calibri" pitchFamily="34" charset="-120"/>
-              </a:rPr>
-              <a:t>по подразделениям</a:t>
-            </a:r>
-            <a:r>
-              <a:rPr lang="en-US" sz="1300" dirty="0">
-                <a:solidFill>
-                  <a:srgbClr val="1A1A1A"/>
-                </a:solidFill>
-                <a:latin typeface="Calibri" pitchFamily="34" charset="0"/>
-                <a:ea typeface="Calibri" pitchFamily="34" charset="-122"/>
-                <a:cs typeface="Calibri" pitchFamily="34" charset="-120"/>
-              </a:rPr>
-              <a:t>.</a:t>
-            </a:r>
             <a:endParaRPr lang="ru-RU" sz="1300" dirty="0">
               <a:solidFill>
                 <a:srgbClr val="1A1A1A"/>
@@ -8237,14 +10944,6 @@
               </a:lnSpc>
               <a:buNone/>
             </a:pPr>
-            <a:endParaRPr lang="ru-RU" sz="1300" dirty="0"/>
-          </a:p>
-          <a:p>
-            <a:pPr>
-              <a:lnSpc>
-                <a:spcPts val="2000"/>
-              </a:lnSpc>
-            </a:pPr>
             <a:r>
               <a:rPr lang="ru-RU" sz="1300" dirty="0">
                 <a:solidFill>
@@ -8254,7 +10953,7 @@
                 <a:ea typeface="Calibri" pitchFamily="34" charset="-122"/>
                 <a:cs typeface="Calibri" pitchFamily="34" charset="-120"/>
               </a:rPr>
-              <a:t>М</a:t>
+              <a:t>Деловая </a:t>
             </a:r>
             <a:r>
               <a:rPr lang="en-US" sz="1300" dirty="0" err="1">
@@ -8265,7 +10964,40 @@
                 <a:ea typeface="Calibri" pitchFamily="34" charset="-122"/>
                 <a:cs typeface="Calibri" pitchFamily="34" charset="-120"/>
               </a:rPr>
-              <a:t>аршрутизация</a:t>
+              <a:t>переписка</a:t>
+            </a:r>
+            <a:r>
+              <a:rPr lang="en-US" sz="1300" dirty="0">
+                <a:solidFill>
+                  <a:srgbClr val="1A1A1A"/>
+                </a:solidFill>
+                <a:latin typeface="Calibri" pitchFamily="34" charset="0"/>
+                <a:ea typeface="Calibri" pitchFamily="34" charset="-122"/>
+                <a:cs typeface="Calibri" pitchFamily="34" charset="-120"/>
+              </a:rPr>
+              <a:t> — это длинные тексты на русском, с типовыми деловыми оборотами, аббревиатурами и сильным </a:t>
+            </a:r>
+            <a:r>
+              <a:rPr lang="en-US" sz="1300" dirty="0" err="1">
+                <a:solidFill>
+                  <a:srgbClr val="1A1A1A"/>
+                </a:solidFill>
+                <a:latin typeface="Calibri" pitchFamily="34" charset="0"/>
+                <a:ea typeface="Calibri" pitchFamily="34" charset="-122"/>
+                <a:cs typeface="Calibri" pitchFamily="34" charset="-120"/>
+              </a:rPr>
+              <a:t>дисбалансом</a:t>
+            </a:r>
+            <a:r>
+              <a:rPr lang="en-US" sz="1300" dirty="0">
+                <a:solidFill>
+                  <a:srgbClr val="1A1A1A"/>
+                </a:solidFill>
+                <a:latin typeface="Calibri" pitchFamily="34" charset="0"/>
+                <a:ea typeface="Calibri" pitchFamily="34" charset="-122"/>
+                <a:cs typeface="Calibri" pitchFamily="34" charset="-120"/>
+              </a:rPr>
+              <a:t> </a:t>
             </a:r>
             <a:r>
               <a:rPr lang="ru-RU" sz="1300" dirty="0">
@@ -8276,7 +11008,7 @@
                 <a:ea typeface="Calibri" pitchFamily="34" charset="-122"/>
                 <a:cs typeface="Calibri" pitchFamily="34" charset="-120"/>
               </a:rPr>
-              <a:t> писем</a:t>
+              <a:t>по подразделениям</a:t>
             </a:r>
             <a:r>
               <a:rPr lang="en-US" sz="1300" dirty="0">
@@ -8287,104 +11019,7 @@
                 <a:ea typeface="Calibri" pitchFamily="34" charset="-122"/>
                 <a:cs typeface="Calibri" pitchFamily="34" charset="-120"/>
               </a:rPr>
-              <a:t> </a:t>
-            </a:r>
-            <a:r>
-              <a:rPr lang="en-US" sz="1300" dirty="0" err="1">
-                <a:solidFill>
-                  <a:srgbClr val="1A1A1A"/>
-                </a:solidFill>
-                <a:latin typeface="Calibri" pitchFamily="34" charset="0"/>
-                <a:ea typeface="Calibri" pitchFamily="34" charset="-122"/>
-                <a:cs typeface="Calibri" pitchFamily="34" charset="-120"/>
-              </a:rPr>
-              <a:t>по</a:t>
-            </a:r>
-            <a:r>
-              <a:rPr lang="en-US" sz="1300" dirty="0">
-                <a:solidFill>
-                  <a:srgbClr val="1A1A1A"/>
-                </a:solidFill>
-                <a:latin typeface="Calibri" pitchFamily="34" charset="0"/>
-                <a:ea typeface="Calibri" pitchFamily="34" charset="-122"/>
-                <a:cs typeface="Calibri" pitchFamily="34" charset="-120"/>
-              </a:rPr>
-              <a:t> </a:t>
-            </a:r>
-            <a:r>
-              <a:rPr lang="en-US" sz="1300" dirty="0" err="1">
-                <a:solidFill>
-                  <a:srgbClr val="1A1A1A"/>
-                </a:solidFill>
-                <a:latin typeface="Calibri" pitchFamily="34" charset="0"/>
-                <a:ea typeface="Calibri" pitchFamily="34" charset="-122"/>
-                <a:cs typeface="Calibri" pitchFamily="34" charset="-120"/>
-              </a:rPr>
-              <a:t>подразделениям</a:t>
-            </a:r>
-            <a:r>
-              <a:rPr lang="ru-RU" sz="1300" dirty="0">
-                <a:solidFill>
-                  <a:srgbClr val="1A1A1A"/>
-                </a:solidFill>
-                <a:latin typeface="Calibri" pitchFamily="34" charset="0"/>
-                <a:ea typeface="Calibri" pitchFamily="34" charset="-122"/>
-                <a:cs typeface="Calibri" pitchFamily="34" charset="-120"/>
-              </a:rPr>
-              <a:t> неприятная задача, которая блокирует работу. Можно автоматизировать решив задачу </a:t>
-            </a:r>
-            <a:r>
-              <a:rPr lang="ru-RU" sz="1300" dirty="0" err="1">
-                <a:solidFill>
-                  <a:srgbClr val="1A1A1A"/>
-                </a:solidFill>
-                <a:latin typeface="Calibri" pitchFamily="34" charset="0"/>
-                <a:ea typeface="Calibri" pitchFamily="34" charset="-122"/>
-                <a:cs typeface="Calibri" pitchFamily="34" charset="-120"/>
-              </a:rPr>
-              <a:t>многоклассовой</a:t>
-            </a:r>
-            <a:r>
-              <a:rPr lang="ru-RU" sz="1300" dirty="0">
-                <a:solidFill>
-                  <a:srgbClr val="1A1A1A"/>
-                </a:solidFill>
-                <a:latin typeface="Calibri" pitchFamily="34" charset="0"/>
-                <a:ea typeface="Calibri" pitchFamily="34" charset="-122"/>
-                <a:cs typeface="Calibri" pitchFamily="34" charset="-120"/>
-              </a:rPr>
-              <a:t> классификации</a:t>
-            </a:r>
-            <a:r>
-              <a:rPr lang="en-US" sz="1300" dirty="0">
-                <a:solidFill>
-                  <a:srgbClr val="1A1A1A"/>
-                </a:solidFill>
-                <a:latin typeface="Calibri" pitchFamily="34" charset="0"/>
-                <a:ea typeface="Calibri" pitchFamily="34" charset="-122"/>
-                <a:cs typeface="Calibri" pitchFamily="34" charset="-120"/>
-              </a:rPr>
               <a:t>.</a:t>
-            </a:r>
-            <a:endParaRPr lang="en-US" sz="1300" dirty="0"/>
-          </a:p>
-          <a:p>
-            <a:pPr marL="0" indent="0">
-              <a:lnSpc>
-                <a:spcPts val="2000"/>
-              </a:lnSpc>
-              <a:buNone/>
-            </a:pPr>
-            <a:r>
-              <a:rPr lang="en-US" sz="1300" dirty="0">
-                <a:solidFill>
-                  <a:srgbClr val="1A1A1A"/>
-                </a:solidFill>
-                <a:latin typeface="Calibri" pitchFamily="34" charset="0"/>
-                <a:ea typeface="Calibri" pitchFamily="34" charset="-122"/>
-                <a:cs typeface="Calibri" pitchFamily="34" charset="-120"/>
-              </a:rPr>
-              <a:t> </a:t>
             </a:r>
             <a:endParaRPr lang="ru-RU" sz="1300" dirty="0">
               <a:solidFill>
@@ -8402,6 +11037,15 @@
               </a:lnSpc>
               <a:buNone/>
             </a:pPr>
+            <a:endParaRPr lang="ru-RU" sz="1300" dirty="0"/>
+          </a:p>
+          <a:p>
+            <a:pPr marL="0" indent="0">
+              <a:lnSpc>
+                <a:spcPts val="2000"/>
+              </a:lnSpc>
+              <a:buNone/>
+            </a:pPr>
             <a:r>
               <a:rPr lang="ru-RU" sz="1300" dirty="0" err="1">
                 <a:solidFill>
@@ -8420,7 +11064,7 @@
                 <a:latin typeface="Calibri" pitchFamily="34" charset="0"/>
                 <a:cs typeface="Calibri" pitchFamily="34" charset="-120"/>
               </a:rPr>
-              <a:t> модели классификации не адаптированы к доменной специфике компании. Они не могут быть интегрированы в компанию как есть.</a:t>
+              <a:t> модели классификации не адаптированы к доменной области и специфике документов. Ничего не известно про подразделения компании.</a:t>
             </a:r>
             <a:endParaRPr lang="en-US" sz="1300" dirty="0"/>
           </a:p>
@@ -10006,7 +12650,7 @@
                 <a:ea typeface="Calibri" pitchFamily="34" charset="-122"/>
                 <a:cs typeface="Calibri" pitchFamily="34" charset="-120"/>
               </a:rPr>
-              <a:t>датасете</a:t>
+              <a:t>датасете(готовиться объяснить почему выбраны эти метрики)</a:t>
             </a:r>
             <a:endParaRPr lang="en-US" sz="1200" dirty="0"/>
           </a:p>
@@ -12788,6 +15432,17 @@
               <a:buNone/>
             </a:pPr>
             <a:r>
+              <a:rPr lang="en-US" sz="1100" b="1" dirty="0" err="1">
+                <a:solidFill>
+                  <a:srgbClr val="0B5394"/>
+                </a:solidFill>
+                <a:latin typeface="Calibri" pitchFamily="34" charset="0"/>
+                <a:ea typeface="Calibri" pitchFamily="34" charset="-122"/>
+                <a:cs typeface="Calibri" pitchFamily="34" charset="-120"/>
+              </a:rPr>
+              <a:t>Перефразирование</a:t>
+            </a:r>
+            <a:r>
               <a:rPr lang="en-US" sz="1100" b="1" dirty="0">
                 <a:solidFill>
                   <a:srgbClr val="0B5394"/>
@@ -12796,7 +15451,7 @@
                 <a:ea typeface="Calibri" pitchFamily="34" charset="-122"/>
                 <a:cs typeface="Calibri" pitchFamily="34" charset="-120"/>
               </a:rPr>
-              <a:t>Перефразирование </a:t>
+              <a:t> </a:t>
             </a:r>
             <a:r>
               <a:rPr lang="en-US" sz="1100" dirty="0">
@@ -12807,7 +15462,150 @@
                 <a:ea typeface="Calibri" pitchFamily="34" charset="-122"/>
                 <a:cs typeface="Calibri" pitchFamily="34" charset="-120"/>
               </a:rPr>
-              <a:t>— нейросетевое переписывание формулировок для редких классов.</a:t>
+              <a:t>— </a:t>
+            </a:r>
+            <a:r>
+              <a:rPr lang="en-US" sz="1100" dirty="0" err="1">
+                <a:solidFill>
+                  <a:srgbClr val="1A1A1A"/>
+                </a:solidFill>
+                <a:latin typeface="Calibri" pitchFamily="34" charset="0"/>
+                <a:ea typeface="Calibri" pitchFamily="34" charset="-122"/>
+                <a:cs typeface="Calibri" pitchFamily="34" charset="-120"/>
+              </a:rPr>
+              <a:t>нейросетевое</a:t>
+            </a:r>
+            <a:r>
+              <a:rPr lang="en-US" sz="1100" dirty="0">
+                <a:solidFill>
+                  <a:srgbClr val="1A1A1A"/>
+                </a:solidFill>
+                <a:latin typeface="Calibri" pitchFamily="34" charset="0"/>
+                <a:ea typeface="Calibri" pitchFamily="34" charset="-122"/>
+                <a:cs typeface="Calibri" pitchFamily="34" charset="-120"/>
+              </a:rPr>
+              <a:t> </a:t>
+            </a:r>
+            <a:r>
+              <a:rPr lang="en-US" sz="1100" dirty="0" err="1">
+                <a:solidFill>
+                  <a:srgbClr val="1A1A1A"/>
+                </a:solidFill>
+                <a:latin typeface="Calibri" pitchFamily="34" charset="0"/>
+                <a:ea typeface="Calibri" pitchFamily="34" charset="-122"/>
+                <a:cs typeface="Calibri" pitchFamily="34" charset="-120"/>
+              </a:rPr>
+              <a:t>переписывание</a:t>
+            </a:r>
+            <a:r>
+              <a:rPr lang="en-US" sz="1100" dirty="0">
+                <a:solidFill>
+                  <a:srgbClr val="1A1A1A"/>
+                </a:solidFill>
+                <a:latin typeface="Calibri" pitchFamily="34" charset="0"/>
+                <a:ea typeface="Calibri" pitchFamily="34" charset="-122"/>
+                <a:cs typeface="Calibri" pitchFamily="34" charset="-120"/>
+              </a:rPr>
+              <a:t> </a:t>
+            </a:r>
+            <a:r>
+              <a:rPr lang="en-US" sz="1100" dirty="0" err="1">
+                <a:solidFill>
+                  <a:srgbClr val="1A1A1A"/>
+                </a:solidFill>
+                <a:latin typeface="Calibri" pitchFamily="34" charset="0"/>
+                <a:ea typeface="Calibri" pitchFamily="34" charset="-122"/>
+                <a:cs typeface="Calibri" pitchFamily="34" charset="-120"/>
+              </a:rPr>
+              <a:t>формулировок</a:t>
+            </a:r>
+            <a:r>
+              <a:rPr lang="en-US" sz="1100" dirty="0">
+                <a:solidFill>
+                  <a:srgbClr val="1A1A1A"/>
+                </a:solidFill>
+                <a:latin typeface="Calibri" pitchFamily="34" charset="0"/>
+                <a:ea typeface="Calibri" pitchFamily="34" charset="-122"/>
+                <a:cs typeface="Calibri" pitchFamily="34" charset="-120"/>
+              </a:rPr>
+              <a:t> </a:t>
+            </a:r>
+            <a:r>
+              <a:rPr lang="en-US" sz="1100" dirty="0" err="1">
+                <a:solidFill>
+                  <a:srgbClr val="1A1A1A"/>
+                </a:solidFill>
+                <a:latin typeface="Calibri" pitchFamily="34" charset="0"/>
+                <a:ea typeface="Calibri" pitchFamily="34" charset="-122"/>
+                <a:cs typeface="Calibri" pitchFamily="34" charset="-120"/>
+              </a:rPr>
+              <a:t>для</a:t>
+            </a:r>
+            <a:r>
+              <a:rPr lang="en-US" sz="1100" dirty="0">
+                <a:solidFill>
+                  <a:srgbClr val="1A1A1A"/>
+                </a:solidFill>
+                <a:latin typeface="Calibri" pitchFamily="34" charset="0"/>
+                <a:ea typeface="Calibri" pitchFamily="34" charset="-122"/>
+                <a:cs typeface="Calibri" pitchFamily="34" charset="-120"/>
+              </a:rPr>
+              <a:t> </a:t>
+            </a:r>
+            <a:r>
+              <a:rPr lang="en-US" sz="1100" dirty="0" err="1">
+                <a:solidFill>
+                  <a:srgbClr val="1A1A1A"/>
+                </a:solidFill>
+                <a:latin typeface="Calibri" pitchFamily="34" charset="0"/>
+                <a:ea typeface="Calibri" pitchFamily="34" charset="-122"/>
+                <a:cs typeface="Calibri" pitchFamily="34" charset="-120"/>
+              </a:rPr>
+              <a:t>редких</a:t>
+            </a:r>
+            <a:r>
+              <a:rPr lang="en-US" sz="1100" dirty="0">
+                <a:solidFill>
+                  <a:srgbClr val="1A1A1A"/>
+                </a:solidFill>
+                <a:latin typeface="Calibri" pitchFamily="34" charset="0"/>
+                <a:ea typeface="Calibri" pitchFamily="34" charset="-122"/>
+                <a:cs typeface="Calibri" pitchFamily="34" charset="-120"/>
+              </a:rPr>
+              <a:t> </a:t>
+            </a:r>
+            <a:r>
+              <a:rPr lang="en-US" sz="1100" dirty="0" err="1">
+                <a:solidFill>
+                  <a:srgbClr val="1A1A1A"/>
+                </a:solidFill>
+                <a:latin typeface="Calibri" pitchFamily="34" charset="0"/>
+                <a:ea typeface="Calibri" pitchFamily="34" charset="-122"/>
+                <a:cs typeface="Calibri" pitchFamily="34" charset="-120"/>
+              </a:rPr>
+              <a:t>классов</a:t>
+            </a:r>
+            <a:r>
+              <a:rPr lang="ru-RU" sz="1100" dirty="0">
+                <a:solidFill>
+                  <a:srgbClr val="1A1A1A"/>
+                </a:solidFill>
+                <a:latin typeface="Calibri" pitchFamily="34" charset="0"/>
+                <a:ea typeface="Calibri" pitchFamily="34" charset="-122"/>
+                <a:cs typeface="Calibri" pitchFamily="34" charset="-120"/>
+              </a:rPr>
+              <a:t> через </a:t>
+            </a:r>
+            <a:r>
+              <a:rPr lang="en-US" sz="1100" dirty="0">
+                <a:solidFill>
+                  <a:srgbClr val="1A1A1A"/>
+                </a:solidFill>
+                <a:latin typeface="Calibri" pitchFamily="34" charset="0"/>
+                <a:ea typeface="Calibri" pitchFamily="34" charset="-122"/>
+                <a:cs typeface="Calibri" pitchFamily="34" charset="-120"/>
+              </a:rPr>
+              <a:t>ruT5-large-paraphraser.</a:t>
             </a:r>
             <a:endParaRPr lang="en-US" sz="1100" dirty="0"/>
           </a:p>
@@ -12913,7 +15711,29 @@
                 <a:ea typeface="Calibri" pitchFamily="34" charset="-122"/>
                 <a:cs typeface="Calibri" pitchFamily="34" charset="-120"/>
               </a:rPr>
-              <a:t> → ru через OPUS-MT [23]; сохраняет смысл, меняет лексику.</a:t>
+              <a:t> → ru </a:t>
+            </a:r>
+            <a:r>
+              <a:rPr lang="en-US" sz="1100" dirty="0" err="1">
+                <a:solidFill>
+                  <a:srgbClr val="1A1A1A"/>
+                </a:solidFill>
+                <a:latin typeface="Calibri" pitchFamily="34" charset="0"/>
+                <a:ea typeface="Calibri" pitchFamily="34" charset="-122"/>
+                <a:cs typeface="Calibri" pitchFamily="34" charset="-120"/>
+              </a:rPr>
+              <a:t>через</a:t>
+            </a:r>
+            <a:r>
+              <a:rPr lang="en-US" sz="1100" dirty="0">
+                <a:solidFill>
+                  <a:srgbClr val="1A1A1A"/>
+                </a:solidFill>
+                <a:latin typeface="Calibri" pitchFamily="34" charset="0"/>
+                <a:ea typeface="Calibri" pitchFamily="34" charset="-122"/>
+                <a:cs typeface="Calibri" pitchFamily="34" charset="-120"/>
+              </a:rPr>
+              <a:t> OPUS-MT; сохраняет смысл, меняет лексику.</a:t>
             </a:r>
             <a:endParaRPr lang="en-US" sz="1100" dirty="0"/>
           </a:p>
@@ -12964,7 +15784,106 @@
                 <a:ea typeface="Calibri" pitchFamily="34" charset="-122"/>
                 <a:cs typeface="Calibri" pitchFamily="34" charset="-120"/>
               </a:rPr>
-              <a:t>— увеличить вариативность редких классов и выровнять распределение.</a:t>
+              <a:t>— увеличить вариативность редких классов и выровнять </a:t>
+            </a:r>
+            <a:r>
+              <a:rPr lang="en-US" sz="1100" dirty="0" err="1">
+                <a:solidFill>
+                  <a:srgbClr val="1A1A1A"/>
+                </a:solidFill>
+                <a:latin typeface="Calibri" pitchFamily="34" charset="0"/>
+                <a:ea typeface="Calibri" pitchFamily="34" charset="-122"/>
+                <a:cs typeface="Calibri" pitchFamily="34" charset="-120"/>
+              </a:rPr>
+              <a:t>распределение</a:t>
+            </a:r>
+            <a:r>
+              <a:rPr lang="en-US" sz="1100" dirty="0">
+                <a:solidFill>
+                  <a:srgbClr val="1A1A1A"/>
+                </a:solidFill>
+                <a:latin typeface="Calibri" pitchFamily="34" charset="0"/>
+                <a:ea typeface="Calibri" pitchFamily="34" charset="-122"/>
+                <a:cs typeface="Calibri" pitchFamily="34" charset="-120"/>
+              </a:rPr>
+              <a:t>.</a:t>
+            </a:r>
+          </a:p>
+          <a:p>
+            <a:pPr>
+              <a:lnSpc>
+                <a:spcPts val="1600"/>
+              </a:lnSpc>
+            </a:pPr>
+            <a:endParaRPr lang="en-US" sz="1100" b="1" dirty="0">
+              <a:solidFill>
+                <a:srgbClr val="0B5394"/>
+              </a:solidFill>
+              <a:latin typeface="Calibri" pitchFamily="34" charset="0"/>
+              <a:ea typeface="Calibri" pitchFamily="34" charset="-122"/>
+              <a:cs typeface="Calibri" pitchFamily="34" charset="-120"/>
+            </a:endParaRPr>
+          </a:p>
+          <a:p>
+            <a:pPr>
+              <a:lnSpc>
+                <a:spcPts val="1600"/>
+              </a:lnSpc>
+            </a:pPr>
+            <a:r>
+              <a:rPr lang="ru-RU" sz="1100" b="1" dirty="0">
+                <a:solidFill>
+                  <a:srgbClr val="0B5394"/>
+                </a:solidFill>
+                <a:latin typeface="Calibri" pitchFamily="34" charset="0"/>
+                <a:ea typeface="Calibri" pitchFamily="34" charset="-122"/>
+                <a:cs typeface="Calibri" pitchFamily="34" charset="-120"/>
+              </a:rPr>
+              <a:t>Общее увеличение</a:t>
+            </a:r>
+            <a:r>
+              <a:rPr lang="en-US" sz="1100" b="1" dirty="0">
+                <a:solidFill>
+                  <a:srgbClr val="0B5394"/>
+                </a:solidFill>
+                <a:latin typeface="Calibri" pitchFamily="34" charset="0"/>
+                <a:ea typeface="Calibri" pitchFamily="34" charset="-122"/>
+                <a:cs typeface="Calibri" pitchFamily="34" charset="-120"/>
+              </a:rPr>
+              <a:t> </a:t>
+            </a:r>
+            <a:r>
+              <a:rPr lang="en-US" sz="1100" dirty="0">
+                <a:solidFill>
+                  <a:srgbClr val="1A1A1A"/>
+                </a:solidFill>
+                <a:latin typeface="Calibri" pitchFamily="34" charset="0"/>
+                <a:ea typeface="Calibri" pitchFamily="34" charset="-122"/>
+                <a:cs typeface="Calibri" pitchFamily="34" charset="-120"/>
+              </a:rPr>
+              <a:t>— </a:t>
+            </a:r>
+            <a:r>
+              <a:rPr lang="ru-RU" sz="1100" dirty="0">
+                <a:solidFill>
+                  <a:srgbClr val="1A1A1A"/>
+                </a:solidFill>
+                <a:latin typeface="Calibri" pitchFamily="34" charset="0"/>
+                <a:ea typeface="Calibri" pitchFamily="34" charset="-122"/>
+                <a:cs typeface="Calibri" pitchFamily="34" charset="-120"/>
+              </a:rPr>
+              <a:t>с 1404 до 2158 документов</a:t>
+            </a:r>
+            <a:r>
+              <a:rPr lang="en-US" sz="1100" dirty="0">
+                <a:solidFill>
+                  <a:srgbClr val="1A1A1A"/>
+                </a:solidFill>
+                <a:latin typeface="Calibri" pitchFamily="34" charset="0"/>
+                <a:ea typeface="Calibri" pitchFamily="34" charset="-122"/>
+                <a:cs typeface="Calibri" pitchFamily="34" charset="-120"/>
+              </a:rPr>
+              <a:t>.</a:t>
             </a:r>
             <a:endParaRPr lang="en-US" sz="1100" dirty="0"/>
           </a:p>
@@ -13120,106 +16039,6 @@
       </p:sp>
       <p:sp>
         <p:nvSpPr>
-          <p:cNvPr id="4" name="Text 2">
-            <a:extLst>
-              <a:ext uri="{FF2B5EF4-FFF2-40B4-BE49-F238E27FC236}">
-                <a16:creationId xmlns:a16="http://schemas.microsoft.com/office/drawing/2014/main" id="{A9AA0D1F-8835-C429-DF2C-34F5F2748AF4}"/>
-              </a:ext>
-            </a:extLst>
-          </p:cNvPr>
-          <p:cNvSpPr/>
-          <p:nvPr/>
-        </p:nvSpPr>
-        <p:spPr>
-          <a:xfrm>
-            <a:off x="365760" y="1005840"/>
-            <a:ext cx="8412480" cy="320040"/>
-          </a:xfrm>
-          <a:prstGeom prst="rect">
-            <a:avLst/>
-          </a:prstGeom>
-          <a:noFill/>
-          <a:ln/>
-        </p:spPr>
-        <p:txBody>
-          <a:bodyPr wrap="square" lIns="0" tIns="0" rIns="0" bIns="0" rtlCol="0" anchor="ctr"/>
-          <a:lstStyle/>
-          <a:p>
-            <a:pPr marL="0" indent="0">
-              <a:buNone/>
-            </a:pPr>
-            <a:r>
-              <a:rPr lang="en-US" sz="1300" b="1" dirty="0">
-                <a:solidFill>
-                  <a:srgbClr val="0B5394"/>
-                </a:solidFill>
-                <a:latin typeface="Calibri" pitchFamily="34" charset="0"/>
-                <a:ea typeface="Calibri" pitchFamily="34" charset="-122"/>
-                <a:cs typeface="Calibri" pitchFamily="34" charset="-120"/>
-              </a:rPr>
-              <a:t>Задача: </a:t>
-            </a:r>
-            <a:r>
-              <a:rPr lang="en-US" sz="1300" dirty="0" err="1">
-                <a:solidFill>
-                  <a:srgbClr val="1A1A1A"/>
-                </a:solidFill>
-                <a:latin typeface="Calibri" pitchFamily="34" charset="0"/>
-                <a:ea typeface="Calibri" pitchFamily="34" charset="-122"/>
-                <a:cs typeface="Calibri" pitchFamily="34" charset="-120"/>
-              </a:rPr>
-              <a:t>подготовить</a:t>
-            </a:r>
-            <a:r>
-              <a:rPr lang="en-US" sz="1300" dirty="0">
-                <a:solidFill>
-                  <a:srgbClr val="1A1A1A"/>
-                </a:solidFill>
-                <a:latin typeface="Calibri" pitchFamily="34" charset="0"/>
-                <a:ea typeface="Calibri" pitchFamily="34" charset="-122"/>
-                <a:cs typeface="Calibri" pitchFamily="34" charset="-120"/>
-              </a:rPr>
-              <a:t> </a:t>
-            </a:r>
-            <a:r>
-              <a:rPr lang="ru-RU" sz="1300" dirty="0">
-                <a:solidFill>
-                  <a:srgbClr val="1A1A1A"/>
-                </a:solidFill>
-                <a:latin typeface="Calibri" pitchFamily="34" charset="0"/>
-                <a:ea typeface="Calibri" pitchFamily="34" charset="-122"/>
-                <a:cs typeface="Calibri" pitchFamily="34" charset="-120"/>
-              </a:rPr>
-              <a:t>дополнительные датасеты для </a:t>
-            </a:r>
-            <a:r>
-              <a:rPr lang="ru-RU" sz="1300" dirty="0" err="1">
-                <a:solidFill>
-                  <a:srgbClr val="1A1A1A"/>
-                </a:solidFill>
-                <a:latin typeface="Calibri" pitchFamily="34" charset="0"/>
-                <a:ea typeface="Calibri" pitchFamily="34" charset="-122"/>
-                <a:cs typeface="Calibri" pitchFamily="34" charset="-120"/>
-              </a:rPr>
-              <a:t>эксперементов</a:t>
-            </a:r>
-            <a:r>
-              <a:rPr lang="en-US" sz="1300" dirty="0">
-                <a:solidFill>
-                  <a:srgbClr val="1A1A1A"/>
-                </a:solidFill>
-                <a:latin typeface="Calibri" pitchFamily="34" charset="0"/>
-                <a:ea typeface="Calibri" pitchFamily="34" charset="-122"/>
-                <a:cs typeface="Calibri" pitchFamily="34" charset="-120"/>
-              </a:rPr>
-              <a:t>.</a:t>
-            </a:r>
-            <a:endParaRPr lang="en-US" sz="1300" dirty="0"/>
-          </a:p>
-        </p:txBody>
-      </p:sp>
-      <p:sp>
-        <p:nvSpPr>
           <p:cNvPr id="13" name="Text 11">
             <a:extLst>
               <a:ext uri="{FF2B5EF4-FFF2-40B4-BE49-F238E27FC236}">
@@ -13259,6 +16078,795 @@
               <a:t>7</a:t>
             </a:r>
             <a:endParaRPr lang="en-US" sz="1000" dirty="0"/>
+          </a:p>
+        </p:txBody>
+      </p:sp>
+      <p:sp>
+        <p:nvSpPr>
+          <p:cNvPr id="14" name="Rectangle 13"/>
+          <p:cNvSpPr/>
+          <p:nvPr/>
+        </p:nvSpPr>
+        <p:spPr>
+          <a:xfrm>
+            <a:off x="365760" y="1005840"/>
+            <a:ext cx="8412480" cy="320040"/>
+          </a:xfrm>
+          <a:prstGeom prst="rect">
+            <a:avLst/>
+          </a:prstGeom>
+          <a:noFill/>
+          <a:ln>
+            <a:noFill/>
+          </a:ln>
+        </p:spPr>
+        <p:style>
+          <a:lnRef idx="1">
+            <a:schemeClr val="accent1"/>
+          </a:lnRef>
+          <a:fillRef idx="3">
+            <a:schemeClr val="accent1"/>
+          </a:fillRef>
+          <a:effectRef idx="2">
+            <a:schemeClr val="accent1"/>
+          </a:effectRef>
+          <a:fontRef idx="minor">
+            <a:schemeClr val="lt1"/>
+          </a:fontRef>
+        </p:style>
+        <p:txBody>
+          <a:bodyPr wrap="square" lIns="0" tIns="0" rIns="0" bIns="0" rtlCol="0" anchor="t"/>
+          <a:lstStyle/>
+          <a:p>
+            <a:pPr algn="l"/>
+            <a:r>
+              <a:rPr sz="1300" b="1" i="0">
+                <a:solidFill>
+                  <a:srgbClr val="0B5394"/>
+                </a:solidFill>
+                <a:latin typeface="Calibri"/>
+              </a:rPr>
+              <a:t>Задача: </a:t>
+            </a:r>
+            <a:r>
+              <a:rPr sz="1300" b="0" i="0">
+                <a:solidFill>
+                  <a:srgbClr val="1A1A1A"/>
+                </a:solidFill>
+                <a:latin typeface="Calibri"/>
+              </a:rPr>
+              <a:t>проверить, помогает ли сжатие текста до главной мысли, и подготовить альтернативные обучающие выборки.</a:t>
+            </a:r>
+          </a:p>
+        </p:txBody>
+      </p:sp>
+      <p:sp>
+        <p:nvSpPr>
+          <p:cNvPr id="15" name="Rectangle 14"/>
+          <p:cNvSpPr/>
+          <p:nvPr/>
+        </p:nvSpPr>
+        <p:spPr>
+          <a:xfrm>
+            <a:off x="365760" y="1463040"/>
+            <a:ext cx="4937760" cy="320040"/>
+          </a:xfrm>
+          <a:prstGeom prst="rect">
+            <a:avLst/>
+          </a:prstGeom>
+          <a:noFill/>
+          <a:ln>
+            <a:noFill/>
+          </a:ln>
+        </p:spPr>
+        <p:style>
+          <a:lnRef idx="1">
+            <a:schemeClr val="accent1"/>
+          </a:lnRef>
+          <a:fillRef idx="3">
+            <a:schemeClr val="accent1"/>
+          </a:fillRef>
+          <a:effectRef idx="2">
+            <a:schemeClr val="accent1"/>
+          </a:effectRef>
+          <a:fontRef idx="minor">
+            <a:schemeClr val="lt1"/>
+          </a:fontRef>
+        </p:style>
+        <p:txBody>
+          <a:bodyPr wrap="square" lIns="0" tIns="0" rIns="0" bIns="0" rtlCol="0" anchor="t"/>
+          <a:lstStyle/>
+          <a:p>
+            <a:pPr algn="l"/>
+            <a:r>
+              <a:rPr sz="1400" b="1" i="0">
+                <a:solidFill>
+                  <a:srgbClr val="0B5394"/>
+                </a:solidFill>
+                <a:latin typeface="Calibri"/>
+              </a:rPr>
+              <a:t>Подход</a:t>
+            </a:r>
+          </a:p>
+        </p:txBody>
+      </p:sp>
+      <p:sp>
+        <p:nvSpPr>
+          <p:cNvPr id="16" name="Rectangle 15"/>
+          <p:cNvSpPr/>
+          <p:nvPr/>
+        </p:nvSpPr>
+        <p:spPr>
+          <a:xfrm>
+            <a:off x="365760" y="1783080"/>
+            <a:ext cx="4937760" cy="2286000"/>
+          </a:xfrm>
+          <a:prstGeom prst="rect">
+            <a:avLst/>
+          </a:prstGeom>
+          <a:noFill/>
+          <a:ln>
+            <a:noFill/>
+          </a:ln>
+        </p:spPr>
+        <p:style>
+          <a:lnRef idx="1">
+            <a:schemeClr val="accent1"/>
+          </a:lnRef>
+          <a:fillRef idx="3">
+            <a:schemeClr val="accent1"/>
+          </a:fillRef>
+          <a:effectRef idx="2">
+            <a:schemeClr val="accent1"/>
+          </a:effectRef>
+          <a:fontRef idx="minor">
+            <a:schemeClr val="lt1"/>
+          </a:fontRef>
+        </p:style>
+        <p:txBody>
+          <a:bodyPr wrap="square" lIns="0" tIns="0" rIns="0" bIns="0" rtlCol="0" anchor="ctr"/>
+          <a:lstStyle/>
+          <a:p>
+            <a:pPr algn="l">
+              <a:spcAft>
+                <a:spcPts val="400"/>
+              </a:spcAft>
+            </a:pPr>
+            <a:r>
+              <a:rPr sz="1200">
+                <a:solidFill>
+                  <a:srgbClr val="1A1A1A"/>
+                </a:solidFill>
+                <a:latin typeface="Calibri"/>
+              </a:rPr>
+              <a:t>•  модель rut5_base_sum_gazeta (T5, дообучена на корпусе «Газета.Ru»)</a:t>
+            </a:r>
+          </a:p>
+          <a:p>
+            <a:pPr algn="l">
+              <a:spcAft>
+                <a:spcPts val="400"/>
+              </a:spcAft>
+            </a:pPr>
+            <a:r>
+              <a:rPr sz="1200">
+                <a:solidFill>
+                  <a:srgbClr val="1A1A1A"/>
+                </a:solidFill>
+                <a:latin typeface="Calibri"/>
+              </a:rPr>
+              <a:t>•  beam search; вход до 600 токенов, выжимка 30–128 токенов</a:t>
+            </a:r>
+          </a:p>
+          <a:p>
+            <a:pPr algn="l">
+              <a:spcAft>
+                <a:spcPts val="400"/>
+              </a:spcAft>
+            </a:pPr>
+            <a:r>
+              <a:rPr sz="1200">
+                <a:solidFill>
+                  <a:srgbClr val="1A1A1A"/>
+                </a:solidFill>
+                <a:latin typeface="Calibri"/>
+              </a:rPr>
+              <a:t>•  две версии датасета: замена текста на summary и конкатенация original ⊕ summary</a:t>
+            </a:r>
+          </a:p>
+          <a:p>
+            <a:pPr algn="l">
+              <a:spcAft>
+                <a:spcPts val="400"/>
+              </a:spcAft>
+            </a:pPr>
+            <a:r>
+              <a:rPr sz="1200">
+                <a:solidFill>
+                  <a:srgbClr val="1A1A1A"/>
+                </a:solidFill>
+                <a:latin typeface="Calibri"/>
+              </a:rPr>
+              <a:t>•  обе версии подаются как train в TF-IDF, BERT-классификатор и эмбеддинги</a:t>
+            </a:r>
+          </a:p>
+        </p:txBody>
+      </p:sp>
+      <p:sp>
+        <p:nvSpPr>
+          <p:cNvPr id="17" name="Rectangle 16"/>
+          <p:cNvSpPr/>
+          <p:nvPr/>
+        </p:nvSpPr>
+        <p:spPr>
+          <a:xfrm>
+            <a:off x="5486400" y="1463040"/>
+            <a:ext cx="3566160" cy="3200400"/>
+          </a:xfrm>
+          <a:prstGeom prst="rect">
+            <a:avLst/>
+          </a:prstGeom>
+          <a:solidFill>
+            <a:srgbClr val="D6E4F2"/>
+          </a:solidFill>
+          <a:ln>
+            <a:noFill/>
+          </a:ln>
+        </p:spPr>
+        <p:style>
+          <a:lnRef idx="1">
+            <a:schemeClr val="accent1"/>
+          </a:lnRef>
+          <a:fillRef idx="3">
+            <a:schemeClr val="accent1"/>
+          </a:fillRef>
+          <a:effectRef idx="2">
+            <a:schemeClr val="accent1"/>
+          </a:effectRef>
+          <a:fontRef idx="minor">
+            <a:schemeClr val="lt1"/>
+          </a:fontRef>
+        </p:style>
+        <p:txBody>
+          <a:bodyPr rtlCol="0" anchor="ctr"/>
+          <a:lstStyle/>
+          <a:p>
+            <a:pPr algn="ctr"/>
+            <a:endParaRPr/>
+          </a:p>
+        </p:txBody>
+      </p:sp>
+      <p:sp>
+        <p:nvSpPr>
+          <p:cNvPr id="18" name="Rectangle 17"/>
+          <p:cNvSpPr/>
+          <p:nvPr/>
+        </p:nvSpPr>
+        <p:spPr>
+          <a:xfrm>
+            <a:off x="5669280" y="1554480"/>
+            <a:ext cx="3200400" cy="320040"/>
+          </a:xfrm>
+          <a:prstGeom prst="rect">
+            <a:avLst/>
+          </a:prstGeom>
+          <a:noFill/>
+          <a:ln>
+            <a:noFill/>
+          </a:ln>
+        </p:spPr>
+        <p:style>
+          <a:lnRef idx="1">
+            <a:schemeClr val="accent1"/>
+          </a:lnRef>
+          <a:fillRef idx="3">
+            <a:schemeClr val="accent1"/>
+          </a:fillRef>
+          <a:effectRef idx="2">
+            <a:schemeClr val="accent1"/>
+          </a:effectRef>
+          <a:fontRef idx="minor">
+            <a:schemeClr val="lt1"/>
+          </a:fontRef>
+        </p:style>
+        <p:txBody>
+          <a:bodyPr wrap="square" lIns="0" tIns="0" rIns="0" bIns="0" rtlCol="0" anchor="t"/>
+          <a:lstStyle/>
+          <a:p>
+            <a:r>
+              <a:rPr lang="ru-RU" sz="1300" b="1" dirty="0">
+                <a:solidFill>
+                  <a:srgbClr val="0B5394"/>
+                </a:solidFill>
+              </a:rPr>
+              <a:t>Лучшие результаты</a:t>
+            </a:r>
+          </a:p>
+        </p:txBody>
+      </p:sp>
+      <p:sp>
+        <p:nvSpPr>
+          <p:cNvPr id="19" name="Rectangle 18"/>
+          <p:cNvSpPr/>
+          <p:nvPr/>
+        </p:nvSpPr>
+        <p:spPr>
+          <a:xfrm>
+            <a:off x="5668010" y="2080260"/>
+            <a:ext cx="3200400" cy="640080"/>
+          </a:xfrm>
+          <a:prstGeom prst="rect">
+            <a:avLst/>
+          </a:prstGeom>
+          <a:noFill/>
+          <a:ln>
+            <a:noFill/>
+          </a:ln>
+        </p:spPr>
+        <p:style>
+          <a:lnRef idx="1">
+            <a:schemeClr val="accent1"/>
+          </a:lnRef>
+          <a:fillRef idx="3">
+            <a:schemeClr val="accent1"/>
+          </a:fillRef>
+          <a:effectRef idx="2">
+            <a:schemeClr val="accent1"/>
+          </a:effectRef>
+          <a:fontRef idx="minor">
+            <a:schemeClr val="lt1"/>
+          </a:fontRef>
+        </p:style>
+        <p:txBody>
+          <a:bodyPr wrap="square" lIns="0" tIns="0" rIns="0" bIns="0" rtlCol="0" anchor="t"/>
+          <a:lstStyle/>
+          <a:p>
+            <a:pPr algn="l"/>
+            <a:r>
+              <a:rPr sz="3200" b="1" i="0" dirty="0">
+                <a:solidFill>
+                  <a:srgbClr val="0B5394"/>
+                </a:solidFill>
+                <a:latin typeface="Calibri"/>
+              </a:rPr>
+              <a:t>0.482 / 0.497</a:t>
+            </a:r>
+          </a:p>
+        </p:txBody>
+      </p:sp>
+      <p:sp>
+        <p:nvSpPr>
+          <p:cNvPr id="20" name="Rectangle 19"/>
+          <p:cNvSpPr/>
+          <p:nvPr/>
+        </p:nvSpPr>
+        <p:spPr>
+          <a:xfrm>
+            <a:off x="5668010" y="2720340"/>
+            <a:ext cx="3200400" cy="274320"/>
+          </a:xfrm>
+          <a:prstGeom prst="rect">
+            <a:avLst/>
+          </a:prstGeom>
+          <a:noFill/>
+          <a:ln>
+            <a:noFill/>
+          </a:ln>
+        </p:spPr>
+        <p:style>
+          <a:lnRef idx="1">
+            <a:schemeClr val="accent1"/>
+          </a:lnRef>
+          <a:fillRef idx="3">
+            <a:schemeClr val="accent1"/>
+          </a:fillRef>
+          <a:effectRef idx="2">
+            <a:schemeClr val="accent1"/>
+          </a:effectRef>
+          <a:fontRef idx="minor">
+            <a:schemeClr val="lt1"/>
+          </a:fontRef>
+        </p:style>
+        <p:txBody>
+          <a:bodyPr wrap="square" lIns="0" tIns="0" rIns="0" bIns="0" rtlCol="0" anchor="t"/>
+          <a:lstStyle/>
+          <a:p>
+            <a:pPr algn="l"/>
+            <a:r>
+              <a:rPr sz="1100" b="0" i="0" dirty="0">
+                <a:solidFill>
+                  <a:srgbClr val="5C5C5C"/>
+                </a:solidFill>
+                <a:latin typeface="Calibri"/>
+              </a:rPr>
+              <a:t>BASELINE </a:t>
+            </a:r>
+            <a:r>
+              <a:rPr sz="1100" b="0" i="0" dirty="0" err="1">
+                <a:solidFill>
+                  <a:srgbClr val="5C5C5C"/>
+                </a:solidFill>
+                <a:latin typeface="Calibri"/>
+              </a:rPr>
+              <a:t>на</a:t>
+            </a:r>
+            <a:r>
+              <a:rPr sz="1100" b="0" i="0" dirty="0">
+                <a:solidFill>
+                  <a:srgbClr val="5C5C5C"/>
+                </a:solidFill>
+                <a:latin typeface="Calibri"/>
+              </a:rPr>
+              <a:t> original + summary</a:t>
+            </a:r>
+          </a:p>
+        </p:txBody>
+      </p:sp>
+      <p:sp>
+        <p:nvSpPr>
+          <p:cNvPr id="21" name="Rectangle 20"/>
+          <p:cNvSpPr/>
+          <p:nvPr/>
+        </p:nvSpPr>
+        <p:spPr>
+          <a:xfrm>
+            <a:off x="5668010" y="3131820"/>
+            <a:ext cx="3200400" cy="640080"/>
+          </a:xfrm>
+          <a:prstGeom prst="rect">
+            <a:avLst/>
+          </a:prstGeom>
+          <a:noFill/>
+          <a:ln>
+            <a:noFill/>
+          </a:ln>
+        </p:spPr>
+        <p:style>
+          <a:lnRef idx="1">
+            <a:schemeClr val="accent1"/>
+          </a:lnRef>
+          <a:fillRef idx="3">
+            <a:schemeClr val="accent1"/>
+          </a:fillRef>
+          <a:effectRef idx="2">
+            <a:schemeClr val="accent1"/>
+          </a:effectRef>
+          <a:fontRef idx="minor">
+            <a:schemeClr val="lt1"/>
+          </a:fontRef>
+        </p:style>
+        <p:txBody>
+          <a:bodyPr wrap="square" lIns="0" tIns="0" rIns="0" bIns="0" rtlCol="0" anchor="t"/>
+          <a:lstStyle/>
+          <a:p>
+            <a:pPr algn="l"/>
+            <a:r>
+              <a:rPr sz="3200" b="1" i="0" dirty="0">
+                <a:solidFill>
+                  <a:srgbClr val="0B5394"/>
+                </a:solidFill>
+                <a:latin typeface="Calibri"/>
+              </a:rPr>
+              <a:t>0.512 / 0.498</a:t>
+            </a:r>
+          </a:p>
+        </p:txBody>
+      </p:sp>
+      <p:sp>
+        <p:nvSpPr>
+          <p:cNvPr id="22" name="Rectangle 21"/>
+          <p:cNvSpPr/>
+          <p:nvPr/>
+        </p:nvSpPr>
+        <p:spPr>
+          <a:xfrm>
+            <a:off x="5668010" y="3771900"/>
+            <a:ext cx="3200400" cy="274320"/>
+          </a:xfrm>
+          <a:prstGeom prst="rect">
+            <a:avLst/>
+          </a:prstGeom>
+          <a:noFill/>
+          <a:ln>
+            <a:noFill/>
+          </a:ln>
+        </p:spPr>
+        <p:style>
+          <a:lnRef idx="1">
+            <a:schemeClr val="accent1"/>
+          </a:lnRef>
+          <a:fillRef idx="3">
+            <a:schemeClr val="accent1"/>
+          </a:fillRef>
+          <a:effectRef idx="2">
+            <a:schemeClr val="accent1"/>
+          </a:effectRef>
+          <a:fontRef idx="minor">
+            <a:schemeClr val="lt1"/>
+          </a:fontRef>
+        </p:style>
+        <p:txBody>
+          <a:bodyPr wrap="square" lIns="0" tIns="0" rIns="0" bIns="0" rtlCol="0" anchor="t"/>
+          <a:lstStyle/>
+          <a:p>
+            <a:pPr algn="l"/>
+            <a:r>
+              <a:rPr lang="en-US" sz="1100" b="0" i="0" dirty="0">
+                <a:solidFill>
+                  <a:srgbClr val="5C5C5C"/>
+                </a:solidFill>
+                <a:latin typeface="Calibri"/>
+              </a:rPr>
+              <a:t>BERT</a:t>
+            </a:r>
+            <a:r>
+              <a:rPr lang="ru-RU" sz="1100" b="0" i="0" dirty="0">
+                <a:solidFill>
+                  <a:srgbClr val="5C5C5C"/>
+                </a:solidFill>
+                <a:latin typeface="Calibri"/>
+              </a:rPr>
+              <a:t> классификация</a:t>
+            </a:r>
+            <a:r>
+              <a:rPr sz="1100" b="0" i="0" dirty="0">
+                <a:solidFill>
+                  <a:srgbClr val="5C5C5C"/>
+                </a:solidFill>
+                <a:latin typeface="Calibri"/>
+              </a:rPr>
+              <a:t>, </a:t>
+            </a:r>
+            <a:r>
+              <a:rPr sz="1100" b="0" i="0" dirty="0" err="1">
+                <a:solidFill>
+                  <a:srgbClr val="5C5C5C"/>
+                </a:solidFill>
+                <a:latin typeface="Calibri"/>
+              </a:rPr>
+              <a:t>aug</a:t>
+            </a:r>
+            <a:r>
+              <a:rPr sz="1100" b="0" i="0" dirty="0">
+                <a:solidFill>
+                  <a:srgbClr val="5C5C5C"/>
+                </a:solidFill>
+                <a:latin typeface="Calibri"/>
+              </a:rPr>
+              <a:t> +</a:t>
+            </a:r>
+            <a:r>
+              <a:rPr lang="en-US" sz="1100" b="0" i="0" dirty="0">
+                <a:solidFill>
+                  <a:srgbClr val="5C5C5C"/>
+                </a:solidFill>
+                <a:latin typeface="Calibri"/>
+              </a:rPr>
+              <a:t> </a:t>
+            </a:r>
+            <a:r>
+              <a:rPr sz="1100" b="0" i="0" dirty="0">
+                <a:solidFill>
+                  <a:srgbClr val="5C5C5C"/>
+                </a:solidFill>
+                <a:latin typeface="Calibri"/>
+              </a:rPr>
+              <a:t>summary</a:t>
+            </a:r>
+          </a:p>
+        </p:txBody>
+      </p:sp>
+      <p:sp>
+        <p:nvSpPr>
+          <p:cNvPr id="23" name="Rectangle 22"/>
+          <p:cNvSpPr/>
+          <p:nvPr/>
+        </p:nvSpPr>
+        <p:spPr>
+          <a:xfrm>
+            <a:off x="5669280" y="4069080"/>
+            <a:ext cx="3200400" cy="548640"/>
+          </a:xfrm>
+          <a:prstGeom prst="rect">
+            <a:avLst/>
+          </a:prstGeom>
+          <a:noFill/>
+          <a:ln>
+            <a:noFill/>
+          </a:ln>
+        </p:spPr>
+        <p:style>
+          <a:lnRef idx="1">
+            <a:schemeClr val="accent1"/>
+          </a:lnRef>
+          <a:fillRef idx="3">
+            <a:schemeClr val="accent1"/>
+          </a:fillRef>
+          <a:effectRef idx="2">
+            <a:schemeClr val="accent1"/>
+          </a:effectRef>
+          <a:fontRef idx="minor">
+            <a:schemeClr val="lt1"/>
+          </a:fontRef>
+        </p:style>
+        <p:txBody>
+          <a:bodyPr wrap="square" lIns="0" tIns="0" rIns="0" bIns="0" rtlCol="0" anchor="t"/>
+          <a:lstStyle/>
+          <a:p>
+            <a:pPr algn="l"/>
+            <a:r>
+              <a:rPr sz="1000" b="0" i="1">
+                <a:solidFill>
+                  <a:srgbClr val="1A1A1A"/>
+                </a:solidFill>
+                <a:latin typeface="Calibri"/>
+              </a:rPr>
+              <a:t>Замена текста на summary ухудшает все модели; связка original ⊕ summary почти догоняет.</a:t>
+            </a:r>
+          </a:p>
+        </p:txBody>
+      </p:sp>
+      <p:sp>
+        <p:nvSpPr>
+          <p:cNvPr id="24" name="Rectangle 23"/>
+          <p:cNvSpPr/>
+          <p:nvPr/>
+        </p:nvSpPr>
+        <p:spPr>
+          <a:xfrm>
+            <a:off x="365760" y="4251960"/>
+            <a:ext cx="4937760" cy="502920"/>
+          </a:xfrm>
+          <a:prstGeom prst="rect">
+            <a:avLst/>
+          </a:prstGeom>
+          <a:solidFill>
+            <a:srgbClr val="F4F6FA"/>
+          </a:solidFill>
+          <a:ln>
+            <a:solidFill>
+              <a:srgbClr val="D6DBE5"/>
+            </a:solidFill>
+          </a:ln>
+        </p:spPr>
+        <p:style>
+          <a:lnRef idx="1">
+            <a:schemeClr val="accent1"/>
+          </a:lnRef>
+          <a:fillRef idx="3">
+            <a:schemeClr val="accent1"/>
+          </a:fillRef>
+          <a:effectRef idx="2">
+            <a:schemeClr val="accent1"/>
+          </a:effectRef>
+          <a:fontRef idx="minor">
+            <a:schemeClr val="lt1"/>
+          </a:fontRef>
+        </p:style>
+        <p:txBody>
+          <a:bodyPr rtlCol="0" anchor="ctr"/>
+          <a:lstStyle/>
+          <a:p>
+            <a:pPr algn="ctr"/>
+            <a:endParaRPr/>
+          </a:p>
+        </p:txBody>
+      </p:sp>
+      <p:sp>
+        <p:nvSpPr>
+          <p:cNvPr id="25" name="Rectangle 24"/>
+          <p:cNvSpPr/>
+          <p:nvPr/>
+        </p:nvSpPr>
+        <p:spPr>
+          <a:xfrm>
+            <a:off x="502920" y="4315968"/>
+            <a:ext cx="4754880" cy="411480"/>
+          </a:xfrm>
+          <a:prstGeom prst="rect">
+            <a:avLst/>
+          </a:prstGeom>
+          <a:noFill/>
+          <a:ln>
+            <a:noFill/>
+          </a:ln>
+        </p:spPr>
+        <p:style>
+          <a:lnRef idx="1">
+            <a:schemeClr val="accent1"/>
+          </a:lnRef>
+          <a:fillRef idx="3">
+            <a:schemeClr val="accent1"/>
+          </a:fillRef>
+          <a:effectRef idx="2">
+            <a:schemeClr val="accent1"/>
+          </a:effectRef>
+          <a:fontRef idx="minor">
+            <a:schemeClr val="lt1"/>
+          </a:fontRef>
+        </p:style>
+        <p:txBody>
+          <a:bodyPr wrap="square" lIns="0" tIns="0" rIns="0" bIns="0" rtlCol="0" anchor="ctr"/>
+          <a:lstStyle/>
+          <a:p>
+            <a:pPr algn="l"/>
+            <a:r>
+              <a:rPr sz="1100" b="1" i="0">
+                <a:solidFill>
+                  <a:srgbClr val="0B5394"/>
+                </a:solidFill>
+                <a:latin typeface="Calibri"/>
+              </a:rPr>
+              <a:t>Вывод: </a:t>
+            </a:r>
+            <a:r>
+              <a:rPr sz="1100" b="0" i="0">
+                <a:solidFill>
+                  <a:srgbClr val="1A1A1A"/>
+                </a:solidFill>
+                <a:latin typeface="Calibri"/>
+              </a:rPr>
+              <a:t>короткая выжимка теряет специфическую лексику деловых писем — длинный контекст важен.</a:t>
+            </a:r>
+          </a:p>
+        </p:txBody>
+      </p:sp>
+      <p:sp>
+        <p:nvSpPr>
+          <p:cNvPr id="4" name="Rectangle 17">
+            <a:extLst>
+              <a:ext uri="{FF2B5EF4-FFF2-40B4-BE49-F238E27FC236}">
+                <a16:creationId xmlns:a16="http://schemas.microsoft.com/office/drawing/2014/main" id="{AE37F58E-4FEF-31DD-B4D4-E6C947E971A9}"/>
+              </a:ext>
+            </a:extLst>
+          </p:cNvPr>
+          <p:cNvSpPr/>
+          <p:nvPr/>
+        </p:nvSpPr>
+        <p:spPr>
+          <a:xfrm>
+            <a:off x="5666740" y="1889760"/>
+            <a:ext cx="3201670" cy="228600"/>
+          </a:xfrm>
+          <a:prstGeom prst="rect">
+            <a:avLst/>
+          </a:prstGeom>
+          <a:noFill/>
+          <a:ln>
+            <a:noFill/>
+          </a:ln>
+        </p:spPr>
+        <p:style>
+          <a:lnRef idx="1">
+            <a:schemeClr val="accent1"/>
+          </a:lnRef>
+          <a:fillRef idx="3">
+            <a:schemeClr val="accent1"/>
+          </a:fillRef>
+          <a:effectRef idx="2">
+            <a:schemeClr val="accent1"/>
+          </a:effectRef>
+          <a:fontRef idx="minor">
+            <a:schemeClr val="lt1"/>
+          </a:fontRef>
+        </p:style>
+        <p:txBody>
+          <a:bodyPr wrap="square" lIns="0" tIns="0" rIns="0" bIns="0" rtlCol="0" anchor="t"/>
+          <a:lstStyle/>
+          <a:p>
+            <a:r>
+              <a:rPr lang="en-US" sz="1300" b="1" dirty="0">
+                <a:solidFill>
+                  <a:srgbClr val="0B5394"/>
+                </a:solidFill>
+              </a:rPr>
+              <a:t>balanced accuracy / macro F1</a:t>
+            </a:r>
+            <a:endParaRPr lang="ru-RU" sz="1300" b="1" dirty="0">
+              <a:solidFill>
+                <a:srgbClr val="0B5394"/>
+              </a:solidFill>
+            </a:endParaRPr>
           </a:p>
         </p:txBody>
       </p:sp>
@@ -13540,6 +17148,17 @@
               <a:buChar char="•"/>
             </a:pPr>
             <a:r>
+              <a:rPr lang="en-US" sz="1200" dirty="0" err="1">
+                <a:solidFill>
+                  <a:srgbClr val="1A1A1A"/>
+                </a:solidFill>
+                <a:latin typeface="Calibri" pitchFamily="34" charset="0"/>
+                <a:ea typeface="Calibri" pitchFamily="34" charset="-122"/>
+                <a:cs typeface="Calibri" pitchFamily="34" charset="-120"/>
+              </a:rPr>
+              <a:t>эталон</a:t>
+            </a:r>
+            <a:r>
               <a:rPr lang="en-US" sz="1200" dirty="0">
                 <a:solidFill>
                   <a:srgbClr val="1A1A1A"/>
@@ -13548,7 +17167,7 @@
                 <a:ea typeface="Calibri" pitchFamily="34" charset="-122"/>
                 <a:cs typeface="Calibri" pitchFamily="34" charset="-120"/>
               </a:rPr>
-              <a:t>эталон [11] — TF-IDF + линейные классификаторы для </a:t>
+              <a:t> — TF-IDF + линейные классификаторы для </a:t>
             </a:r>
             <a:r>
               <a:rPr lang="en-US" sz="1200" dirty="0" err="1">
@@ -13583,7 +17202,7 @@
               </a:rPr>
               <a:t>текстов</a:t>
             </a:r>
-            <a:endParaRPr lang="en-US" sz="1200" dirty="0">
+            <a:endParaRPr lang="ru-RU" sz="1200" dirty="0">
               <a:solidFill>
                 <a:srgbClr val="1A1A1A"/>
               </a:solidFill>
@@ -13608,17 +17227,17 @@
                 <a:latin typeface="Calibri" pitchFamily="34" charset="0"/>
                 <a:cs typeface="Calibri" pitchFamily="34" charset="-120"/>
               </a:rPr>
-              <a:t>сверхвысокие значения для </a:t>
-            </a:r>
-            <a:r>
-              <a:rPr lang="en-US" sz="1200" dirty="0" err="1">
-                <a:solidFill>
-                  <a:srgbClr val="1A1A1A"/>
-                </a:solidFill>
-                <a:latin typeface="Calibri" pitchFamily="34" charset="0"/>
-                <a:cs typeface="Calibri" pitchFamily="34" charset="-120"/>
-              </a:rPr>
-              <a:t>train.csv</a:t>
+              <a:t>просадка метрик на </a:t>
+            </a:r>
+            <a:r>
+              <a:rPr lang="ru-RU" sz="1200" dirty="0" err="1">
+                <a:solidFill>
+                  <a:srgbClr val="1A1A1A"/>
+                </a:solidFill>
+                <a:latin typeface="Calibri" pitchFamily="34" charset="0"/>
+                <a:cs typeface="Calibri" pitchFamily="34" charset="-120"/>
+              </a:rPr>
+              <a:t>аугментированном</a:t>
             </a:r>
             <a:r>
               <a:rPr lang="ru-RU" sz="1200" dirty="0">
@@ -13628,7 +17247,27 @@
                 <a:latin typeface="Calibri" pitchFamily="34" charset="0"/>
                 <a:cs typeface="Calibri" pitchFamily="34" charset="-120"/>
               </a:rPr>
-              <a:t> объясняется связью с очисткой данных</a:t>
+              <a:t> наборе объясняется тем, что </a:t>
+            </a:r>
+            <a:r>
+              <a:rPr lang="en-US" sz="1200" dirty="0">
+                <a:solidFill>
+                  <a:srgbClr val="1A1A1A"/>
+                </a:solidFill>
+                <a:latin typeface="Calibri" pitchFamily="34" charset="0"/>
+                <a:cs typeface="Calibri" pitchFamily="34" charset="-120"/>
+              </a:rPr>
+              <a:t>train</a:t>
+            </a:r>
+            <a:r>
+              <a:rPr lang="ru-RU" sz="1200" dirty="0">
+                <a:solidFill>
+                  <a:srgbClr val="1A1A1A"/>
+                </a:solidFill>
+                <a:latin typeface="Calibri" pitchFamily="34" charset="0"/>
+                <a:cs typeface="Calibri" pitchFamily="34" charset="-120"/>
+              </a:rPr>
+              <a:t> модель чаще предсказывала популярные классы, а на аугментации предсказания размазаны, ведь примеров на 754 документа больше</a:t>
             </a:r>
             <a:endParaRPr lang="en-US" sz="1200" dirty="0"/>
           </a:p>
@@ -14164,13 +17803,155 @@
           <a:bodyPr wrap="square" lIns="0" tIns="0" rIns="0" bIns="0" rtlCol="0" anchor="ctr"/>
           <a:lstStyle/>
           <a:p>
+            <a:pPr>
+              <a:spcAft>
+                <a:spcPts val="500"/>
+              </a:spcAft>
+              <a:buSzPct val="100000"/>
+            </a:pPr>
+            <a:r>
+              <a:rPr lang="ru-RU" sz="1200" dirty="0">
+                <a:solidFill>
+                  <a:srgbClr val="1A1A1A"/>
+                </a:solidFill>
+                <a:latin typeface="Calibri" pitchFamily="34" charset="0"/>
+                <a:ea typeface="Calibri" pitchFamily="34" charset="-122"/>
+                <a:cs typeface="Calibri" pitchFamily="34" charset="-120"/>
+              </a:rPr>
+              <a:t>Базовые модели </a:t>
+            </a:r>
+            <a:r>
+              <a:rPr lang="en-US" sz="1200" dirty="0" err="1">
+                <a:solidFill>
+                  <a:srgbClr val="1A1A1A"/>
+                </a:solidFill>
+                <a:latin typeface="Calibri" pitchFamily="34" charset="0"/>
+                <a:ea typeface="Calibri" pitchFamily="34" charset="-122"/>
+                <a:cs typeface="Calibri" pitchFamily="34" charset="-120"/>
+              </a:rPr>
+              <a:t>ruBERT</a:t>
+            </a:r>
+            <a:r>
+              <a:rPr lang="en-US" sz="1200" dirty="0">
+                <a:solidFill>
+                  <a:srgbClr val="1A1A1A"/>
+                </a:solidFill>
+                <a:latin typeface="Calibri" pitchFamily="34" charset="0"/>
+                <a:ea typeface="Calibri" pitchFamily="34" charset="-122"/>
+                <a:cs typeface="Calibri" pitchFamily="34" charset="-120"/>
+              </a:rPr>
+              <a:t> </a:t>
+            </a:r>
+            <a:r>
+              <a:rPr lang="en-US" sz="1200" dirty="0" err="1">
+                <a:solidFill>
+                  <a:srgbClr val="1A1A1A"/>
+                </a:solidFill>
+                <a:latin typeface="Calibri" pitchFamily="34" charset="0"/>
+                <a:ea typeface="Calibri" pitchFamily="34" charset="-122"/>
+                <a:cs typeface="Calibri" pitchFamily="34" charset="-120"/>
+              </a:rPr>
+              <a:t>и</a:t>
+            </a:r>
+            <a:r>
+              <a:rPr lang="en-US" sz="1200" dirty="0">
+                <a:solidFill>
+                  <a:srgbClr val="1A1A1A"/>
+                </a:solidFill>
+                <a:latin typeface="Calibri" pitchFamily="34" charset="0"/>
+                <a:ea typeface="Calibri" pitchFamily="34" charset="-122"/>
+                <a:cs typeface="Calibri" pitchFamily="34" charset="-120"/>
+              </a:rPr>
+              <a:t> </a:t>
+            </a:r>
+            <a:r>
+              <a:rPr lang="en-US" sz="1200" dirty="0" err="1">
+                <a:solidFill>
+                  <a:srgbClr val="1A1A1A"/>
+                </a:solidFill>
+                <a:latin typeface="Calibri" pitchFamily="34" charset="0"/>
+                <a:ea typeface="Calibri" pitchFamily="34" charset="-122"/>
+                <a:cs typeface="Calibri" pitchFamily="34" charset="-120"/>
+              </a:rPr>
+              <a:t>ruRoberta</a:t>
+            </a:r>
+            <a:r>
+              <a:rPr lang="en-US" sz="1200" dirty="0">
+                <a:solidFill>
+                  <a:srgbClr val="1A1A1A"/>
+                </a:solidFill>
+                <a:latin typeface="Calibri" pitchFamily="34" charset="0"/>
+                <a:ea typeface="Calibri" pitchFamily="34" charset="-122"/>
+                <a:cs typeface="Calibri" pitchFamily="34" charset="-120"/>
+              </a:rPr>
+              <a:t>-large с </a:t>
+            </a:r>
+            <a:r>
+              <a:rPr lang="en-US" sz="1200" dirty="0" err="1">
+                <a:solidFill>
+                  <a:srgbClr val="1A1A1A"/>
+                </a:solidFill>
+                <a:latin typeface="Calibri" pitchFamily="34" charset="0"/>
+                <a:ea typeface="Calibri" pitchFamily="34" charset="-122"/>
+                <a:cs typeface="Calibri" pitchFamily="34" charset="-120"/>
+              </a:rPr>
+              <a:t>классификационной</a:t>
+            </a:r>
+            <a:r>
+              <a:rPr lang="en-US" sz="1200" dirty="0">
+                <a:solidFill>
+                  <a:srgbClr val="1A1A1A"/>
+                </a:solidFill>
+                <a:latin typeface="Calibri" pitchFamily="34" charset="0"/>
+                <a:ea typeface="Calibri" pitchFamily="34" charset="-122"/>
+                <a:cs typeface="Calibri" pitchFamily="34" charset="-120"/>
+              </a:rPr>
+              <a:t> </a:t>
+            </a:r>
+            <a:r>
+              <a:rPr lang="en-US" sz="1200" dirty="0" err="1">
+                <a:solidFill>
+                  <a:srgbClr val="1A1A1A"/>
+                </a:solidFill>
+                <a:latin typeface="Calibri" pitchFamily="34" charset="0"/>
+                <a:ea typeface="Calibri" pitchFamily="34" charset="-122"/>
+                <a:cs typeface="Calibri" pitchFamily="34" charset="-120"/>
+              </a:rPr>
+              <a:t>головой</a:t>
+            </a:r>
+            <a:r>
+              <a:rPr lang="en-US" sz="1200" dirty="0">
+                <a:solidFill>
+                  <a:srgbClr val="1A1A1A"/>
+                </a:solidFill>
+                <a:latin typeface="Calibri" pitchFamily="34" charset="0"/>
+                <a:ea typeface="Calibri" pitchFamily="34" charset="-122"/>
+                <a:cs typeface="Calibri" pitchFamily="34" charset="-120"/>
+              </a:rPr>
+              <a:t>:</a:t>
+            </a:r>
+            <a:endParaRPr lang="en-US" sz="1200" dirty="0"/>
+          </a:p>
+          <a:p>
             <a:pPr marL="342900" indent="-342900">
               <a:spcAft>
                 <a:spcPts val="500"/>
               </a:spcAft>
               <a:buSzPct val="100000"/>
-              <a:buChar char="•"/>
-            </a:pPr>
+              <a:buFont typeface="+mj-lt"/>
+              <a:buAutoNum type="arabicPeriod"/>
+            </a:pPr>
+            <a:r>
+              <a:rPr lang="ru-RU" sz="1200" dirty="0">
+                <a:solidFill>
+                  <a:srgbClr val="1A1A1A"/>
+                </a:solidFill>
+                <a:latin typeface="Calibri" pitchFamily="34" charset="0"/>
+                <a:ea typeface="Calibri" pitchFamily="34" charset="-122"/>
+                <a:cs typeface="Calibri" pitchFamily="34" charset="-120"/>
+              </a:rPr>
+              <a:t>классическая на токене </a:t>
+            </a:r>
             <a:r>
               <a:rPr lang="en-US" sz="1200" dirty="0">
                 <a:solidFill>
@@ -14180,9 +17961,16 @@
                 <a:ea typeface="Calibri" pitchFamily="34" charset="-122"/>
                 <a:cs typeface="Calibri" pitchFamily="34" charset="-120"/>
               </a:rPr>
-              <a:t>ruBERT [14] и ruRoberta-large [15] с классификационной головой</a:t>
-            </a:r>
-            <a:endParaRPr lang="en-US" sz="1200" dirty="0"/>
+              <a:t>CLS</a:t>
+            </a:r>
+            <a:endParaRPr lang="ru-RU" sz="1200" dirty="0">
+              <a:solidFill>
+                <a:srgbClr val="1A1A1A"/>
+              </a:solidFill>
+              <a:latin typeface="Calibri" pitchFamily="34" charset="0"/>
+              <a:ea typeface="Calibri" pitchFamily="34" charset="-122"/>
+              <a:cs typeface="Calibri" pitchFamily="34" charset="-120"/>
+            </a:endParaRPr>
           </a:p>
           <a:p>
             <a:pPr marL="342900" indent="-342900">
@@ -14190,7 +17978,8 @@
                 <a:spcPts val="500"/>
               </a:spcAft>
               <a:buSzPct val="100000"/>
-              <a:buChar char="•"/>
+              <a:buFont typeface="+mj-lt"/>
+              <a:buAutoNum type="arabicPeriod"/>
             </a:pPr>
             <a:r>
               <a:rPr lang="en-US" sz="1200" dirty="0">
@@ -14201,8 +17990,51 @@
                 <a:ea typeface="Calibri" pitchFamily="34" charset="-122"/>
                 <a:cs typeface="Calibri" pitchFamily="34" charset="-120"/>
               </a:rPr>
-              <a:t>mean-pooling и чанкинг для </a:t>
-            </a:r>
+              <a:t>mean-pooling</a:t>
+            </a:r>
+            <a:r>
+              <a:rPr lang="ru-RU" sz="1200" dirty="0">
+                <a:solidFill>
+                  <a:srgbClr val="1A1A1A"/>
+                </a:solidFill>
+                <a:latin typeface="Calibri" pitchFamily="34" charset="0"/>
+                <a:ea typeface="Calibri" pitchFamily="34" charset="-122"/>
+                <a:cs typeface="Calibri" pitchFamily="34" charset="-120"/>
+              </a:rPr>
+              <a:t> по скрытым состояниям с учетом </a:t>
+            </a:r>
+            <a:r>
+              <a:rPr lang="en-US" sz="1200" dirty="0">
+                <a:solidFill>
+                  <a:srgbClr val="1A1A1A"/>
+                </a:solidFill>
+                <a:latin typeface="Calibri" pitchFamily="34" charset="0"/>
+                <a:ea typeface="Calibri" pitchFamily="34" charset="-122"/>
+                <a:cs typeface="Calibri" pitchFamily="34" charset="-120"/>
+              </a:rPr>
+              <a:t>attention-</a:t>
+            </a:r>
+            <a:r>
+              <a:rPr lang="ru-RU" sz="1200" dirty="0">
+                <a:solidFill>
+                  <a:srgbClr val="1A1A1A"/>
+                </a:solidFill>
+                <a:latin typeface="Calibri" pitchFamily="34" charset="0"/>
+                <a:ea typeface="Calibri" pitchFamily="34" charset="-122"/>
+                <a:cs typeface="Calibri" pitchFamily="34" charset="-120"/>
+              </a:rPr>
+              <a:t>маски</a:t>
+            </a:r>
+          </a:p>
+          <a:p>
+            <a:pPr marL="342900" indent="-342900">
+              <a:spcAft>
+                <a:spcPts val="500"/>
+              </a:spcAft>
+              <a:buSzPct val="100000"/>
+              <a:buFont typeface="+mj-lt"/>
+              <a:buAutoNum type="arabicPeriod"/>
+            </a:pPr>
             <a:r>
               <a:rPr lang="en-US" sz="1200" dirty="0" err="1">
                 <a:solidFill>
@@ -14212,7 +18044,18 @@
                 <a:ea typeface="Calibri" pitchFamily="34" charset="-122"/>
                 <a:cs typeface="Calibri" pitchFamily="34" charset="-120"/>
               </a:rPr>
-              <a:t>длинных</a:t>
+              <a:t>chunkmean</a:t>
+            </a:r>
+            <a:r>
+              <a:rPr lang="ru-RU" sz="1200" dirty="0">
+                <a:solidFill>
+                  <a:srgbClr val="1A1A1A"/>
+                </a:solidFill>
+                <a:latin typeface="Calibri" pitchFamily="34" charset="0"/>
+                <a:ea typeface="Calibri" pitchFamily="34" charset="-122"/>
+                <a:cs typeface="Calibri" pitchFamily="34" charset="-120"/>
+              </a:rPr>
+              <a:t> для длинных документов</a:t>
             </a:r>
             <a:r>
               <a:rPr lang="en-US" sz="1200" dirty="0">
@@ -14223,18 +18066,95 @@
                 <a:ea typeface="Calibri" pitchFamily="34" charset="-122"/>
                 <a:cs typeface="Calibri" pitchFamily="34" charset="-120"/>
               </a:rPr>
-              <a:t> </a:t>
-            </a:r>
-            <a:r>
-              <a:rPr lang="en-US" sz="1200" dirty="0" err="1">
-                <a:solidFill>
-                  <a:srgbClr val="1A1A1A"/>
-                </a:solidFill>
-                <a:latin typeface="Calibri" pitchFamily="34" charset="0"/>
-                <a:ea typeface="Calibri" pitchFamily="34" charset="-122"/>
-                <a:cs typeface="Calibri" pitchFamily="34" charset="-120"/>
-              </a:rPr>
-              <a:t>документов</a:t>
+              <a:t>:</a:t>
+            </a:r>
+            <a:r>
+              <a:rPr lang="ru-RU" sz="1200" dirty="0">
+                <a:solidFill>
+                  <a:srgbClr val="1A1A1A"/>
+                </a:solidFill>
+                <a:latin typeface="Calibri" pitchFamily="34" charset="0"/>
+                <a:ea typeface="Calibri" pitchFamily="34" charset="-122"/>
+                <a:cs typeface="Calibri" pitchFamily="34" charset="-120"/>
+              </a:rPr>
+              <a:t> текст режется на </a:t>
+            </a:r>
+            <a:r>
+              <a:rPr lang="ru-RU" sz="1200" dirty="0" err="1">
+                <a:solidFill>
+                  <a:srgbClr val="1A1A1A"/>
+                </a:solidFill>
+                <a:latin typeface="Calibri" pitchFamily="34" charset="0"/>
+                <a:ea typeface="Calibri" pitchFamily="34" charset="-122"/>
+                <a:cs typeface="Calibri" pitchFamily="34" charset="-120"/>
+              </a:rPr>
+              <a:t>чанки</a:t>
+            </a:r>
+            <a:r>
+              <a:rPr lang="ru-RU" sz="1200" dirty="0">
+                <a:solidFill>
+                  <a:srgbClr val="1A1A1A"/>
+                </a:solidFill>
+                <a:latin typeface="Calibri" pitchFamily="34" charset="0"/>
+                <a:ea typeface="Calibri" pitchFamily="34" charset="-122"/>
+                <a:cs typeface="Calibri" pitchFamily="34" charset="-120"/>
+              </a:rPr>
+              <a:t> с перекрытием, </a:t>
+            </a:r>
+            <a:r>
+              <a:rPr lang="ru-RU" sz="1200" dirty="0" err="1">
+                <a:solidFill>
+                  <a:srgbClr val="1A1A1A"/>
+                </a:solidFill>
+                <a:latin typeface="Calibri" pitchFamily="34" charset="0"/>
+                <a:ea typeface="Calibri" pitchFamily="34" charset="-122"/>
+                <a:cs typeface="Calibri" pitchFamily="34" charset="-120"/>
+              </a:rPr>
+              <a:t>эмбеддинги</a:t>
+            </a:r>
+            <a:r>
+              <a:rPr lang="ru-RU" sz="1200" dirty="0">
+                <a:solidFill>
+                  <a:srgbClr val="1A1A1A"/>
+                </a:solidFill>
+                <a:latin typeface="Calibri" pitchFamily="34" charset="0"/>
+                <a:ea typeface="Calibri" pitchFamily="34" charset="-122"/>
+                <a:cs typeface="Calibri" pitchFamily="34" charset="-120"/>
+              </a:rPr>
+              <a:t> внутри </a:t>
+            </a:r>
+            <a:r>
+              <a:rPr lang="ru-RU" sz="1200" dirty="0" err="1">
+                <a:solidFill>
+                  <a:srgbClr val="1A1A1A"/>
+                </a:solidFill>
+                <a:latin typeface="Calibri" pitchFamily="34" charset="0"/>
+                <a:ea typeface="Calibri" pitchFamily="34" charset="-122"/>
+                <a:cs typeface="Calibri" pitchFamily="34" charset="-120"/>
+              </a:rPr>
+              <a:t>чанка</a:t>
+            </a:r>
+            <a:r>
+              <a:rPr lang="ru-RU" sz="1200" dirty="0">
+                <a:solidFill>
+                  <a:srgbClr val="1A1A1A"/>
+                </a:solidFill>
+                <a:latin typeface="Calibri" pitchFamily="34" charset="0"/>
+                <a:ea typeface="Calibri" pitchFamily="34" charset="-122"/>
+                <a:cs typeface="Calibri" pitchFamily="34" charset="-120"/>
+              </a:rPr>
+              <a:t> усредняются, потом усредняются между </a:t>
+            </a:r>
+            <a:r>
+              <a:rPr lang="ru-RU" sz="1200" dirty="0" err="1">
+                <a:solidFill>
+                  <a:srgbClr val="1A1A1A"/>
+                </a:solidFill>
+                <a:latin typeface="Calibri" pitchFamily="34" charset="0"/>
+                <a:ea typeface="Calibri" pitchFamily="34" charset="-122"/>
+                <a:cs typeface="Calibri" pitchFamily="34" charset="-120"/>
+              </a:rPr>
+              <a:t>чанками</a:t>
             </a:r>
             <a:endParaRPr lang="en-US" sz="1200" dirty="0"/>
           </a:p>
@@ -14643,7 +18563,62 @@
                 <a:ea typeface="Calibri" pitchFamily="34" charset="-122"/>
                 <a:cs typeface="Calibri" pitchFamily="34" charset="-120"/>
               </a:rPr>
-              <a:t>классификатору</a:t>
+              <a:t>классификатору. Лучший результат на </a:t>
+            </a:r>
+            <a:r>
+              <a:rPr lang="en-US" sz="1000" i="1" dirty="0" err="1">
+                <a:solidFill>
+                  <a:srgbClr val="1A1A1A"/>
+                </a:solidFill>
+                <a:latin typeface="Calibri" pitchFamily="34" charset="0"/>
+                <a:ea typeface="Calibri" pitchFamily="34" charset="-122"/>
+                <a:cs typeface="Calibri" pitchFamily="34" charset="-120"/>
+              </a:rPr>
+              <a:t>ruRoberta</a:t>
+            </a:r>
+            <a:r>
+              <a:rPr lang="en-US" sz="1000" i="1" dirty="0">
+                <a:solidFill>
+                  <a:srgbClr val="1A1A1A"/>
+                </a:solidFill>
+                <a:latin typeface="Calibri" pitchFamily="34" charset="0"/>
+                <a:ea typeface="Calibri" pitchFamily="34" charset="-122"/>
+                <a:cs typeface="Calibri" pitchFamily="34" charset="-120"/>
+              </a:rPr>
+              <a:t>-large </a:t>
+            </a:r>
+            <a:r>
+              <a:rPr lang="ru-RU" sz="1000" i="1" dirty="0">
+                <a:solidFill>
+                  <a:srgbClr val="1A1A1A"/>
+                </a:solidFill>
+                <a:latin typeface="Calibri" pitchFamily="34" charset="0"/>
+                <a:ea typeface="Calibri" pitchFamily="34" charset="-122"/>
+                <a:cs typeface="Calibri" pitchFamily="34" charset="-120"/>
+              </a:rPr>
+              <a:t>с </a:t>
+            </a:r>
+            <a:r>
+              <a:rPr lang="en-US" sz="1000" i="1" dirty="0" err="1">
+                <a:solidFill>
+                  <a:srgbClr val="1A1A1A"/>
+                </a:solidFill>
+                <a:latin typeface="Calibri" pitchFamily="34" charset="0"/>
+                <a:ea typeface="Calibri" pitchFamily="34" charset="-122"/>
+                <a:cs typeface="Calibri" pitchFamily="34" charset="-120"/>
+              </a:rPr>
+              <a:t>chunkmean</a:t>
+            </a:r>
+            <a:r>
+              <a:rPr lang="ru-RU" sz="1000" i="1" dirty="0">
+                <a:solidFill>
+                  <a:srgbClr val="1A1A1A"/>
+                </a:solidFill>
+                <a:latin typeface="Calibri" pitchFamily="34" charset="0"/>
+                <a:ea typeface="Calibri" pitchFamily="34" charset="-122"/>
+                <a:cs typeface="Calibri" pitchFamily="34" charset="-120"/>
+              </a:rPr>
+              <a:t>-головой и аугментацией</a:t>
             </a:r>
             <a:endParaRPr lang="en-US" sz="1000" dirty="0"/>
           </a:p>

--- a/defence/vkr_defense.pptx
+++ b/defence/vkr_defense.pptx
@@ -2558,7 +2558,128 @@
                 <a:ea typeface="Calibri" pitchFamily="34" charset="-122"/>
                 <a:cs typeface="Calibri" pitchFamily="34" charset="-120"/>
               </a:rPr>
-              <a:t>Sentence-BERT для извлечения эмбеддингов</a:t>
+              <a:t>sentence-BERT для </a:t>
+            </a:r>
+            <a:r>
+              <a:rPr lang="en-US" sz="1200" dirty="0" err="1">
+                <a:solidFill>
+                  <a:srgbClr val="1A1A1A"/>
+                </a:solidFill>
+                <a:latin typeface="Calibri" pitchFamily="34" charset="0"/>
+                <a:ea typeface="Calibri" pitchFamily="34" charset="-122"/>
+                <a:cs typeface="Calibri" pitchFamily="34" charset="-120"/>
+              </a:rPr>
+              <a:t>извлечения</a:t>
+            </a:r>
+            <a:r>
+              <a:rPr lang="en-US" sz="1200" dirty="0">
+                <a:solidFill>
+                  <a:srgbClr val="1A1A1A"/>
+                </a:solidFill>
+                <a:latin typeface="Calibri" pitchFamily="34" charset="0"/>
+                <a:ea typeface="Calibri" pitchFamily="34" charset="-122"/>
+                <a:cs typeface="Calibri" pitchFamily="34" charset="-120"/>
+              </a:rPr>
+              <a:t> </a:t>
+            </a:r>
+            <a:r>
+              <a:rPr lang="en-US" sz="1200" dirty="0" err="1">
+                <a:solidFill>
+                  <a:srgbClr val="1A1A1A"/>
+                </a:solidFill>
+                <a:latin typeface="Calibri" pitchFamily="34" charset="0"/>
+                <a:ea typeface="Calibri" pitchFamily="34" charset="-122"/>
+                <a:cs typeface="Calibri" pitchFamily="34" charset="-120"/>
+              </a:rPr>
+              <a:t>эмбеддингов</a:t>
+            </a:r>
+            <a:r>
+              <a:rPr lang="en-US" sz="1200" dirty="0">
+                <a:solidFill>
+                  <a:srgbClr val="1A1A1A"/>
+                </a:solidFill>
+                <a:latin typeface="Calibri" pitchFamily="34" charset="0"/>
+                <a:ea typeface="Calibri" pitchFamily="34" charset="-122"/>
+                <a:cs typeface="Calibri" pitchFamily="34" charset="-120"/>
+              </a:rPr>
+              <a:t>: </a:t>
+            </a:r>
+            <a:r>
+              <a:rPr lang="ru-RU" sz="1200" dirty="0">
+                <a:solidFill>
+                  <a:srgbClr val="1A1A1A"/>
+                </a:solidFill>
+                <a:latin typeface="Calibri" pitchFamily="34" charset="0"/>
+                <a:ea typeface="Calibri" pitchFamily="34" charset="-122"/>
+                <a:cs typeface="Calibri" pitchFamily="34" charset="-120"/>
+              </a:rPr>
+              <a:t>база </a:t>
+            </a:r>
+            <a:r>
+              <a:rPr lang="en-US" sz="1200" dirty="0" err="1">
+                <a:solidFill>
+                  <a:srgbClr val="1A1A1A"/>
+                </a:solidFill>
+                <a:latin typeface="Calibri" pitchFamily="34" charset="0"/>
+                <a:ea typeface="Calibri" pitchFamily="34" charset="-122"/>
+                <a:cs typeface="Calibri" pitchFamily="34" charset="-120"/>
+              </a:rPr>
+              <a:t>ruRoberta</a:t>
+            </a:r>
+            <a:r>
+              <a:rPr lang="en-US" sz="1200" dirty="0">
+                <a:solidFill>
+                  <a:srgbClr val="1A1A1A"/>
+                </a:solidFill>
+                <a:latin typeface="Calibri" pitchFamily="34" charset="0"/>
+                <a:ea typeface="Calibri" pitchFamily="34" charset="-122"/>
+                <a:cs typeface="Calibri" pitchFamily="34" charset="-120"/>
+              </a:rPr>
+              <a:t>-large, </a:t>
+            </a:r>
+            <a:r>
+              <a:rPr lang="en-US" sz="1200" dirty="0" err="1">
+                <a:solidFill>
+                  <a:srgbClr val="1A1A1A"/>
+                </a:solidFill>
+                <a:latin typeface="Calibri" pitchFamily="34" charset="0"/>
+                <a:ea typeface="Calibri" pitchFamily="34" charset="-122"/>
+                <a:cs typeface="Calibri" pitchFamily="34" charset="-120"/>
+              </a:rPr>
+              <a:t>MultipleNegativesRankingLoss</a:t>
+            </a:r>
+            <a:r>
+              <a:rPr lang="ru-RU" sz="1200" dirty="0">
+                <a:solidFill>
+                  <a:srgbClr val="1A1A1A"/>
+                </a:solidFill>
+                <a:latin typeface="Calibri" pitchFamily="34" charset="0"/>
+                <a:ea typeface="Calibri" pitchFamily="34" charset="-122"/>
+                <a:cs typeface="Calibri" pitchFamily="34" charset="-120"/>
+              </a:rPr>
+              <a:t> </a:t>
+            </a:r>
+            <a:r>
+              <a:rPr lang="ru-RU" sz="1200" dirty="0" err="1">
+                <a:solidFill>
+                  <a:srgbClr val="1A1A1A"/>
+                </a:solidFill>
+                <a:latin typeface="Calibri" pitchFamily="34" charset="0"/>
+                <a:ea typeface="Calibri" pitchFamily="34" charset="-122"/>
+                <a:cs typeface="Calibri" pitchFamily="34" charset="-120"/>
+              </a:rPr>
+              <a:t>контрастивный</a:t>
+            </a:r>
+            <a:r>
+              <a:rPr lang="en-US" sz="1200" dirty="0">
+                <a:solidFill>
+                  <a:srgbClr val="1A1A1A"/>
+                </a:solidFill>
+                <a:latin typeface="Calibri" pitchFamily="34" charset="0"/>
+                <a:ea typeface="Calibri" pitchFamily="34" charset="-122"/>
+                <a:cs typeface="Calibri" pitchFamily="34" charset="-120"/>
+              </a:rPr>
+              <a:t> </a:t>
             </a:r>
             <a:endParaRPr lang="en-US" sz="1200" dirty="0"/>
           </a:p>
@@ -2579,9 +2700,30 @@
                 <a:ea typeface="Calibri" pitchFamily="34" charset="-122"/>
                 <a:cs typeface="Calibri" pitchFamily="34" charset="-120"/>
               </a:rPr>
-              <a:t>доменная адаптация эмбеддера на train (custom-эмбеддер)</a:t>
-            </a:r>
-            <a:endParaRPr lang="en-US" sz="1200" dirty="0"/>
+              <a:t>доменная адаптация эмбеддера </a:t>
+            </a:r>
+            <a:r>
+              <a:rPr lang="en-US" sz="1200" dirty="0" err="1">
+                <a:solidFill>
+                  <a:srgbClr val="1A1A1A"/>
+                </a:solidFill>
+                <a:latin typeface="Calibri" pitchFamily="34" charset="0"/>
+                <a:ea typeface="Calibri" pitchFamily="34" charset="-122"/>
+                <a:cs typeface="Calibri" pitchFamily="34" charset="-120"/>
+              </a:rPr>
+              <a:t>на</a:t>
+            </a:r>
+            <a:r>
+              <a:rPr lang="en-US" sz="1200" dirty="0">
+                <a:solidFill>
+                  <a:srgbClr val="1A1A1A"/>
+                </a:solidFill>
+                <a:latin typeface="Calibri" pitchFamily="34" charset="0"/>
+                <a:ea typeface="Calibri" pitchFamily="34" charset="-122"/>
+                <a:cs typeface="Calibri" pitchFamily="34" charset="-120"/>
+              </a:rPr>
+              <a:t> train</a:t>
+            </a:r>
           </a:p>
           <a:p>
             <a:pPr marL="342900" indent="-342900">
@@ -2600,7 +2742,113 @@
                 <a:ea typeface="Calibri" pitchFamily="34" charset="-122"/>
                 <a:cs typeface="Calibri" pitchFamily="34" charset="-120"/>
               </a:rPr>
-              <a:t>Cosine-Centroid: классификация по близости к центроиду класса</a:t>
+              <a:t>cosine-centroid(</a:t>
+            </a:r>
+            <a:r>
+              <a:rPr lang="ru-RU" sz="1200" dirty="0">
+                <a:solidFill>
+                  <a:srgbClr val="1A1A1A"/>
+                </a:solidFill>
+                <a:latin typeface="Calibri" pitchFamily="34" charset="0"/>
+                <a:ea typeface="Calibri" pitchFamily="34" charset="-122"/>
+                <a:cs typeface="Calibri" pitchFamily="34" charset="-120"/>
+              </a:rPr>
+              <a:t>робастный</a:t>
+            </a:r>
+            <a:r>
+              <a:rPr lang="en-US" sz="1200" dirty="0">
+                <a:solidFill>
+                  <a:srgbClr val="1A1A1A"/>
+                </a:solidFill>
+                <a:latin typeface="Calibri" pitchFamily="34" charset="0"/>
+                <a:ea typeface="Calibri" pitchFamily="34" charset="-122"/>
+                <a:cs typeface="Calibri" pitchFamily="34" charset="-120"/>
+              </a:rPr>
+              <a:t>): классификация по близости к </a:t>
+            </a:r>
+            <a:r>
+              <a:rPr lang="en-US" sz="1200" dirty="0" err="1">
+                <a:solidFill>
+                  <a:srgbClr val="1A1A1A"/>
+                </a:solidFill>
+                <a:latin typeface="Calibri" pitchFamily="34" charset="0"/>
+                <a:ea typeface="Calibri" pitchFamily="34" charset="-122"/>
+                <a:cs typeface="Calibri" pitchFamily="34" charset="-120"/>
+              </a:rPr>
+              <a:t>центроиду</a:t>
+            </a:r>
+            <a:r>
+              <a:rPr lang="en-US" sz="1200" dirty="0">
+                <a:solidFill>
+                  <a:srgbClr val="1A1A1A"/>
+                </a:solidFill>
+                <a:latin typeface="Calibri" pitchFamily="34" charset="0"/>
+                <a:ea typeface="Calibri" pitchFamily="34" charset="-122"/>
+                <a:cs typeface="Calibri" pitchFamily="34" charset="-120"/>
+              </a:rPr>
+              <a:t> </a:t>
+            </a:r>
+            <a:r>
+              <a:rPr lang="en-US" sz="1200" dirty="0" err="1">
+                <a:solidFill>
+                  <a:srgbClr val="1A1A1A"/>
+                </a:solidFill>
+                <a:latin typeface="Calibri" pitchFamily="34" charset="0"/>
+                <a:ea typeface="Calibri" pitchFamily="34" charset="-122"/>
+                <a:cs typeface="Calibri" pitchFamily="34" charset="-120"/>
+              </a:rPr>
+              <a:t>класса</a:t>
+            </a:r>
+            <a:endParaRPr lang="ru-RU" sz="1200" dirty="0">
+              <a:solidFill>
+                <a:srgbClr val="1A1A1A"/>
+              </a:solidFill>
+              <a:latin typeface="Calibri" pitchFamily="34" charset="0"/>
+              <a:ea typeface="Calibri" pitchFamily="34" charset="-122"/>
+              <a:cs typeface="Calibri" pitchFamily="34" charset="-120"/>
+            </a:endParaRPr>
+          </a:p>
+          <a:p>
+            <a:pPr marL="342900" indent="-342900">
+              <a:spcAft>
+                <a:spcPts val="500"/>
+              </a:spcAft>
+              <a:buSzPct val="100000"/>
+              <a:buChar char="•"/>
+            </a:pPr>
+            <a:r>
+              <a:rPr lang="en-US" sz="1200" dirty="0"/>
+              <a:t>cosine-nearest(soft-vote): top-k</a:t>
+            </a:r>
+            <a:r>
+              <a:rPr lang="ru-RU" sz="1200" dirty="0"/>
+              <a:t> ближайших</a:t>
+            </a:r>
+            <a:endParaRPr lang="en-US" sz="1200" dirty="0"/>
+          </a:p>
+          <a:p>
+            <a:pPr marL="342900" indent="-342900">
+              <a:spcAft>
+                <a:spcPts val="500"/>
+              </a:spcAft>
+              <a:buSzPct val="100000"/>
+              <a:buChar char="•"/>
+            </a:pPr>
+            <a:r>
+              <a:rPr lang="en-US" sz="1200" dirty="0" err="1"/>
+              <a:t>centroid+nearest</a:t>
+            </a:r>
+            <a:r>
+              <a:rPr lang="ru-RU" sz="1200" dirty="0"/>
+              <a:t> </a:t>
+            </a:r>
+            <a:r>
+              <a:rPr lang="en-US" sz="1200" dirty="0"/>
+              <a:t>ensemble:</a:t>
+            </a:r>
+            <a:r>
+              <a:rPr lang="ru-RU" sz="1200" dirty="0"/>
+              <a:t> взвешенная сумма двух выше</a:t>
             </a:r>
             <a:endParaRPr lang="en-US" sz="1200" dirty="0"/>
           </a:p>
@@ -9996,6 +10244,17 @@
               <a:buNone/>
             </a:pPr>
             <a:r>
+              <a:rPr lang="ru-RU" sz="1100" dirty="0">
+                <a:solidFill>
+                  <a:srgbClr val="1A1A1A"/>
+                </a:solidFill>
+                <a:latin typeface="Calibri" pitchFamily="34" charset="0"/>
+                <a:ea typeface="Calibri" pitchFamily="34" charset="-122"/>
+                <a:cs typeface="Calibri" pitchFamily="34" charset="-120"/>
+              </a:rPr>
+              <a:t>Для </a:t>
+            </a:r>
+            <a:r>
               <a:rPr lang="en-US" sz="1100" dirty="0">
                 <a:solidFill>
                   <a:srgbClr val="1A1A1A"/>
@@ -10004,7 +10263,62 @@
                 <a:ea typeface="Calibri" pitchFamily="34" charset="-122"/>
                 <a:cs typeface="Calibri" pitchFamily="34" charset="-120"/>
               </a:rPr>
-              <a:t>помогают слабым конфигурациям, ухудшают сильные</a:t>
+              <a:t>BERT </a:t>
+            </a:r>
+            <a:r>
+              <a:rPr lang="ru-RU" sz="1100" dirty="0">
+                <a:solidFill>
+                  <a:srgbClr val="1A1A1A"/>
+                </a:solidFill>
+                <a:latin typeface="Calibri" pitchFamily="34" charset="0"/>
+                <a:ea typeface="Calibri" pitchFamily="34" charset="-122"/>
+                <a:cs typeface="Calibri" pitchFamily="34" charset="-120"/>
+              </a:rPr>
+              <a:t>с классификационной головой, аугментация даёт прирост, для </a:t>
+            </a:r>
+            <a:r>
+              <a:rPr lang="en-US" sz="1100" dirty="0" err="1">
+                <a:solidFill>
+                  <a:srgbClr val="1A1A1A"/>
+                </a:solidFill>
+                <a:latin typeface="Calibri" pitchFamily="34" charset="0"/>
+                <a:ea typeface="Calibri" pitchFamily="34" charset="-122"/>
+                <a:cs typeface="Calibri" pitchFamily="34" charset="-120"/>
+              </a:rPr>
+              <a:t>tf-idf</a:t>
+            </a:r>
+            <a:r>
+              <a:rPr lang="en-US" sz="1100" dirty="0">
+                <a:solidFill>
+                  <a:srgbClr val="1A1A1A"/>
+                </a:solidFill>
+                <a:latin typeface="Calibri" pitchFamily="34" charset="0"/>
+                <a:ea typeface="Calibri" pitchFamily="34" charset="-122"/>
+                <a:cs typeface="Calibri" pitchFamily="34" charset="-120"/>
+              </a:rPr>
+              <a:t> </a:t>
+            </a:r>
+            <a:r>
+              <a:rPr lang="ru-RU" sz="1100" dirty="0">
+                <a:solidFill>
+                  <a:srgbClr val="1A1A1A"/>
+                </a:solidFill>
+                <a:latin typeface="Calibri" pitchFamily="34" charset="0"/>
+                <a:ea typeface="Calibri" pitchFamily="34" charset="-122"/>
+                <a:cs typeface="Calibri" pitchFamily="34" charset="-120"/>
+              </a:rPr>
+              <a:t>прямой выигрыш не виден</a:t>
+            </a:r>
+            <a:r>
+              <a:rPr lang="en-US" sz="1100" dirty="0">
+                <a:solidFill>
+                  <a:srgbClr val="1A1A1A"/>
+                </a:solidFill>
+                <a:latin typeface="Calibri" pitchFamily="34" charset="0"/>
+                <a:ea typeface="Calibri" pitchFamily="34" charset="-122"/>
+                <a:cs typeface="Calibri" pitchFamily="34" charset="-120"/>
+              </a:rPr>
+              <a:t>.</a:t>
             </a:r>
             <a:endParaRPr lang="en-US" sz="1100" dirty="0"/>
           </a:p>
@@ -10775,8 +11089,8 @@
         </p:nvSpPr>
         <p:spPr>
           <a:xfrm>
-            <a:off x="365760" y="1005840"/>
-            <a:ext cx="5120640" cy="365760"/>
+            <a:off x="2701864" y="1037155"/>
+            <a:ext cx="3047583" cy="365760"/>
           </a:xfrm>
           <a:prstGeom prst="rect">
             <a:avLst/>
@@ -10788,7 +11102,7 @@
           <a:bodyPr wrap="square" lIns="0" tIns="0" rIns="0" bIns="0" rtlCol="0" anchor="ctr"/>
           <a:lstStyle/>
           <a:p>
-            <a:pPr marL="0" indent="0">
+            <a:pPr marL="0" indent="0" algn="ctr">
               <a:buNone/>
             </a:pPr>
             <a:r>
@@ -10814,7 +11128,7 @@
         </p:nvSpPr>
         <p:spPr>
           <a:xfrm>
-            <a:off x="365760" y="1371600"/>
+            <a:off x="2011680" y="1402915"/>
             <a:ext cx="5120640" cy="3200400"/>
           </a:xfrm>
           <a:prstGeom prst="rect">
@@ -11067,384 +11381,6 @@
               <a:t> модели классификации не адаптированы к доменной области и специфике документов. Ничего не известно про подразделения компании.</a:t>
             </a:r>
             <a:endParaRPr lang="en-US" sz="1300" dirty="0"/>
-          </a:p>
-        </p:txBody>
-      </p:sp>
-      <p:sp>
-        <p:nvSpPr>
-          <p:cNvPr id="6" name="Shape 4"/>
-          <p:cNvSpPr/>
-          <p:nvPr/>
-        </p:nvSpPr>
-        <p:spPr>
-          <a:xfrm>
-            <a:off x="5760720" y="1005840"/>
-            <a:ext cx="3017520" cy="3566160"/>
-          </a:xfrm>
-          <a:prstGeom prst="rect">
-            <a:avLst/>
-          </a:prstGeom>
-          <a:solidFill>
-            <a:srgbClr val="F4F6FA"/>
-          </a:solidFill>
-          <a:ln w="12700">
-            <a:solidFill>
-              <a:srgbClr val="D6DBE5"/>
-            </a:solidFill>
-            <a:prstDash val="solid"/>
-          </a:ln>
-        </p:spPr>
-        <p:txBody>
-          <a:bodyPr/>
-          <a:lstStyle/>
-          <a:p>
-            <a:endParaRPr lang="ru-RU" dirty="0"/>
-          </a:p>
-        </p:txBody>
-      </p:sp>
-      <p:sp>
-        <p:nvSpPr>
-          <p:cNvPr id="7" name="Text 5"/>
-          <p:cNvSpPr/>
-          <p:nvPr/>
-        </p:nvSpPr>
-        <p:spPr>
-          <a:xfrm>
-            <a:off x="5943600" y="1143000"/>
-            <a:ext cx="2743200" cy="320040"/>
-          </a:xfrm>
-          <a:prstGeom prst="rect">
-            <a:avLst/>
-          </a:prstGeom>
-          <a:noFill/>
-          <a:ln/>
-        </p:spPr>
-        <p:txBody>
-          <a:bodyPr wrap="square" lIns="0" tIns="0" rIns="0" bIns="0" rtlCol="0" anchor="ctr"/>
-          <a:lstStyle/>
-          <a:p>
-            <a:pPr marL="0" indent="0">
-              <a:buNone/>
-            </a:pPr>
-            <a:r>
-              <a:rPr lang="ru-RU" sz="1300" b="1" dirty="0">
-                <a:solidFill>
-                  <a:srgbClr val="0B5394"/>
-                </a:solidFill>
-                <a:latin typeface="Calibri" pitchFamily="34" charset="0"/>
-                <a:ea typeface="Calibri" pitchFamily="34" charset="-122"/>
-                <a:cs typeface="Calibri" pitchFamily="34" charset="-120"/>
-              </a:rPr>
-              <a:t>Актуальность</a:t>
-            </a:r>
-            <a:endParaRPr lang="en-US" sz="1300" dirty="0"/>
-          </a:p>
-        </p:txBody>
-      </p:sp>
-      <p:sp>
-        <p:nvSpPr>
-          <p:cNvPr id="8" name="Text 6"/>
-          <p:cNvSpPr/>
-          <p:nvPr/>
-        </p:nvSpPr>
-        <p:spPr>
-          <a:xfrm>
-            <a:off x="5943600" y="1554480"/>
-            <a:ext cx="2743200" cy="411480"/>
-          </a:xfrm>
-          <a:prstGeom prst="rect">
-            <a:avLst/>
-          </a:prstGeom>
-          <a:noFill/>
-          <a:ln/>
-        </p:spPr>
-        <p:txBody>
-          <a:bodyPr wrap="square" lIns="0" tIns="0" rIns="0" bIns="0" rtlCol="0" anchor="ctr"/>
-          <a:lstStyle/>
-          <a:p>
-            <a:pPr marL="0" indent="0">
-              <a:buNone/>
-            </a:pPr>
-            <a:r>
-              <a:rPr lang="ru-RU" sz="2200" b="1" dirty="0">
-                <a:solidFill>
-                  <a:srgbClr val="0B5394"/>
-                </a:solidFill>
-                <a:latin typeface="Calibri" pitchFamily="34" charset="0"/>
-                <a:ea typeface="Calibri" pitchFamily="34" charset="-122"/>
-                <a:cs typeface="Calibri" pitchFamily="34" charset="-120"/>
-              </a:rPr>
-              <a:t>цифровизация</a:t>
-            </a:r>
-            <a:endParaRPr lang="en-US" sz="2200" dirty="0"/>
-          </a:p>
-        </p:txBody>
-      </p:sp>
-      <p:sp>
-        <p:nvSpPr>
-          <p:cNvPr id="9" name="Text 7"/>
-          <p:cNvSpPr/>
-          <p:nvPr/>
-        </p:nvSpPr>
-        <p:spPr>
-          <a:xfrm>
-            <a:off x="5943600" y="1965960"/>
-            <a:ext cx="2743200" cy="274320"/>
-          </a:xfrm>
-          <a:prstGeom prst="rect">
-            <a:avLst/>
-          </a:prstGeom>
-          <a:noFill/>
-          <a:ln/>
-        </p:spPr>
-        <p:txBody>
-          <a:bodyPr wrap="square" lIns="0" tIns="0" rIns="0" bIns="0" rtlCol="0" anchor="ctr"/>
-          <a:lstStyle/>
-          <a:p>
-            <a:pPr marL="0" indent="0">
-              <a:buNone/>
-            </a:pPr>
-            <a:r>
-              <a:rPr lang="ru-RU" sz="1100" dirty="0">
-                <a:solidFill>
-                  <a:srgbClr val="5C5C5C"/>
-                </a:solidFill>
-                <a:latin typeface="Calibri" pitchFamily="34" charset="0"/>
-                <a:ea typeface="Calibri" pitchFamily="34" charset="-122"/>
-                <a:cs typeface="Calibri" pitchFamily="34" charset="-120"/>
-              </a:rPr>
-              <a:t>увеличивается</a:t>
-            </a:r>
-            <a:endParaRPr lang="en-US" sz="1100" dirty="0"/>
-          </a:p>
-        </p:txBody>
-      </p:sp>
-      <p:sp>
-        <p:nvSpPr>
-          <p:cNvPr id="10" name="Text 8"/>
-          <p:cNvSpPr/>
-          <p:nvPr/>
-        </p:nvSpPr>
-        <p:spPr>
-          <a:xfrm>
-            <a:off x="5943600" y="2331720"/>
-            <a:ext cx="2743200" cy="411480"/>
-          </a:xfrm>
-          <a:prstGeom prst="rect">
-            <a:avLst/>
-          </a:prstGeom>
-          <a:noFill/>
-          <a:ln/>
-        </p:spPr>
-        <p:txBody>
-          <a:bodyPr wrap="square" lIns="0" tIns="0" rIns="0" bIns="0" rtlCol="0" anchor="ctr"/>
-          <a:lstStyle/>
-          <a:p>
-            <a:pPr marL="0" indent="0">
-              <a:buNone/>
-            </a:pPr>
-            <a:r>
-              <a:rPr lang="ru-RU" sz="2200" b="1" dirty="0">
-                <a:solidFill>
-                  <a:srgbClr val="0B5394"/>
-                </a:solidFill>
-                <a:latin typeface="Calibri" pitchFamily="34" charset="0"/>
-                <a:cs typeface="Calibri" pitchFamily="34" charset="-120"/>
-              </a:rPr>
-              <a:t>человеческий ресурс</a:t>
-            </a:r>
-            <a:endParaRPr lang="en-US" sz="2200" dirty="0"/>
-          </a:p>
-        </p:txBody>
-      </p:sp>
-      <p:sp>
-        <p:nvSpPr>
-          <p:cNvPr id="11" name="Text 9"/>
-          <p:cNvSpPr/>
-          <p:nvPr/>
-        </p:nvSpPr>
-        <p:spPr>
-          <a:xfrm>
-            <a:off x="5943600" y="2743200"/>
-            <a:ext cx="2743200" cy="274320"/>
-          </a:xfrm>
-          <a:prstGeom prst="rect">
-            <a:avLst/>
-          </a:prstGeom>
-          <a:noFill/>
-          <a:ln/>
-        </p:spPr>
-        <p:txBody>
-          <a:bodyPr wrap="square" lIns="0" tIns="0" rIns="0" bIns="0" rtlCol="0" anchor="ctr"/>
-          <a:lstStyle/>
-          <a:p>
-            <a:pPr marL="0" indent="0">
-              <a:buNone/>
-            </a:pPr>
-            <a:r>
-              <a:rPr lang="ru-RU" sz="1100" dirty="0">
-                <a:solidFill>
-                  <a:srgbClr val="5C5C5C"/>
-                </a:solidFill>
-                <a:latin typeface="Calibri" pitchFamily="34" charset="0"/>
-                <a:ea typeface="Calibri" pitchFamily="34" charset="-122"/>
-                <a:cs typeface="Calibri" pitchFamily="34" charset="-120"/>
-              </a:rPr>
-              <a:t>уменьшается</a:t>
-            </a:r>
-            <a:endParaRPr lang="en-US" sz="1100" dirty="0"/>
-          </a:p>
-        </p:txBody>
-      </p:sp>
-      <p:sp>
-        <p:nvSpPr>
-          <p:cNvPr id="12" name="Text 10"/>
-          <p:cNvSpPr/>
-          <p:nvPr/>
-        </p:nvSpPr>
-        <p:spPr>
-          <a:xfrm>
-            <a:off x="5943600" y="3108960"/>
-            <a:ext cx="2743200" cy="411480"/>
-          </a:xfrm>
-          <a:prstGeom prst="rect">
-            <a:avLst/>
-          </a:prstGeom>
-          <a:noFill/>
-          <a:ln/>
-        </p:spPr>
-        <p:txBody>
-          <a:bodyPr wrap="square" lIns="0" tIns="0" rIns="0" bIns="0" rtlCol="0" anchor="ctr"/>
-          <a:lstStyle/>
-          <a:p>
-            <a:pPr marL="0" indent="0">
-              <a:buNone/>
-            </a:pPr>
-            <a:r>
-              <a:rPr lang="ru-RU" sz="2200" b="1" dirty="0">
-                <a:solidFill>
-                  <a:srgbClr val="0B5394"/>
-                </a:solidFill>
-                <a:latin typeface="Calibri" pitchFamily="34" charset="0"/>
-                <a:ea typeface="Calibri" pitchFamily="34" charset="-122"/>
-                <a:cs typeface="Calibri" pitchFamily="34" charset="-120"/>
-              </a:rPr>
-              <a:t>автоматизация</a:t>
-            </a:r>
-            <a:endParaRPr lang="en-US" sz="2200" dirty="0"/>
-          </a:p>
-        </p:txBody>
-      </p:sp>
-      <p:sp>
-        <p:nvSpPr>
-          <p:cNvPr id="13" name="Text 11"/>
-          <p:cNvSpPr/>
-          <p:nvPr/>
-        </p:nvSpPr>
-        <p:spPr>
-          <a:xfrm>
-            <a:off x="5943600" y="3520440"/>
-            <a:ext cx="2743200" cy="274320"/>
-          </a:xfrm>
-          <a:prstGeom prst="rect">
-            <a:avLst/>
-          </a:prstGeom>
-          <a:noFill/>
-          <a:ln/>
-        </p:spPr>
-        <p:txBody>
-          <a:bodyPr wrap="square" lIns="0" tIns="0" rIns="0" bIns="0" rtlCol="0" anchor="ctr"/>
-          <a:lstStyle/>
-          <a:p>
-            <a:pPr marL="0" indent="0">
-              <a:buNone/>
-            </a:pPr>
-            <a:r>
-              <a:rPr lang="ru-RU" sz="1100" dirty="0">
-                <a:solidFill>
-                  <a:srgbClr val="5C5C5C"/>
-                </a:solidFill>
-                <a:latin typeface="Calibri" pitchFamily="34" charset="0"/>
-                <a:ea typeface="Calibri" pitchFamily="34" charset="-122"/>
-                <a:cs typeface="Calibri" pitchFamily="34" charset="-120"/>
-              </a:rPr>
-              <a:t>эффективное решение</a:t>
-            </a:r>
-            <a:endParaRPr lang="en-US" sz="1100" dirty="0"/>
-          </a:p>
-        </p:txBody>
-      </p:sp>
-      <p:sp>
-        <p:nvSpPr>
-          <p:cNvPr id="14" name="Text 12"/>
-          <p:cNvSpPr/>
-          <p:nvPr/>
-        </p:nvSpPr>
-        <p:spPr>
-          <a:xfrm>
-            <a:off x="5943600" y="3886200"/>
-            <a:ext cx="2743200" cy="411480"/>
-          </a:xfrm>
-          <a:prstGeom prst="rect">
-            <a:avLst/>
-          </a:prstGeom>
-          <a:noFill/>
-          <a:ln/>
-        </p:spPr>
-        <p:txBody>
-          <a:bodyPr wrap="square" lIns="0" tIns="0" rIns="0" bIns="0" rtlCol="0" anchor="ctr"/>
-          <a:lstStyle/>
-          <a:p>
-            <a:r>
-              <a:rPr lang="ru-RU" sz="2200" b="1" dirty="0">
-                <a:solidFill>
-                  <a:srgbClr val="0B5394"/>
-                </a:solidFill>
-                <a:latin typeface="Calibri" pitchFamily="34" charset="0"/>
-                <a:ea typeface="Calibri" pitchFamily="34" charset="-122"/>
-                <a:cs typeface="Calibri" pitchFamily="34" charset="-120"/>
-              </a:rPr>
-              <a:t>распространение</a:t>
-            </a:r>
-            <a:endParaRPr lang="en-US" sz="2200" dirty="0"/>
-          </a:p>
-        </p:txBody>
-      </p:sp>
-      <p:sp>
-        <p:nvSpPr>
-          <p:cNvPr id="15" name="Text 13"/>
-          <p:cNvSpPr/>
-          <p:nvPr/>
-        </p:nvSpPr>
-        <p:spPr>
-          <a:xfrm>
-            <a:off x="5943600" y="4297680"/>
-            <a:ext cx="2743200" cy="274320"/>
-          </a:xfrm>
-          <a:prstGeom prst="rect">
-            <a:avLst/>
-          </a:prstGeom>
-          <a:noFill/>
-          <a:ln/>
-        </p:spPr>
-        <p:txBody>
-          <a:bodyPr wrap="square" lIns="0" tIns="0" rIns="0" bIns="0" rtlCol="0" anchor="ctr"/>
-          <a:lstStyle/>
-          <a:p>
-            <a:pPr marL="0" indent="0">
-              <a:buNone/>
-            </a:pPr>
-            <a:r>
-              <a:rPr lang="ru-RU" sz="1100" dirty="0">
-                <a:solidFill>
-                  <a:srgbClr val="5C5C5C"/>
-                </a:solidFill>
-                <a:latin typeface="Calibri" pitchFamily="34" charset="0"/>
-                <a:cs typeface="Calibri" pitchFamily="34" charset="-120"/>
-              </a:rPr>
-              <a:t>еще не повсеместное</a:t>
-            </a:r>
-            <a:endParaRPr lang="en-US" sz="1100" dirty="0"/>
           </a:p>
         </p:txBody>
       </p:sp>
